--- a/Clinical_Note_Retrieval_Exam.pptx
+++ b/Clinical_Note_Retrieval_Exam.pptx
@@ -3549,7 +3549,7 @@
         <p:spPr>
           <a:xfrm>
             <a:off x="457200" y="1005840"/>
-            <a:ext cx="5394960" cy="5349240"/>
+            <a:ext cx="5394960" cy="5212080"/>
           </a:xfrm>
           <a:prstGeom prst="rect">
             <a:avLst/>
@@ -3627,7 +3627,7 @@
         <p:spPr>
           <a:xfrm>
             <a:off x="640080" y="1600200"/>
-            <a:ext cx="5029200" cy="4572000"/>
+            <a:ext cx="5029200" cy="4389120"/>
           </a:xfrm>
           <a:prstGeom prst="rect">
             <a:avLst/>
@@ -3756,7 +3756,7 @@
         <p:spPr>
           <a:xfrm>
             <a:off x="6309360" y="1005840"/>
-            <a:ext cx="5577840" cy="5349240"/>
+            <a:ext cx="5577840" cy="5212080"/>
           </a:xfrm>
           <a:prstGeom prst="rect">
             <a:avLst/>
@@ -3834,7 +3834,7 @@
         <p:spPr>
           <a:xfrm>
             <a:off x="6492240" y="1600200"/>
-            <a:ext cx="5212080" cy="4572000"/>
+            <a:ext cx="5212080" cy="4389120"/>
           </a:xfrm>
           <a:prstGeom prst="rect">
             <a:avLst/>
@@ -3962,8 +3962,8 @@
         </p:nvSpPr>
         <p:spPr>
           <a:xfrm>
-            <a:off x="457200" y="6492240"/>
-            <a:ext cx="11430000" cy="274320"/>
+            <a:off x="457200" y="6291072"/>
+            <a:ext cx="10789920" cy="182880"/>
           </a:xfrm>
           <a:prstGeom prst="rect">
             <a:avLst/>
@@ -4285,7 +4285,7 @@
         <p:spPr>
           <a:xfrm>
             <a:off x="274320" y="1536192"/>
-            <a:ext cx="5577840" cy="5001768"/>
+            <a:ext cx="5577840" cy="4773168"/>
           </a:xfrm>
           <a:prstGeom prst="rect">
             <a:avLst/>
@@ -4328,7 +4328,7 @@
         <p:spPr>
           <a:xfrm>
             <a:off x="384048" y="1627632"/>
-            <a:ext cx="5358383" cy="4864607"/>
+            <a:ext cx="5358383" cy="4636007"/>
           </a:xfrm>
           <a:prstGeom prst="rect">
             <a:avLst/>
@@ -4580,7 +4580,7 @@
         <p:spPr>
           <a:xfrm>
             <a:off x="6126480" y="1536192"/>
-            <a:ext cx="5760720" cy="5001768"/>
+            <a:ext cx="5760720" cy="4773168"/>
           </a:xfrm>
           <a:prstGeom prst="rect">
             <a:avLst/>
@@ -4623,7 +4623,7 @@
         <p:spPr>
           <a:xfrm>
             <a:off x="6236208" y="1627632"/>
-            <a:ext cx="5541264" cy="4864607"/>
+            <a:ext cx="5541264" cy="4636007"/>
           </a:xfrm>
           <a:prstGeom prst="rect">
             <a:avLst/>
@@ -7616,7 +7616,7 @@
         <p:spPr>
           <a:xfrm>
             <a:off x="274320" y="3703320"/>
-            <a:ext cx="5669280" cy="2834640"/>
+            <a:ext cx="5669280" cy="2606040"/>
           </a:xfrm>
           <a:prstGeom prst="rect">
             <a:avLst/>
@@ -7694,7 +7694,7 @@
         <p:spPr>
           <a:xfrm>
             <a:off x="457200" y="4187952"/>
-            <a:ext cx="5303520" cy="2194560"/>
+            <a:ext cx="5303520" cy="2011680"/>
           </a:xfrm>
           <a:prstGeom prst="rect">
             <a:avLst/>
@@ -7808,7 +7808,7 @@
         <p:spPr>
           <a:xfrm>
             <a:off x="6217920" y="3703320"/>
-            <a:ext cx="5669280" cy="2834640"/>
+            <a:ext cx="5669280" cy="2606040"/>
           </a:xfrm>
           <a:prstGeom prst="rect">
             <a:avLst/>
@@ -7886,7 +7886,7 @@
         <p:spPr>
           <a:xfrm>
             <a:off x="6400800" y="4187952"/>
-            <a:ext cx="5303520" cy="2194560"/>
+            <a:ext cx="5303520" cy="2011680"/>
           </a:xfrm>
           <a:prstGeom prst="rect">
             <a:avLst/>
@@ -9057,7 +9057,7 @@
         </p:nvSpPr>
         <p:spPr>
           <a:xfrm>
-            <a:off x="274320" y="4754880"/>
+            <a:off x="274320" y="4663440"/>
             <a:ext cx="3749039" cy="347472"/>
           </a:xfrm>
           <a:prstGeom prst="rect">
@@ -9100,7 +9100,7 @@
         </p:nvSpPr>
         <p:spPr>
           <a:xfrm>
-            <a:off x="365760" y="4800600"/>
+            <a:off x="365760" y="4709159"/>
             <a:ext cx="3566159" cy="301752"/>
           </a:xfrm>
           <a:prstGeom prst="rect">
@@ -9135,8 +9135,8 @@
         </p:nvSpPr>
         <p:spPr>
           <a:xfrm>
-            <a:off x="274320" y="5102352"/>
-            <a:ext cx="3749039" cy="1481328"/>
+            <a:off x="274320" y="5010912"/>
+            <a:ext cx="3749039" cy="1298448"/>
           </a:xfrm>
           <a:prstGeom prst="rect">
             <a:avLst/>
@@ -9178,8 +9178,8 @@
         </p:nvSpPr>
         <p:spPr>
           <a:xfrm>
-            <a:off x="384048" y="5193792"/>
-            <a:ext cx="3529583" cy="1344168"/>
+            <a:off x="384048" y="5102351"/>
+            <a:ext cx="3529583" cy="1161288"/>
           </a:xfrm>
           <a:prstGeom prst="rect">
             <a:avLst/>
@@ -9277,7 +9277,7 @@
         </p:nvSpPr>
         <p:spPr>
           <a:xfrm>
-            <a:off x="4251959" y="4754880"/>
+            <a:off x="4251959" y="4663440"/>
             <a:ext cx="3749039" cy="347472"/>
           </a:xfrm>
           <a:prstGeom prst="rect">
@@ -9320,7 +9320,7 @@
         </p:nvSpPr>
         <p:spPr>
           <a:xfrm>
-            <a:off x="4343399" y="4800600"/>
+            <a:off x="4343399" y="4709159"/>
             <a:ext cx="3566159" cy="301752"/>
           </a:xfrm>
           <a:prstGeom prst="rect">
@@ -9355,8 +9355,8 @@
         </p:nvSpPr>
         <p:spPr>
           <a:xfrm>
-            <a:off x="4251959" y="5102352"/>
-            <a:ext cx="3749039" cy="1481328"/>
+            <a:off x="4251959" y="5010912"/>
+            <a:ext cx="3749039" cy="1298448"/>
           </a:xfrm>
           <a:prstGeom prst="rect">
             <a:avLst/>
@@ -9398,8 +9398,8 @@
         </p:nvSpPr>
         <p:spPr>
           <a:xfrm>
-            <a:off x="4361688" y="5193792"/>
-            <a:ext cx="3529583" cy="1344168"/>
+            <a:off x="4361688" y="5102351"/>
+            <a:ext cx="3529583" cy="1161288"/>
           </a:xfrm>
           <a:prstGeom prst="rect">
             <a:avLst/>
@@ -9497,7 +9497,7 @@
         </p:nvSpPr>
         <p:spPr>
           <a:xfrm>
-            <a:off x="8229600" y="4754880"/>
+            <a:off x="8229600" y="4663440"/>
             <a:ext cx="3749039" cy="347472"/>
           </a:xfrm>
           <a:prstGeom prst="rect">
@@ -9540,7 +9540,7 @@
         </p:nvSpPr>
         <p:spPr>
           <a:xfrm>
-            <a:off x="8321040" y="4800600"/>
+            <a:off x="8321040" y="4709159"/>
             <a:ext cx="3566159" cy="301752"/>
           </a:xfrm>
           <a:prstGeom prst="rect">
@@ -9575,8 +9575,8 @@
         </p:nvSpPr>
         <p:spPr>
           <a:xfrm>
-            <a:off x="8229600" y="5102352"/>
-            <a:ext cx="3749039" cy="1481328"/>
+            <a:off x="8229600" y="5010912"/>
+            <a:ext cx="3749039" cy="1298448"/>
           </a:xfrm>
           <a:prstGeom prst="rect">
             <a:avLst/>
@@ -9618,8 +9618,8 @@
         </p:nvSpPr>
         <p:spPr>
           <a:xfrm>
-            <a:off x="8339327" y="5193792"/>
-            <a:ext cx="3529583" cy="1344168"/>
+            <a:off x="8339327" y="5102351"/>
+            <a:ext cx="3529583" cy="1161288"/>
           </a:xfrm>
           <a:prstGeom prst="rect">
             <a:avLst/>
@@ -9927,7 +9927,7 @@
         <p:spPr>
           <a:xfrm>
             <a:off x="274320" y="1143000"/>
-            <a:ext cx="5486400" cy="5394960"/>
+            <a:ext cx="5486400" cy="5166360"/>
           </a:xfrm>
           <a:prstGeom prst="rect">
             <a:avLst/>
@@ -10005,7 +10005,7 @@
         <p:spPr>
           <a:xfrm>
             <a:off x="457200" y="1691640"/>
-            <a:ext cx="5120640" cy="4663440"/>
+            <a:ext cx="5120640" cy="4480560"/>
           </a:xfrm>
           <a:prstGeom prst="rect">
             <a:avLst/>
@@ -10507,7 +10507,7 @@
         <p:spPr>
           <a:xfrm>
             <a:off x="6035040" y="4187952"/>
-            <a:ext cx="5852160" cy="2350008"/>
+            <a:ext cx="5852160" cy="2121408"/>
           </a:xfrm>
           <a:prstGeom prst="rect">
             <a:avLst/>
@@ -10550,7 +10550,7 @@
         <p:spPr>
           <a:xfrm>
             <a:off x="6144768" y="4279392"/>
-            <a:ext cx="5632704" cy="2212848"/>
+            <a:ext cx="5632704" cy="1984248"/>
           </a:xfrm>
           <a:prstGeom prst="rect">
             <a:avLst/>
@@ -11104,7 +11104,7 @@
         <p:spPr>
           <a:xfrm>
             <a:off x="274320" y="3959352"/>
-            <a:ext cx="3566160" cy="2578608"/>
+            <a:ext cx="3566160" cy="2350008"/>
           </a:xfrm>
           <a:prstGeom prst="rect">
             <a:avLst/>
@@ -11147,7 +11147,7 @@
         <p:spPr>
           <a:xfrm>
             <a:off x="384048" y="4050791"/>
-            <a:ext cx="3346704" cy="2441448"/>
+            <a:ext cx="3346704" cy="2212848"/>
           </a:xfrm>
           <a:prstGeom prst="rect">
             <a:avLst/>
@@ -11324,7 +11324,7 @@
         <p:spPr>
           <a:xfrm>
             <a:off x="4114800" y="3959352"/>
-            <a:ext cx="3931920" cy="2578608"/>
+            <a:ext cx="3931920" cy="2350008"/>
           </a:xfrm>
           <a:prstGeom prst="rect">
             <a:avLst/>
@@ -11367,7 +11367,7 @@
         <p:spPr>
           <a:xfrm>
             <a:off x="4224528" y="4050791"/>
-            <a:ext cx="3712463" cy="2441448"/>
+            <a:ext cx="3712463" cy="2212848"/>
           </a:xfrm>
           <a:prstGeom prst="rect">
             <a:avLst/>
@@ -11559,7 +11559,7 @@
         <p:spPr>
           <a:xfrm>
             <a:off x="8321040" y="3959352"/>
-            <a:ext cx="3566160" cy="2578608"/>
+            <a:ext cx="3566160" cy="2350008"/>
           </a:xfrm>
           <a:prstGeom prst="rect">
             <a:avLst/>
@@ -11602,7 +11602,7 @@
         <p:spPr>
           <a:xfrm>
             <a:off x="8430767" y="4050791"/>
-            <a:ext cx="3346704" cy="2441448"/>
+            <a:ext cx="3346704" cy="2212848"/>
           </a:xfrm>
           <a:prstGeom prst="rect">
             <a:avLst/>
@@ -12647,8 +12647,8 @@
         </p:nvSpPr>
         <p:spPr>
           <a:xfrm>
-            <a:off x="274320" y="6126480"/>
-            <a:ext cx="11612880" cy="457200"/>
+            <a:off x="274320" y="6016752"/>
+            <a:ext cx="11612880" cy="292608"/>
           </a:xfrm>
           <a:prstGeom prst="rect">
             <a:avLst/>
@@ -12690,8 +12690,8 @@
         </p:nvSpPr>
         <p:spPr>
           <a:xfrm>
-            <a:off x="457200" y="6190488"/>
-            <a:ext cx="11247120" cy="347472"/>
+            <a:off x="457200" y="6044184"/>
+            <a:ext cx="11247120" cy="237744"/>
           </a:xfrm>
           <a:prstGeom prst="rect">
             <a:avLst/>
@@ -12707,7 +12707,7 @@
           <a:p>
             <a:pPr algn="ctr"/>
             <a:r>
-              <a:rPr sz="1300" b="1" i="0">
+              <a:rPr sz="1200" b="1" i="0">
                 <a:solidFill>
                   <a:srgbClr val="FFFFFF"/>
                 </a:solidFill>
@@ -14497,8 +14497,8 @@
         </p:nvSpPr>
         <p:spPr>
           <a:xfrm>
-            <a:off x="274320" y="5440680"/>
-            <a:ext cx="11612880" cy="1143000"/>
+            <a:off x="274320" y="5422392"/>
+            <a:ext cx="11612880" cy="886968"/>
           </a:xfrm>
           <a:prstGeom prst="rect">
             <a:avLst/>
@@ -14540,8 +14540,8 @@
         </p:nvSpPr>
         <p:spPr>
           <a:xfrm>
-            <a:off x="457200" y="5504688"/>
-            <a:ext cx="11247120" cy="1005840"/>
+            <a:off x="457200" y="5468112"/>
+            <a:ext cx="11247120" cy="768096"/>
           </a:xfrm>
           <a:prstGeom prst="rect">
             <a:avLst/>
@@ -14557,7 +14557,7 @@
           <a:p>
             <a:pPr algn="l"/>
             <a:r>
-              <a:rPr sz="1300" b="1" i="0">
+              <a:rPr sz="1200" b="1" i="0">
                 <a:solidFill>
                   <a:srgbClr val="007A87"/>
                 </a:solidFill>
@@ -14568,11 +14568,11 @@
           <a:p>
             <a:pPr algn="l">
               <a:spcBef>
-                <a:spcPts val="300"/>
-              </a:spcBef>
-            </a:pPr>
-            <a:r>
-              <a:rPr sz="1200" b="0" i="0">
+                <a:spcPts val="200"/>
+              </a:spcBef>
+            </a:pPr>
+            <a:r>
+              <a:rPr sz="1100" b="0" i="0">
                 <a:solidFill>
                   <a:srgbClr val="FFFFFF"/>
                 </a:solidFill>
@@ -14587,7 +14587,7 @@
               </a:spcBef>
             </a:pPr>
             <a:r>
-              <a:rPr sz="1100" b="0" i="0">
+              <a:rPr sz="1000" b="0" i="0">
                 <a:solidFill>
                   <a:srgbClr val="CCDDFF"/>
                 </a:solidFill>

--- a/Clinical_Note_Retrieval_Exam.pptx
+++ b/Clinical_Note_Retrieval_Exam.pptx
@@ -4158,7 +4158,7 @@
                   <a:srgbClr val="FFFFFF"/>
                 </a:solidFill>
               </a:rPr>
-              <a:t>Problem &amp; Motivation</a:t>
+              <a:t>Problem Statement</a:t>
             </a:r>
           </a:p>
         </p:txBody>
@@ -4193,7 +4193,7 @@
                   <a:srgbClr val="AACCDD"/>
                 </a:solidFill>
               </a:rPr>
-              <a:t>Why semantic retrieval matters in clinical settings</a:t>
+              <a:t>Problem 1 — Clinical Note Retrieval System</a:t>
             </a:r>
           </a:p>
         </p:txBody>
@@ -4271,7 +4271,7 @@
                   <a:srgbClr val="FFFFFF"/>
                 </a:solidFill>
               </a:rPr>
-              <a:t>The Clinical Challenge</a:t>
+              <a:t>Problem Statement</a:t>
             </a:r>
           </a:p>
         </p:txBody>
@@ -4285,7 +4285,7 @@
         <p:spPr>
           <a:xfrm>
             <a:off x="274320" y="1536192"/>
-            <a:ext cx="5577840" cy="4773168"/>
+            <a:ext cx="5577840" cy="2852928"/>
           </a:xfrm>
           <a:prstGeom prst="rect">
             <a:avLst/>
@@ -4328,7 +4328,7 @@
         <p:spPr>
           <a:xfrm>
             <a:off x="384048" y="1627632"/>
-            <a:ext cx="5358383" cy="4636007"/>
+            <a:ext cx="5358383" cy="2715768"/>
           </a:xfrm>
           <a:prstGeom prst="rect">
             <a:avLst/>
@@ -4353,7 +4353,7 @@
                   <a:srgbClr val="0A294A"/>
                 </a:solidFill>
               </a:rPr>
-              <a:t>Doctors spend ~30% of time searching past cases</a:t>
+              <a:t>The platform needs to help doctors quickly find</a:t>
             </a:r>
           </a:p>
           <a:p>
@@ -4368,6 +4368,36 @@
                   <a:srgbClr val="0A294A"/>
                 </a:solidFill>
               </a:rPr>
+              <a:t>relevant past cases from a large corpus of</a:t>
+            </a:r>
+          </a:p>
+          <a:p>
+            <a:pPr algn="l">
+              <a:spcBef>
+                <a:spcPts val="100"/>
+              </a:spcBef>
+            </a:pPr>
+            <a:r>
+              <a:rPr sz="1100" b="0" i="0">
+                <a:solidFill>
+                  <a:srgbClr val="0A294A"/>
+                </a:solidFill>
+              </a:rPr>
+              <a:t>clinical notes.</a:t>
+            </a:r>
+          </a:p>
+          <a:p>
+            <a:pPr algn="l">
+              <a:spcBef>
+                <a:spcPts val="100"/>
+              </a:spcBef>
+            </a:pPr>
+            <a:r>
+              <a:rPr sz="1100" b="0" i="0">
+                <a:solidFill>
+                  <a:srgbClr val="0A294A"/>
+                </a:solidFill>
+              </a:rPr>
               <a:t/>
             </a:r>
           </a:p>
@@ -4383,7 +4413,7 @@
                   <a:srgbClr val="0A294A"/>
                 </a:solidFill>
               </a:rPr>
-              <a:t>Keyword search fails with clinical synonym variation</a:t>
+              <a:t>A doctor types a natural language query describing</a:t>
             </a:r>
           </a:p>
           <a:p>
@@ -4398,7 +4428,7 @@
                   <a:srgbClr val="0A294A"/>
                 </a:solidFill>
               </a:rPr>
-              <a:t>  "CKD" ≠ "renal failure" to a search engine</a:t>
+              <a:t>a patient situation, and the system should surface</a:t>
             </a:r>
           </a:p>
           <a:p>
@@ -4413,6 +4443,21 @@
                   <a:srgbClr val="0A294A"/>
                 </a:solidFill>
               </a:rPr>
+              <a:t>the most relevant clinical notes from the database.</a:t>
+            </a:r>
+          </a:p>
+          <a:p>
+            <a:pPr algn="l">
+              <a:spcBef>
+                <a:spcPts val="100"/>
+              </a:spcBef>
+            </a:pPr>
+            <a:r>
+              <a:rPr sz="1100" b="0" i="0">
+                <a:solidFill>
+                  <a:srgbClr val="0A294A"/>
+                </a:solidFill>
+              </a:rPr>
               <a:t/>
             </a:r>
           </a:p>
@@ -4428,7 +4473,7 @@
                   <a:srgbClr val="0A294A"/>
                 </a:solidFill>
               </a:rPr>
-              <a:t>Large corpus (5 000+ notes) makes manual</a:t>
+              <a:t>The system must understand clinical meaning, not</a:t>
             </a:r>
           </a:p>
           <a:p>
@@ -4443,7 +4488,7 @@
                   <a:srgbClr val="0A294A"/>
                 </a:solidFill>
               </a:rPr>
-              <a:t>  review impossible within a consultation</a:t>
+              <a:t>just match keywords — a query about 'a diabetic</a:t>
             </a:r>
           </a:p>
           <a:p>
@@ -4458,7 +4503,7 @@
                   <a:srgbClr val="0A294A"/>
                 </a:solidFill>
               </a:rPr>
-              <a:t/>
+              <a:t>patient with kidney complications' should retrieve</a:t>
             </a:r>
           </a:p>
           <a:p>
@@ -4473,7 +4518,7 @@
                   <a:srgbClr val="0A294A"/>
                 </a:solidFill>
               </a:rPr>
-              <a:t>Critical information buried in unstructured text:</a:t>
+              <a:t>notes about CKD with diabetes even if the exact</a:t>
             </a:r>
           </a:p>
           <a:p>
@@ -4488,7 +4533,7 @@
                   <a:srgbClr val="0A294A"/>
                 </a:solidFill>
               </a:rPr>
-              <a:t>  transcriptions, discharge notes, consult letters</a:t>
+              <a:t>words differ.</a:t>
             </a:r>
           </a:p>
         </p:txBody>
@@ -4566,7 +4611,7 @@
                   <a:srgbClr val="FFFFFF"/>
                 </a:solidFill>
               </a:rPr>
-              <a:t>Our Goal</a:t>
+              <a:t>Instructions</a:t>
             </a:r>
           </a:p>
         </p:txBody>
@@ -4580,7 +4625,7 @@
         <p:spPr>
           <a:xfrm>
             <a:off x="6126480" y="1536192"/>
-            <a:ext cx="5760720" cy="4773168"/>
+            <a:ext cx="5760720" cy="2852928"/>
           </a:xfrm>
           <a:prstGeom prst="rect">
             <a:avLst/>
@@ -4623,7 +4668,7 @@
         <p:spPr>
           <a:xfrm>
             <a:off x="6236208" y="1627632"/>
-            <a:ext cx="5541264" cy="4636007"/>
+            <a:ext cx="5541264" cy="2715768"/>
           </a:xfrm>
           <a:prstGeom prst="rect">
             <a:avLst/>
@@ -4648,7 +4693,7 @@
                   <a:srgbClr val="0A294A"/>
                 </a:solidFill>
               </a:rPr>
-              <a:t>Semantic retrieval: meaning over keywords</a:t>
+              <a:t>Build a retrieval system:</a:t>
             </a:r>
           </a:p>
           <a:p>
@@ -4663,7 +4708,7 @@
                   <a:srgbClr val="0A294A"/>
                 </a:solidFill>
               </a:rPr>
-              <a:t/>
+              <a:t>  natural language query → ranked clinical notes</a:t>
             </a:r>
           </a:p>
           <a:p>
@@ -4678,7 +4723,7 @@
                   <a:srgbClr val="0A294A"/>
                 </a:solidFill>
               </a:rPr>
-              <a:t>Surface relevant notes even with different</a:t>
+              <a:t>Use an embedding model — justify your selection</a:t>
             </a:r>
           </a:p>
           <a:p>
@@ -4693,7 +4738,7 @@
                   <a:srgbClr val="0A294A"/>
                 </a:solidFill>
               </a:rPr>
-              <a:t>  vocabulary or abbreviation style</a:t>
+              <a:t>Add an LLM layer for a concise summary</a:t>
             </a:r>
           </a:p>
           <a:p>
@@ -4708,7 +4753,7 @@
                   <a:srgbClr val="0A294A"/>
                 </a:solidFill>
               </a:rPr>
-              <a:t/>
+              <a:t>Evaluate: clinically relevant, not keyword matches</a:t>
             </a:r>
           </a:p>
           <a:p>
@@ -4723,7 +4768,7 @@
                   <a:srgbClr val="0A294A"/>
                 </a:solidFill>
               </a:rPr>
-              <a:t>LLM summary so doctors get an answer,</a:t>
+              <a:t>(Optional) Fine-tune the embedding model</a:t>
             </a:r>
           </a:p>
           <a:p>
@@ -4738,7 +4783,7 @@
                   <a:srgbClr val="0A294A"/>
                 </a:solidFill>
               </a:rPr>
-              <a:t>  not just a ranked list of documents</a:t>
+              <a:t>Prepare a presentation — max 10 pages</a:t>
             </a:r>
           </a:p>
           <a:p>
@@ -4753,7 +4798,7 @@
                   <a:srgbClr val="0A294A"/>
                 </a:solidFill>
               </a:rPr>
-              <a:t/>
+              <a:t>Expose as a REST API service</a:t>
             </a:r>
           </a:p>
           <a:p>
@@ -4768,29 +4813,122 @@
                   <a:srgbClr val="0A294A"/>
                 </a:solidFill>
               </a:rPr>
-              <a:t>REST API exposing the system as a service</a:t>
-            </a:r>
-          </a:p>
-          <a:p>
-            <a:pPr algn="l">
-              <a:spcBef>
-                <a:spcPts val="100"/>
-              </a:spcBef>
-            </a:pPr>
-            <a:r>
-              <a:rPr sz="1100" b="0" i="0">
-                <a:solidFill>
-                  <a:srgbClr val="0A294A"/>
-                </a:solidFill>
-              </a:rPr>
-              <a:t>  so any EHR or front-end can consume it</a:t>
-            </a:r>
-          </a:p>
-        </p:txBody>
-      </p:sp>
-      <p:sp>
-        <p:nvSpPr>
-          <p:cNvPr id="14" name="TextBox 13"/>
+              <a:t>Prepare to present — 30-minute session</a:t>
+            </a:r>
+          </a:p>
+        </p:txBody>
+      </p:sp>
+      <p:sp>
+        <p:nvSpPr>
+          <p:cNvPr id="14" name="Rectangle 13"/>
+          <p:cNvSpPr/>
+          <p:nvPr/>
+        </p:nvSpPr>
+        <p:spPr>
+          <a:xfrm>
+            <a:off x="274320" y="4617720"/>
+            <a:ext cx="11612880" cy="1691640"/>
+          </a:xfrm>
+          <a:prstGeom prst="rect">
+            <a:avLst/>
+          </a:prstGeom>
+          <a:solidFill>
+            <a:srgbClr val="0A294A"/>
+          </a:solidFill>
+          <a:ln>
+            <a:noFill/>
+          </a:ln>
+        </p:spPr>
+        <p:style>
+          <a:lnRef idx="1">
+            <a:schemeClr val="accent1"/>
+          </a:lnRef>
+          <a:fillRef idx="3">
+            <a:schemeClr val="accent1"/>
+          </a:fillRef>
+          <a:effectRef idx="2">
+            <a:schemeClr val="accent1"/>
+          </a:effectRef>
+          <a:fontRef idx="minor">
+            <a:schemeClr val="lt1"/>
+          </a:fontRef>
+        </p:style>
+        <p:txBody>
+          <a:bodyPr rtlCol="0" anchor="ctr"/>
+          <a:lstStyle/>
+          <a:p>
+            <a:pPr algn="ctr"/>
+          </a:p>
+        </p:txBody>
+      </p:sp>
+      <p:sp>
+        <p:nvSpPr>
+          <p:cNvPr id="15" name="TextBox 14"/>
+          <p:cNvSpPr txBox="1"/>
+          <p:nvPr/>
+        </p:nvSpPr>
+        <p:spPr>
+          <a:xfrm>
+            <a:off x="457200" y="4690872"/>
+            <a:ext cx="11247120" cy="1508760"/>
+          </a:xfrm>
+          <a:prstGeom prst="rect">
+            <a:avLst/>
+          </a:prstGeom>
+          <a:noFill/>
+        </p:spPr>
+        <p:txBody>
+          <a:bodyPr wrap="square">
+            <a:spAutoFit/>
+          </a:bodyPr>
+          <a:lstStyle/>
+          <a:p/>
+          <a:p>
+            <a:pPr algn="l"/>
+            <a:r>
+              <a:rPr sz="1300" b="1" i="0">
+                <a:solidFill>
+                  <a:srgbClr val="007A87"/>
+                </a:solidFill>
+              </a:rPr>
+              <a:t>Target Audience  ·  Additional Guidance</a:t>
+            </a:r>
+          </a:p>
+          <a:p>
+            <a:pPr algn="l">
+              <a:spcBef>
+                <a:spcPts val="400"/>
+              </a:spcBef>
+            </a:pPr>
+            <a:r>
+              <a:rPr sz="1200" b="0" i="0">
+                <a:solidFill>
+                  <a:srgbClr val="CCDDFF"/>
+                </a:solidFill>
+              </a:rPr>
+              <a:t>AI Engineering Manager  ·  Product Manager</a:t>
+            </a:r>
+          </a:p>
+          <a:p>
+            <a:pPr algn="l">
+              <a:spcBef>
+                <a:spcPts val="400"/>
+              </a:spcBef>
+            </a:pPr>
+            <a:r>
+              <a:rPr sz="1200" b="0" i="0">
+                <a:solidFill>
+                  <a:srgbClr val="FFFFFF"/>
+                </a:solidFill>
+              </a:rPr>
+              <a:t>Anything outside this instruction, please feel free to make your own assumption as needed.</a:t>
+            </a:r>
+          </a:p>
+        </p:txBody>
+      </p:sp>
+      <p:sp>
+        <p:nvSpPr>
+          <p:cNvPr id="16" name="TextBox 15"/>
           <p:cNvSpPr txBox="1"/>
           <p:nvPr/>
         </p:nvSpPr>

--- a/Clinical_Note_Retrieval_Exam.pptx
+++ b/Clinical_Note_Retrieval_Exam.pptx
@@ -3191,7 +3191,7 @@
         </p:nvSpPr>
         <p:spPr>
           <a:xfrm>
-            <a:off x="502920" y="1371600"/>
+            <a:off x="502920" y="1280160"/>
             <a:ext cx="11247120" cy="1005840"/>
           </a:xfrm>
           <a:prstGeom prst="rect">
@@ -3226,7 +3226,7 @@
         </p:nvSpPr>
         <p:spPr>
           <a:xfrm>
-            <a:off x="502920" y="2514600"/>
+            <a:off x="502920" y="2423160"/>
             <a:ext cx="11247120" cy="594360"/>
           </a:xfrm>
           <a:prstGeom prst="rect">
@@ -3261,8 +3261,8 @@
         </p:nvSpPr>
         <p:spPr>
           <a:xfrm>
-            <a:off x="502920" y="3246120"/>
-            <a:ext cx="11247120" cy="457200"/>
+            <a:off x="502920" y="3154680"/>
+            <a:ext cx="11247120" cy="411480"/>
           </a:xfrm>
           <a:prstGeom prst="rect">
             <a:avLst/>
@@ -3296,7 +3296,7 @@
         </p:nvSpPr>
         <p:spPr>
           <a:xfrm>
-            <a:off x="502920" y="3886200"/>
+            <a:off x="502920" y="3703320"/>
             <a:ext cx="4572000" cy="36576"/>
           </a:xfrm>
           <a:prstGeom prst="rect">
@@ -3333,14 +3333,57 @@
       </p:sp>
       <p:sp>
         <p:nvSpPr>
-          <p:cNvPr id="8" name="TextBox 7"/>
-          <p:cNvSpPr txBox="1"/>
-          <p:nvPr/>
-        </p:nvSpPr>
-        <p:spPr>
-          <a:xfrm>
-            <a:off x="502920" y="6263640"/>
-            <a:ext cx="11247120" cy="365760"/>
+          <p:cNvPr id="8" name="Rectangle 7"/>
+          <p:cNvSpPr/>
+          <p:nvPr/>
+        </p:nvSpPr>
+        <p:spPr>
+          <a:xfrm>
+            <a:off x="502920" y="3931920"/>
+            <a:ext cx="3566160" cy="749808"/>
+          </a:xfrm>
+          <a:prstGeom prst="rect">
+            <a:avLst/>
+          </a:prstGeom>
+          <a:solidFill>
+            <a:srgbClr val="0D386A"/>
+          </a:solidFill>
+          <a:ln>
+            <a:noFill/>
+          </a:ln>
+        </p:spPr>
+        <p:style>
+          <a:lnRef idx="1">
+            <a:schemeClr val="accent1"/>
+          </a:lnRef>
+          <a:fillRef idx="3">
+            <a:schemeClr val="accent1"/>
+          </a:fillRef>
+          <a:effectRef idx="2">
+            <a:schemeClr val="accent1"/>
+          </a:effectRef>
+          <a:fontRef idx="minor">
+            <a:schemeClr val="lt1"/>
+          </a:fontRef>
+        </p:style>
+        <p:txBody>
+          <a:bodyPr rtlCol="0" anchor="ctr"/>
+          <a:lstStyle/>
+          <a:p>
+            <a:pPr algn="ctr"/>
+          </a:p>
+        </p:txBody>
+      </p:sp>
+      <p:sp>
+        <p:nvSpPr>
+          <p:cNvPr id="9" name="TextBox 8"/>
+          <p:cNvSpPr txBox="1"/>
+          <p:nvPr/>
+        </p:nvSpPr>
+        <p:spPr>
+          <a:xfrm>
+            <a:off x="640080" y="4005072"/>
+            <a:ext cx="3291840" cy="320040"/>
           </a:xfrm>
           <a:prstGeom prst="rect">
             <a:avLst/>
@@ -3356,19 +3399,315 @@
           <a:p>
             <a:pPr algn="l"/>
             <a:r>
+              <a:rPr sz="1100" b="1" i="0">
+                <a:solidFill>
+                  <a:srgbClr val="007A87"/>
+                </a:solidFill>
+              </a:rPr>
+              <a:t>Dataset</a:t>
+            </a:r>
+          </a:p>
+        </p:txBody>
+      </p:sp>
+      <p:sp>
+        <p:nvSpPr>
+          <p:cNvPr id="10" name="TextBox 9"/>
+          <p:cNvSpPr txBox="1"/>
+          <p:nvPr/>
+        </p:nvSpPr>
+        <p:spPr>
+          <a:xfrm>
+            <a:off x="640080" y="4315968"/>
+            <a:ext cx="3291840" cy="320040"/>
+          </a:xfrm>
+          <a:prstGeom prst="rect">
+            <a:avLst/>
+          </a:prstGeom>
+          <a:noFill/>
+        </p:spPr>
+        <p:txBody>
+          <a:bodyPr wrap="square">
+            <a:spAutoFit/>
+          </a:bodyPr>
+          <a:lstStyle/>
+          <a:p/>
+          <a:p>
+            <a:pPr algn="l"/>
+            <a:r>
               <a:rPr sz="1100" b="0" i="0">
                 <a:solidFill>
+                  <a:srgbClr val="FFFFFF"/>
+                </a:solidFill>
+              </a:rPr>
+              <a:t>mtsamples  ·  5 000+ clinical notes</a:t>
+            </a:r>
+          </a:p>
+        </p:txBody>
+      </p:sp>
+      <p:sp>
+        <p:nvSpPr>
+          <p:cNvPr id="11" name="Rectangle 10"/>
+          <p:cNvSpPr/>
+          <p:nvPr/>
+        </p:nvSpPr>
+        <p:spPr>
+          <a:xfrm>
+            <a:off x="4343400" y="3931920"/>
+            <a:ext cx="3566160" cy="749808"/>
+          </a:xfrm>
+          <a:prstGeom prst="rect">
+            <a:avLst/>
+          </a:prstGeom>
+          <a:solidFill>
+            <a:srgbClr val="0D386A"/>
+          </a:solidFill>
+          <a:ln>
+            <a:noFill/>
+          </a:ln>
+        </p:spPr>
+        <p:style>
+          <a:lnRef idx="1">
+            <a:schemeClr val="accent1"/>
+          </a:lnRef>
+          <a:fillRef idx="3">
+            <a:schemeClr val="accent1"/>
+          </a:fillRef>
+          <a:effectRef idx="2">
+            <a:schemeClr val="accent1"/>
+          </a:effectRef>
+          <a:fontRef idx="minor">
+            <a:schemeClr val="lt1"/>
+          </a:fontRef>
+        </p:style>
+        <p:txBody>
+          <a:bodyPr rtlCol="0" anchor="ctr"/>
+          <a:lstStyle/>
+          <a:p>
+            <a:pPr algn="ctr"/>
+          </a:p>
+        </p:txBody>
+      </p:sp>
+      <p:sp>
+        <p:nvSpPr>
+          <p:cNvPr id="12" name="TextBox 11"/>
+          <p:cNvSpPr txBox="1"/>
+          <p:nvPr/>
+        </p:nvSpPr>
+        <p:spPr>
+          <a:xfrm>
+            <a:off x="4480560" y="4005072"/>
+            <a:ext cx="3291840" cy="320040"/>
+          </a:xfrm>
+          <a:prstGeom prst="rect">
+            <a:avLst/>
+          </a:prstGeom>
+          <a:noFill/>
+        </p:spPr>
+        <p:txBody>
+          <a:bodyPr wrap="square">
+            <a:spAutoFit/>
+          </a:bodyPr>
+          <a:lstStyle/>
+          <a:p/>
+          <a:p>
+            <a:pPr algn="l"/>
+            <a:r>
+              <a:rPr sz="1100" b="1" i="0">
+                <a:solidFill>
+                  <a:srgbClr val="007A87"/>
+                </a:solidFill>
+              </a:rPr>
+              <a:t>Backend</a:t>
+            </a:r>
+          </a:p>
+        </p:txBody>
+      </p:sp>
+      <p:sp>
+        <p:nvSpPr>
+          <p:cNvPr id="13" name="TextBox 12"/>
+          <p:cNvSpPr txBox="1"/>
+          <p:nvPr/>
+        </p:nvSpPr>
+        <p:spPr>
+          <a:xfrm>
+            <a:off x="4480560" y="4315968"/>
+            <a:ext cx="3291840" cy="320040"/>
+          </a:xfrm>
+          <a:prstGeom prst="rect">
+            <a:avLst/>
+          </a:prstGeom>
+          <a:noFill/>
+        </p:spPr>
+        <p:txBody>
+          <a:bodyPr wrap="square">
+            <a:spAutoFit/>
+          </a:bodyPr>
+          <a:lstStyle/>
+          <a:p/>
+          <a:p>
+            <a:pPr algn="l"/>
+            <a:r>
+              <a:rPr sz="1100" b="0" i="0">
+                <a:solidFill>
+                  <a:srgbClr val="FFFFFF"/>
+                </a:solidFill>
+              </a:rPr>
+              <a:t>sentence-transformers + FAISS + Claude API</a:t>
+            </a:r>
+          </a:p>
+        </p:txBody>
+      </p:sp>
+      <p:sp>
+        <p:nvSpPr>
+          <p:cNvPr id="14" name="Rectangle 13"/>
+          <p:cNvSpPr/>
+          <p:nvPr/>
+        </p:nvSpPr>
+        <p:spPr>
+          <a:xfrm>
+            <a:off x="8183880" y="3931920"/>
+            <a:ext cx="3566160" cy="749808"/>
+          </a:xfrm>
+          <a:prstGeom prst="rect">
+            <a:avLst/>
+          </a:prstGeom>
+          <a:solidFill>
+            <a:srgbClr val="0D386A"/>
+          </a:solidFill>
+          <a:ln>
+            <a:noFill/>
+          </a:ln>
+        </p:spPr>
+        <p:style>
+          <a:lnRef idx="1">
+            <a:schemeClr val="accent1"/>
+          </a:lnRef>
+          <a:fillRef idx="3">
+            <a:schemeClr val="accent1"/>
+          </a:fillRef>
+          <a:effectRef idx="2">
+            <a:schemeClr val="accent1"/>
+          </a:effectRef>
+          <a:fontRef idx="minor">
+            <a:schemeClr val="lt1"/>
+          </a:fontRef>
+        </p:style>
+        <p:txBody>
+          <a:bodyPr rtlCol="0" anchor="ctr"/>
+          <a:lstStyle/>
+          <a:p>
+            <a:pPr algn="ctr"/>
+          </a:p>
+        </p:txBody>
+      </p:sp>
+      <p:sp>
+        <p:nvSpPr>
+          <p:cNvPr id="15" name="TextBox 14"/>
+          <p:cNvSpPr txBox="1"/>
+          <p:nvPr/>
+        </p:nvSpPr>
+        <p:spPr>
+          <a:xfrm>
+            <a:off x="8321040" y="4005072"/>
+            <a:ext cx="3291840" cy="320040"/>
+          </a:xfrm>
+          <a:prstGeom prst="rect">
+            <a:avLst/>
+          </a:prstGeom>
+          <a:noFill/>
+        </p:spPr>
+        <p:txBody>
+          <a:bodyPr wrap="square">
+            <a:spAutoFit/>
+          </a:bodyPr>
+          <a:lstStyle/>
+          <a:p/>
+          <a:p>
+            <a:pPr algn="l"/>
+            <a:r>
+              <a:rPr sz="1100" b="1" i="0">
+                <a:solidFill>
+                  <a:srgbClr val="007A87"/>
+                </a:solidFill>
+              </a:rPr>
+              <a:t>Delivery</a:t>
+            </a:r>
+          </a:p>
+        </p:txBody>
+      </p:sp>
+      <p:sp>
+        <p:nvSpPr>
+          <p:cNvPr id="16" name="TextBox 15"/>
+          <p:cNvSpPr txBox="1"/>
+          <p:nvPr/>
+        </p:nvSpPr>
+        <p:spPr>
+          <a:xfrm>
+            <a:off x="8321040" y="4315968"/>
+            <a:ext cx="3291840" cy="320040"/>
+          </a:xfrm>
+          <a:prstGeom prst="rect">
+            <a:avLst/>
+          </a:prstGeom>
+          <a:noFill/>
+        </p:spPr>
+        <p:txBody>
+          <a:bodyPr wrap="square">
+            <a:spAutoFit/>
+          </a:bodyPr>
+          <a:lstStyle/>
+          <a:p/>
+          <a:p>
+            <a:pPr algn="l"/>
+            <a:r>
+              <a:rPr sz="1100" b="0" i="0">
+                <a:solidFill>
+                  <a:srgbClr val="FFFFFF"/>
+                </a:solidFill>
+              </a:rPr>
+              <a:t>FastAPI REST service  ·  Docker-ready</a:t>
+            </a:r>
+          </a:p>
+        </p:txBody>
+      </p:sp>
+      <p:sp>
+        <p:nvSpPr>
+          <p:cNvPr id="17" name="TextBox 16"/>
+          <p:cNvSpPr txBox="1"/>
+          <p:nvPr/>
+        </p:nvSpPr>
+        <p:spPr>
+          <a:xfrm>
+            <a:off x="502920" y="5074920"/>
+            <a:ext cx="11247120" cy="320040"/>
+          </a:xfrm>
+          <a:prstGeom prst="rect">
+            <a:avLst/>
+          </a:prstGeom>
+          <a:noFill/>
+        </p:spPr>
+        <p:txBody>
+          <a:bodyPr wrap="square">
+            <a:spAutoFit/>
+          </a:bodyPr>
+          <a:lstStyle/>
+          <a:p/>
+          <a:p>
+            <a:pPr algn="l"/>
+            <a:r>
+              <a:rPr sz="1100" b="0" i="0">
+                <a:solidFill>
                   <a:srgbClr val="55657A"/>
                 </a:solidFill>
               </a:rPr>
-              <a:t>Clinical AI Engineering  ·  June 2026</a:t>
-            </a:r>
-          </a:p>
-        </p:txBody>
-      </p:sp>
-      <p:sp>
-        <p:nvSpPr>
-          <p:cNvPr id="9" name="TextBox 8"/>
+              <a:t>Invitrace Co., Ltd.  ·  AI Engineering Assessment  ·  June 2026</a:t>
+            </a:r>
+          </a:p>
+        </p:txBody>
+      </p:sp>
+      <p:sp>
+        <p:nvSpPr>
+          <p:cNvPr id="18" name="TextBox 17"/>
           <p:cNvSpPr txBox="1"/>
           <p:nvPr/>
         </p:nvSpPr>
@@ -3513,8 +3852,8 @@
         </p:nvSpPr>
         <p:spPr>
           <a:xfrm>
-            <a:off x="457200" y="274320"/>
-            <a:ext cx="11430000" cy="594360"/>
+            <a:off x="457200" y="228600"/>
+            <a:ext cx="11430000" cy="658368"/>
           </a:xfrm>
           <a:prstGeom prst="rect">
             <a:avLst/>
@@ -3535,7 +3874,7 @@
                   <a:srgbClr val="FFFFFF"/>
                 </a:solidFill>
               </a:rPr>
-              <a:t>Summary &amp; Future Work</a:t>
+              <a:t>Summary &amp; Next Steps</a:t>
             </a:r>
           </a:p>
         </p:txBody>
@@ -3548,8 +3887,8 @@
         </p:nvSpPr>
         <p:spPr>
           <a:xfrm>
-            <a:off x="457200" y="1005840"/>
-            <a:ext cx="5394960" cy="5212080"/>
+            <a:off x="411480" y="1005840"/>
+            <a:ext cx="5468112" cy="5230368"/>
           </a:xfrm>
           <a:prstGeom prst="rect">
             <a:avLst/>
@@ -3591,8 +3930,8 @@
         </p:nvSpPr>
         <p:spPr>
           <a:xfrm>
-            <a:off x="640080" y="1097280"/>
-            <a:ext cx="5029200" cy="438912"/>
+            <a:off x="594360" y="1078992"/>
+            <a:ext cx="5120640" cy="402336"/>
           </a:xfrm>
           <a:prstGeom prst="rect">
             <a:avLst/>
@@ -3626,28 +3965,28 @@
         </p:nvSpPr>
         <p:spPr>
           <a:xfrm>
-            <a:off x="640080" y="1600200"/>
-            <a:ext cx="5029200" cy="4389120"/>
-          </a:xfrm>
-          <a:prstGeom prst="rect">
-            <a:avLst/>
-          </a:prstGeom>
-          <a:noFill/>
-        </p:spPr>
-        <p:txBody>
-          <a:bodyPr wrap="square">
-            <a:spAutoFit/>
-          </a:bodyPr>
-          <a:lstStyle/>
-          <a:p/>
-          <a:p>
-            <a:pPr algn="l">
-              <a:spcBef>
-                <a:spcPts val="400"/>
-              </a:spcBef>
-            </a:pPr>
-            <a:r>
-              <a:rPr sz="1300" b="0" i="0">
+            <a:off x="594360" y="1536192"/>
+            <a:ext cx="5120640" cy="4572000"/>
+          </a:xfrm>
+          <a:prstGeom prst="rect">
+            <a:avLst/>
+          </a:prstGeom>
+          <a:noFill/>
+        </p:spPr>
+        <p:txBody>
+          <a:bodyPr wrap="square">
+            <a:spAutoFit/>
+          </a:bodyPr>
+          <a:lstStyle/>
+          <a:p/>
+          <a:p>
+            <a:pPr algn="l">
+              <a:spcBef>
+                <a:spcPts val="500"/>
+              </a:spcBef>
+            </a:pPr>
+            <a:r>
+              <a:rPr sz="1200" b="0" i="0">
                 <a:solidFill>
                   <a:srgbClr val="FFFFFF"/>
                 </a:solidFill>
@@ -3658,11 +3997,11 @@
           <a:p>
             <a:pPr algn="l">
               <a:spcBef>
-                <a:spcPts val="400"/>
-              </a:spcBef>
-            </a:pPr>
-            <a:r>
-              <a:rPr sz="1300" b="0" i="0">
+                <a:spcPts val="500"/>
+              </a:spcBef>
+            </a:pPr>
+            <a:r>
+              <a:rPr sz="1200" b="0" i="0">
                 <a:solidFill>
                   <a:srgbClr val="FFFFFF"/>
                 </a:solidFill>
@@ -3673,11 +4012,11 @@
           <a:p>
             <a:pPr algn="l">
               <a:spcBef>
-                <a:spcPts val="400"/>
-              </a:spcBef>
-            </a:pPr>
-            <a:r>
-              <a:rPr sz="1300" b="0" i="0">
+                <a:spcPts val="500"/>
+              </a:spcBef>
+            </a:pPr>
+            <a:r>
+              <a:rPr sz="1200" b="0" i="0">
                 <a:solidFill>
                   <a:srgbClr val="FFFFFF"/>
                 </a:solidFill>
@@ -3688,61 +4027,91 @@
           <a:p>
             <a:pPr algn="l">
               <a:spcBef>
-                <a:spcPts val="400"/>
-              </a:spcBef>
-            </a:pPr>
-            <a:r>
-              <a:rPr sz="1300" b="0" i="0">
+                <a:spcPts val="500"/>
+              </a:spcBef>
+            </a:pPr>
+            <a:r>
+              <a:rPr sz="1200" b="0" i="0">
                 <a:solidFill>
                   <a:srgbClr val="FFFFFF"/>
                 </a:solidFill>
               </a:rPr>
-              <a:t>✓  Claude API summarisation</a:t>
-            </a:r>
-          </a:p>
-          <a:p>
-            <a:pPr algn="l">
-              <a:spcBef>
-                <a:spcPts val="400"/>
-              </a:spcBef>
-            </a:pPr>
-            <a:r>
-              <a:rPr sz="1300" b="0" i="0">
+              <a:t>✓  FAISS cosine-similarity vector index</a:t>
+            </a:r>
+          </a:p>
+          <a:p>
+            <a:pPr algn="l">
+              <a:spcBef>
+                <a:spcPts val="500"/>
+              </a:spcBef>
+            </a:pPr>
+            <a:r>
+              <a:rPr sz="1200" b="0" i="0">
                 <a:solidFill>
                   <a:srgbClr val="FFFFFF"/>
                 </a:solidFill>
               </a:rPr>
-              <a:t>✓  FastAPI REST service</a:t>
-            </a:r>
-          </a:p>
-          <a:p>
-            <a:pPr algn="l">
-              <a:spcBef>
-                <a:spcPts val="400"/>
-              </a:spcBef>
-            </a:pPr>
-            <a:r>
-              <a:rPr sz="1300" b="0" i="0">
+              <a:t>✓  Claude API clinical summarisation</a:t>
+            </a:r>
+          </a:p>
+          <a:p>
+            <a:pPr algn="l">
+              <a:spcBef>
+                <a:spcPts val="500"/>
+              </a:spcBef>
+            </a:pPr>
+            <a:r>
+              <a:rPr sz="1200" b="0" i="0">
                 <a:solidFill>
                   <a:srgbClr val="FFFFFF"/>
                 </a:solidFill>
               </a:rPr>
-              <a:t>✓  20 passing tests (all offline)</a:t>
-            </a:r>
-          </a:p>
-          <a:p>
-            <a:pPr algn="l">
-              <a:spcBef>
-                <a:spcPts val="400"/>
-              </a:spcBef>
-            </a:pPr>
-            <a:r>
-              <a:rPr sz="1300" b="0" i="0">
+              <a:t>✓  FastAPI REST service (GET + POST /retrieve)</a:t>
+            </a:r>
+          </a:p>
+          <a:p>
+            <a:pPr algn="l">
+              <a:spcBef>
+                <a:spcPts val="500"/>
+              </a:spcBef>
+            </a:pPr>
+            <a:r>
+              <a:rPr sz="1200" b="0" i="0">
                 <a:solidFill>
                   <a:srgbClr val="FFFFFF"/>
                 </a:solidFill>
               </a:rPr>
-              <a:t>✓  Docker-ready</a:t>
+              <a:t>✓  Evaluation — 5 query types, Precision@1 = 1.0</a:t>
+            </a:r>
+          </a:p>
+          <a:p>
+            <a:pPr algn="l">
+              <a:spcBef>
+                <a:spcPts val="500"/>
+              </a:spcBef>
+            </a:pPr>
+            <a:r>
+              <a:rPr sz="1200" b="0" i="0">
+                <a:solidFill>
+                  <a:srgbClr val="FFFFFF"/>
+                </a:solidFill>
+              </a:rPr>
+              <a:t>✓  20 passing tests (fully offline, no API key)</a:t>
+            </a:r>
+          </a:p>
+          <a:p>
+            <a:pPr algn="l">
+              <a:spcBef>
+                <a:spcPts val="500"/>
+              </a:spcBef>
+            </a:pPr>
+            <a:r>
+              <a:rPr sz="1200" b="0" i="0">
+                <a:solidFill>
+                  <a:srgbClr val="FFFFFF"/>
+                </a:solidFill>
+              </a:rPr>
+              <a:t>✓  Docker-ready deployment</a:t>
             </a:r>
           </a:p>
         </p:txBody>
@@ -3756,7 +4125,7 @@
         <p:spPr>
           <a:xfrm>
             <a:off x="6309360" y="1005840"/>
-            <a:ext cx="5577840" cy="5212080"/>
+            <a:ext cx="5486400" cy="5230368"/>
           </a:xfrm>
           <a:prstGeom prst="rect">
             <a:avLst/>
@@ -3798,8 +4167,8 @@
         </p:nvSpPr>
         <p:spPr>
           <a:xfrm>
-            <a:off x="6492240" y="1097280"/>
-            <a:ext cx="5212080" cy="438912"/>
+            <a:off x="6492240" y="1078992"/>
+            <a:ext cx="5120640" cy="402336"/>
           </a:xfrm>
           <a:prstGeom prst="rect">
             <a:avLst/>
@@ -3833,28 +4202,28 @@
         </p:nvSpPr>
         <p:spPr>
           <a:xfrm>
-            <a:off x="6492240" y="1600200"/>
-            <a:ext cx="5212080" cy="4389120"/>
-          </a:xfrm>
-          <a:prstGeom prst="rect">
-            <a:avLst/>
-          </a:prstGeom>
-          <a:noFill/>
-        </p:spPr>
-        <p:txBody>
-          <a:bodyPr wrap="square">
-            <a:spAutoFit/>
-          </a:bodyPr>
-          <a:lstStyle/>
-          <a:p/>
-          <a:p>
-            <a:pPr algn="l">
-              <a:spcBef>
-                <a:spcPts val="400"/>
-              </a:spcBef>
-            </a:pPr>
-            <a:r>
-              <a:rPr sz="1300" b="0" i="0">
+            <a:off x="6492240" y="1536192"/>
+            <a:ext cx="5120640" cy="4572000"/>
+          </a:xfrm>
+          <a:prstGeom prst="rect">
+            <a:avLst/>
+          </a:prstGeom>
+          <a:noFill/>
+        </p:spPr>
+        <p:txBody>
+          <a:bodyPr wrap="square">
+            <a:spAutoFit/>
+          </a:bodyPr>
+          <a:lstStyle/>
+          <a:p/>
+          <a:p>
+            <a:pPr algn="l">
+              <a:spcBef>
+                <a:spcPts val="500"/>
+              </a:spcBef>
+            </a:pPr>
+            <a:r>
+              <a:rPr sz="1200" b="0" i="0">
                 <a:solidFill>
                   <a:srgbClr val="FFFFFF"/>
                 </a:solidFill>
@@ -3865,11 +4234,11 @@
           <a:p>
             <a:pPr algn="l">
               <a:spcBef>
-                <a:spcPts val="400"/>
-              </a:spcBef>
-            </a:pPr>
-            <a:r>
-              <a:rPr sz="1300" b="0" i="0">
+                <a:spcPts val="500"/>
+              </a:spcBef>
+            </a:pPr>
+            <a:r>
+              <a:rPr sz="1200" b="0" i="0">
                 <a:solidFill>
                   <a:srgbClr val="FFFFFF"/>
                 </a:solidFill>
@@ -3880,11 +4249,11 @@
           <a:p>
             <a:pPr algn="l">
               <a:spcBef>
-                <a:spcPts val="400"/>
-              </a:spcBef>
-            </a:pPr>
-            <a:r>
-              <a:rPr sz="1300" b="0" i="0">
+                <a:spcPts val="500"/>
+              </a:spcBef>
+            </a:pPr>
+            <a:r>
+              <a:rPr sz="1200" b="0" i="0">
                 <a:solidFill>
                   <a:srgbClr val="FFFFFF"/>
                 </a:solidFill>
@@ -3895,11 +4264,11 @@
           <a:p>
             <a:pPr algn="l">
               <a:spcBef>
-                <a:spcPts val="400"/>
-              </a:spcBef>
-            </a:pPr>
-            <a:r>
-              <a:rPr sz="1300" b="0" i="0">
+                <a:spcPts val="500"/>
+              </a:spcBef>
+            </a:pPr>
+            <a:r>
+              <a:rPr sz="1200" b="0" i="0">
                 <a:solidFill>
                   <a:srgbClr val="FFFFFF"/>
                 </a:solidFill>
@@ -3910,11 +4279,11 @@
           <a:p>
             <a:pPr algn="l">
               <a:spcBef>
-                <a:spcPts val="400"/>
-              </a:spcBef>
-            </a:pPr>
-            <a:r>
-              <a:rPr sz="1300" b="0" i="0">
+                <a:spcPts val="500"/>
+              </a:spcBef>
+            </a:pPr>
+            <a:r>
+              <a:rPr sz="1200" b="0" i="0">
                 <a:solidFill>
                   <a:srgbClr val="FFFFFF"/>
                 </a:solidFill>
@@ -3925,31 +4294,46 @@
           <a:p>
             <a:pPr algn="l">
               <a:spcBef>
-                <a:spcPts val="400"/>
-              </a:spcBef>
-            </a:pPr>
-            <a:r>
-              <a:rPr sz="1300" b="0" i="0">
+                <a:spcPts val="500"/>
+              </a:spcBef>
+            </a:pPr>
+            <a:r>
+              <a:rPr sz="1200" b="0" i="0">
                 <a:solidFill>
                   <a:srgbClr val="FFFFFF"/>
                 </a:solidFill>
               </a:rPr>
-              <a:t>▶  HNSW index for 1M+ scale</a:t>
-            </a:r>
-          </a:p>
-          <a:p>
-            <a:pPr algn="l">
-              <a:spcBef>
-                <a:spcPts val="400"/>
-              </a:spcBef>
-            </a:pPr>
-            <a:r>
-              <a:rPr sz="1300" b="0" i="0">
+              <a:t>▶  HNSW index for sub-ms at 1M+ scale</a:t>
+            </a:r>
+          </a:p>
+          <a:p>
+            <a:pPr algn="l">
+              <a:spcBef>
+                <a:spcPts val="500"/>
+              </a:spcBef>
+            </a:pPr>
+            <a:r>
+              <a:rPr sz="1200" b="0" i="0">
                 <a:solidFill>
                   <a:srgbClr val="FFFFFF"/>
                 </a:solidFill>
               </a:rPr>
-              <a:t>▶  Auth + rate limiting</a:t>
+              <a:t>▶  Auth + rate limiting for production API</a:t>
+            </a:r>
+          </a:p>
+          <a:p>
+            <a:pPr algn="l">
+              <a:spcBef>
+                <a:spcPts val="500"/>
+              </a:spcBef>
+            </a:pPr>
+            <a:r>
+              <a:rPr sz="1200" b="0" i="0">
+                <a:solidFill>
+                  <a:srgbClr val="FFFFFF"/>
+                </a:solidFill>
+              </a:rPr>
+              <a:t>▶  Async embedding for background updates</a:t>
             </a:r>
           </a:p>
         </p:txBody>
@@ -3962,8 +4346,8 @@
         </p:nvSpPr>
         <p:spPr>
           <a:xfrm>
-            <a:off x="457200" y="6291072"/>
-            <a:ext cx="10789920" cy="182880"/>
+            <a:off x="411480" y="6172200"/>
+            <a:ext cx="11430000" cy="228600"/>
           </a:xfrm>
           <a:prstGeom prst="rect">
             <a:avLst/>
@@ -3979,12 +4363,12 @@
           <a:p>
             <a:pPr algn="ctr"/>
             <a:r>
-              <a:rPr sz="1100" b="0" i="0">
+              <a:rPr sz="1000" b="0" i="0">
                 <a:solidFill>
                   <a:srgbClr val="55657A"/>
                 </a:solidFill>
               </a:rPr>
-              <a:t>Clinical AI Take-Home Exam  ·  June 2026</a:t>
+              <a:t>Clinical AI Take-Home Exam  ·  Invitrace Co., Ltd.  ·  June 2026</a:t>
             </a:r>
           </a:p>
         </p:txBody>
@@ -4206,7 +4590,7 @@
         </p:nvSpPr>
         <p:spPr>
           <a:xfrm>
-            <a:off x="274320" y="1188720"/>
+            <a:off x="274320" y="1078992"/>
             <a:ext cx="5577840" cy="347472"/>
           </a:xfrm>
           <a:prstGeom prst="rect">
@@ -4249,7 +4633,7 @@
         </p:nvSpPr>
         <p:spPr>
           <a:xfrm>
-            <a:off x="365760" y="1234440"/>
+            <a:off x="365760" y="1124712"/>
             <a:ext cx="5394959" cy="301752"/>
           </a:xfrm>
           <a:prstGeom prst="rect">
@@ -4284,8 +4668,8 @@
         </p:nvSpPr>
         <p:spPr>
           <a:xfrm>
-            <a:off x="274320" y="1536192"/>
-            <a:ext cx="5577840" cy="2852928"/>
+            <a:off x="274320" y="1426464"/>
+            <a:ext cx="5577840" cy="2944368"/>
           </a:xfrm>
           <a:prstGeom prst="rect">
             <a:avLst/>
@@ -4327,8 +4711,8 @@
         </p:nvSpPr>
         <p:spPr>
           <a:xfrm>
-            <a:off x="384048" y="1627632"/>
-            <a:ext cx="5358383" cy="2715768"/>
+            <a:off x="384048" y="1517904"/>
+            <a:ext cx="5358383" cy="2807208"/>
           </a:xfrm>
           <a:prstGeom prst="rect">
             <a:avLst/>
@@ -4368,7 +4752,7 @@
                   <a:srgbClr val="0A294A"/>
                 </a:solidFill>
               </a:rPr>
-              <a:t>relevant past cases from a large corpus of</a:t>
+              <a:t>relevant past cases from a large corpus of clinical notes.</a:t>
             </a:r>
           </a:p>
           <a:p>
@@ -4383,7 +4767,7 @@
                   <a:srgbClr val="0A294A"/>
                 </a:solidFill>
               </a:rPr>
-              <a:t>clinical notes.</a:t>
+              <a:t/>
             </a:r>
           </a:p>
           <a:p>
@@ -4398,6 +4782,51 @@
                   <a:srgbClr val="0A294A"/>
                 </a:solidFill>
               </a:rPr>
+              <a:t>A doctor types a natural language query describing a</a:t>
+            </a:r>
+          </a:p>
+          <a:p>
+            <a:pPr algn="l">
+              <a:spcBef>
+                <a:spcPts val="100"/>
+              </a:spcBef>
+            </a:pPr>
+            <a:r>
+              <a:rPr sz="1100" b="0" i="0">
+                <a:solidFill>
+                  <a:srgbClr val="0A294A"/>
+                </a:solidFill>
+              </a:rPr>
+              <a:t>patient situation, and the system should surface the</a:t>
+            </a:r>
+          </a:p>
+          <a:p>
+            <a:pPr algn="l">
+              <a:spcBef>
+                <a:spcPts val="100"/>
+              </a:spcBef>
+            </a:pPr>
+            <a:r>
+              <a:rPr sz="1100" b="0" i="0">
+                <a:solidFill>
+                  <a:srgbClr val="0A294A"/>
+                </a:solidFill>
+              </a:rPr>
+              <a:t>most relevant clinical notes from the database.</a:t>
+            </a:r>
+          </a:p>
+          <a:p>
+            <a:pPr algn="l">
+              <a:spcBef>
+                <a:spcPts val="100"/>
+              </a:spcBef>
+            </a:pPr>
+            <a:r>
+              <a:rPr sz="1100" b="0" i="0">
+                <a:solidFill>
+                  <a:srgbClr val="0A294A"/>
+                </a:solidFill>
+              </a:rPr>
               <a:t/>
             </a:r>
           </a:p>
@@ -4413,7 +4842,7 @@
                   <a:srgbClr val="0A294A"/>
                 </a:solidFill>
               </a:rPr>
-              <a:t>A doctor types a natural language query describing</a:t>
+              <a:t>The system must understand clinical meaning, not just</a:t>
             </a:r>
           </a:p>
           <a:p>
@@ -4428,7 +4857,7 @@
                   <a:srgbClr val="0A294A"/>
                 </a:solidFill>
               </a:rPr>
-              <a:t>a patient situation, and the system should surface</a:t>
+              <a:t>match keywords — a query about 'a diabetic patient</a:t>
             </a:r>
           </a:p>
           <a:p>
@@ -4443,7 +4872,7 @@
                   <a:srgbClr val="0A294A"/>
                 </a:solidFill>
               </a:rPr>
-              <a:t>the most relevant clinical notes from the database.</a:t>
+              <a:t>with kidney complications' should retrieve notes about</a:t>
             </a:r>
           </a:p>
           <a:p>
@@ -4458,82 +4887,7 @@
                   <a:srgbClr val="0A294A"/>
                 </a:solidFill>
               </a:rPr>
-              <a:t/>
-            </a:r>
-          </a:p>
-          <a:p>
-            <a:pPr algn="l">
-              <a:spcBef>
-                <a:spcPts val="100"/>
-              </a:spcBef>
-            </a:pPr>
-            <a:r>
-              <a:rPr sz="1100" b="0" i="0">
-                <a:solidFill>
-                  <a:srgbClr val="0A294A"/>
-                </a:solidFill>
-              </a:rPr>
-              <a:t>The system must understand clinical meaning, not</a:t>
-            </a:r>
-          </a:p>
-          <a:p>
-            <a:pPr algn="l">
-              <a:spcBef>
-                <a:spcPts val="100"/>
-              </a:spcBef>
-            </a:pPr>
-            <a:r>
-              <a:rPr sz="1100" b="0" i="0">
-                <a:solidFill>
-                  <a:srgbClr val="0A294A"/>
-                </a:solidFill>
-              </a:rPr>
-              <a:t>just match keywords — a query about 'a diabetic</a:t>
-            </a:r>
-          </a:p>
-          <a:p>
-            <a:pPr algn="l">
-              <a:spcBef>
-                <a:spcPts val="100"/>
-              </a:spcBef>
-            </a:pPr>
-            <a:r>
-              <a:rPr sz="1100" b="0" i="0">
-                <a:solidFill>
-                  <a:srgbClr val="0A294A"/>
-                </a:solidFill>
-              </a:rPr>
-              <a:t>patient with kidney complications' should retrieve</a:t>
-            </a:r>
-          </a:p>
-          <a:p>
-            <a:pPr algn="l">
-              <a:spcBef>
-                <a:spcPts val="100"/>
-              </a:spcBef>
-            </a:pPr>
-            <a:r>
-              <a:rPr sz="1100" b="0" i="0">
-                <a:solidFill>
-                  <a:srgbClr val="0A294A"/>
-                </a:solidFill>
-              </a:rPr>
-              <a:t>notes about CKD with diabetes even if the exact</a:t>
-            </a:r>
-          </a:p>
-          <a:p>
-            <a:pPr algn="l">
-              <a:spcBef>
-                <a:spcPts val="100"/>
-              </a:spcBef>
-            </a:pPr>
-            <a:r>
-              <a:rPr sz="1100" b="0" i="0">
-                <a:solidFill>
-                  <a:srgbClr val="0A294A"/>
-                </a:solidFill>
-              </a:rPr>
-              <a:t>words differ.</a:t>
+              <a:t>CKD with diabetes even if the exact words differ.</a:t>
             </a:r>
           </a:p>
         </p:txBody>
@@ -4546,8 +4900,8 @@
         </p:nvSpPr>
         <p:spPr>
           <a:xfrm>
-            <a:off x="6126480" y="1188720"/>
-            <a:ext cx="5760720" cy="347472"/>
+            <a:off x="6080760" y="1078992"/>
+            <a:ext cx="5806440" cy="347472"/>
           </a:xfrm>
           <a:prstGeom prst="rect">
             <a:avLst/>
@@ -4589,8 +4943,8 @@
         </p:nvSpPr>
         <p:spPr>
           <a:xfrm>
-            <a:off x="6217920" y="1234440"/>
-            <a:ext cx="5577840" cy="301752"/>
+            <a:off x="6172200" y="1124712"/>
+            <a:ext cx="5623559" cy="301752"/>
           </a:xfrm>
           <a:prstGeom prst="rect">
             <a:avLst/>
@@ -4624,8 +4978,8 @@
         </p:nvSpPr>
         <p:spPr>
           <a:xfrm>
-            <a:off x="6126480" y="1536192"/>
-            <a:ext cx="5760720" cy="2852928"/>
+            <a:off x="6080760" y="1426464"/>
+            <a:ext cx="5806440" cy="2944368"/>
           </a:xfrm>
           <a:prstGeom prst="rect">
             <a:avLst/>
@@ -4667,8 +5021,8 @@
         </p:nvSpPr>
         <p:spPr>
           <a:xfrm>
-            <a:off x="6236208" y="1627632"/>
-            <a:ext cx="5541264" cy="2715768"/>
+            <a:off x="6190488" y="1517904"/>
+            <a:ext cx="5586983" cy="2807208"/>
           </a:xfrm>
           <a:prstGeom prst="rect">
             <a:avLst/>
@@ -4693,7 +5047,7 @@
                   <a:srgbClr val="0A294A"/>
                 </a:solidFill>
               </a:rPr>
-              <a:t>Build a retrieval system:</a:t>
+              <a:t>Download the dataset from the Data Description link.</a:t>
             </a:r>
           </a:p>
           <a:p>
@@ -4708,7 +5062,7 @@
                   <a:srgbClr val="0A294A"/>
                 </a:solidFill>
               </a:rPr>
-              <a:t>  natural language query → ranked clinical notes</a:t>
+              <a:t>Build a retrieval system: natural language query</a:t>
             </a:r>
           </a:p>
           <a:p>
@@ -4723,7 +5077,7 @@
                   <a:srgbClr val="0A294A"/>
                 </a:solidFill>
               </a:rPr>
-              <a:t>Use an embedding model — justify your selection</a:t>
+              <a:t>  → returns most relevant clinical notes.</a:t>
             </a:r>
           </a:p>
           <a:p>
@@ -4738,7 +5092,7 @@
                   <a:srgbClr val="0A294A"/>
                 </a:solidFill>
               </a:rPr>
-              <a:t>Add an LLM layer for a concise summary</a:t>
+              <a:t>Use an embedding model of your choice. Justify.</a:t>
             </a:r>
           </a:p>
           <a:p>
@@ -4753,7 +5107,7 @@
                   <a:srgbClr val="0A294A"/>
                 </a:solidFill>
               </a:rPr>
-              <a:t>Evaluate: clinically relevant, not keyword matches</a:t>
+              <a:t>Add an LLM layer for a concise summary.</a:t>
             </a:r>
           </a:p>
           <a:p>
@@ -4768,7 +5122,7 @@
                   <a:srgbClr val="0A294A"/>
                 </a:solidFill>
               </a:rPr>
-              <a:t>(Optional) Fine-tune the embedding model</a:t>
+              <a:t>Evaluate: clinically relevant, not keyword matches.</a:t>
             </a:r>
           </a:p>
           <a:p>
@@ -4783,7 +5137,7 @@
                   <a:srgbClr val="0A294A"/>
                 </a:solidFill>
               </a:rPr>
-              <a:t>Prepare a presentation — max 10 pages</a:t>
+              <a:t>(Optional) Fine-tune embedding model + compare.</a:t>
             </a:r>
           </a:p>
           <a:p>
@@ -4798,7 +5152,7 @@
                   <a:srgbClr val="0A294A"/>
                 </a:solidFill>
               </a:rPr>
-              <a:t>Expose as a REST API service</a:t>
+              <a:t>Prepare one presentation — maximum 10 pages.</a:t>
             </a:r>
           </a:p>
           <a:p>
@@ -4813,7 +5167,22 @@
                   <a:srgbClr val="0A294A"/>
                 </a:solidFill>
               </a:rPr>
-              <a:t>Prepare to present — 30-minute session</a:t>
+              <a:t>Expose as a REST API service.</a:t>
+            </a:r>
+          </a:p>
+          <a:p>
+            <a:pPr algn="l">
+              <a:spcBef>
+                <a:spcPts val="100"/>
+              </a:spcBef>
+            </a:pPr>
+            <a:r>
+              <a:rPr sz="1100" b="0" i="0">
+                <a:solidFill>
+                  <a:srgbClr val="0A294A"/>
+                </a:solidFill>
+              </a:rPr>
+              <a:t>Prepare to present for a 30-minute session.</a:t>
             </a:r>
           </a:p>
         </p:txBody>
@@ -4826,8 +5195,8 @@
         </p:nvSpPr>
         <p:spPr>
           <a:xfrm>
-            <a:off x="274320" y="4617720"/>
-            <a:ext cx="11612880" cy="1691640"/>
+            <a:off x="274320" y="4526280"/>
+            <a:ext cx="11612880" cy="1764792"/>
           </a:xfrm>
           <a:prstGeom prst="rect">
             <a:avLst/>
@@ -4869,8 +5238,8 @@
         </p:nvSpPr>
         <p:spPr>
           <a:xfrm>
-            <a:off x="457200" y="4690872"/>
-            <a:ext cx="11247120" cy="1508760"/>
+            <a:off x="457200" y="4599432"/>
+            <a:ext cx="11247120" cy="365760"/>
           </a:xfrm>
           <a:prstGeom prst="rect">
             <a:avLst/>
@@ -4894,12 +5263,32 @@
               <a:t>Target Audience  ·  Additional Guidance</a:t>
             </a:r>
           </a:p>
-          <a:p>
-            <a:pPr algn="l">
-              <a:spcBef>
-                <a:spcPts val="400"/>
-              </a:spcBef>
-            </a:pPr>
+        </p:txBody>
+      </p:sp>
+      <p:sp>
+        <p:nvSpPr>
+          <p:cNvPr id="16" name="TextBox 15"/>
+          <p:cNvSpPr txBox="1"/>
+          <p:nvPr/>
+        </p:nvSpPr>
+        <p:spPr>
+          <a:xfrm>
+            <a:off x="457200" y="4992624"/>
+            <a:ext cx="11247120" cy="347472"/>
+          </a:xfrm>
+          <a:prstGeom prst="rect">
+            <a:avLst/>
+          </a:prstGeom>
+          <a:noFill/>
+        </p:spPr>
+        <p:txBody>
+          <a:bodyPr wrap="square">
+            <a:spAutoFit/>
+          </a:bodyPr>
+          <a:lstStyle/>
+          <a:p/>
+          <a:p>
+            <a:pPr algn="l"/>
             <a:r>
               <a:rPr sz="1200" b="0" i="0">
                 <a:solidFill>
@@ -4909,12 +5298,32 @@
               <a:t>AI Engineering Manager  ·  Product Manager</a:t>
             </a:r>
           </a:p>
-          <a:p>
-            <a:pPr algn="l">
-              <a:spcBef>
-                <a:spcPts val="400"/>
-              </a:spcBef>
-            </a:pPr>
+        </p:txBody>
+      </p:sp>
+      <p:sp>
+        <p:nvSpPr>
+          <p:cNvPr id="17" name="TextBox 16"/>
+          <p:cNvSpPr txBox="1"/>
+          <p:nvPr/>
+        </p:nvSpPr>
+        <p:spPr>
+          <a:xfrm>
+            <a:off x="457200" y="5358384"/>
+            <a:ext cx="11247120" cy="347472"/>
+          </a:xfrm>
+          <a:prstGeom prst="rect">
+            <a:avLst/>
+          </a:prstGeom>
+          <a:noFill/>
+        </p:spPr>
+        <p:txBody>
+          <a:bodyPr wrap="square">
+            <a:spAutoFit/>
+          </a:bodyPr>
+          <a:lstStyle/>
+          <a:p/>
+          <a:p>
+            <a:pPr algn="l"/>
             <a:r>
               <a:rPr sz="1200" b="0" i="0">
                 <a:solidFill>
@@ -4928,7 +5337,42 @@
       </p:sp>
       <p:sp>
         <p:nvSpPr>
-          <p:cNvPr id="16" name="TextBox 15"/>
+          <p:cNvPr id="18" name="TextBox 17"/>
+          <p:cNvSpPr txBox="1"/>
+          <p:nvPr/>
+        </p:nvSpPr>
+        <p:spPr>
+          <a:xfrm>
+            <a:off x="457200" y="5724144"/>
+            <a:ext cx="11247120" cy="347472"/>
+          </a:xfrm>
+          <a:prstGeom prst="rect">
+            <a:avLst/>
+          </a:prstGeom>
+          <a:noFill/>
+        </p:spPr>
+        <p:txBody>
+          <a:bodyPr wrap="square">
+            <a:spAutoFit/>
+          </a:bodyPr>
+          <a:lstStyle/>
+          <a:p/>
+          <a:p>
+            <a:pPr algn="l"/>
+            <a:r>
+              <a:rPr sz="1100" b="0" i="1">
+                <a:solidFill>
+                  <a:srgbClr val="88BBCC"/>
+                </a:solidFill>
+              </a:rPr>
+              <a:t>Data: https://www.kaggle.com/datasets/tboyle10/medicaltranscriptions</a:t>
+            </a:r>
+          </a:p>
+        </p:txBody>
+      </p:sp>
+      <p:sp>
+        <p:nvSpPr>
+          <p:cNvPr id="19" name="TextBox 18"/>
           <p:cNvSpPr txBox="1"/>
           <p:nvPr/>
         </p:nvSpPr>
@@ -5130,7 +5574,7 @@
                   <a:srgbClr val="AACCDD"/>
                 </a:solidFill>
               </a:rPr>
-              <a:t>mtsamples.csv — real medical transcriptions</a:t>
+              <a:t>mtsamples.csv — 5 000+ real medical transcriptions</a:t>
             </a:r>
           </a:p>
         </p:txBody>
@@ -5143,7 +5587,7 @@
         </p:nvSpPr>
         <p:spPr>
           <a:xfrm>
-            <a:off x="274320" y="1143000"/>
+            <a:off x="274320" y="1078992"/>
             <a:ext cx="2743200" cy="347472"/>
           </a:xfrm>
           <a:prstGeom prst="rect">
@@ -5186,7 +5630,7 @@
         </p:nvSpPr>
         <p:spPr>
           <a:xfrm>
-            <a:off x="365760" y="1188720"/>
+            <a:off x="365760" y="1124712"/>
             <a:ext cx="2560320" cy="301752"/>
           </a:xfrm>
           <a:prstGeom prst="rect">
@@ -5221,8 +5665,8 @@
         </p:nvSpPr>
         <p:spPr>
           <a:xfrm>
-            <a:off x="274320" y="1490472"/>
-            <a:ext cx="2743200" cy="1161288"/>
+            <a:off x="274320" y="1426464"/>
+            <a:ext cx="2743200" cy="1225295"/>
           </a:xfrm>
           <a:prstGeom prst="rect">
             <a:avLst/>
@@ -5264,8 +5708,8 @@
         </p:nvSpPr>
         <p:spPr>
           <a:xfrm>
-            <a:off x="384048" y="1581912"/>
-            <a:ext cx="2523744" cy="1024128"/>
+            <a:off x="384048" y="1517904"/>
+            <a:ext cx="2523744" cy="1088136"/>
           </a:xfrm>
           <a:prstGeom prst="rect">
             <a:avLst/>
@@ -5290,7 +5734,7 @@
                   <a:srgbClr val="0A294A"/>
                 </a:solidFill>
               </a:rPr>
-              <a:t>mtsamples.csv from Kaggle</a:t>
+              <a:t>mtsamples.csv via Kaggle</a:t>
             </a:r>
           </a:p>
           <a:p>
@@ -5305,7 +5749,22 @@
                   <a:srgbClr val="0A294A"/>
                 </a:solidFill>
               </a:rPr>
-              <a:t>5 000+ real medical transcriptions</a:t>
+              <a:t>5 000+ real de-identified</a:t>
+            </a:r>
+          </a:p>
+          <a:p>
+            <a:pPr algn="l">
+              <a:spcBef>
+                <a:spcPts val="100"/>
+              </a:spcBef>
+            </a:pPr>
+            <a:r>
+              <a:rPr sz="1100" b="0" i="0">
+                <a:solidFill>
+                  <a:srgbClr val="0A294A"/>
+                </a:solidFill>
+              </a:rPr>
+              <a:t>medical transcriptions</a:t>
             </a:r>
           </a:p>
         </p:txBody>
@@ -5318,7 +5777,7 @@
         </p:nvSpPr>
         <p:spPr>
           <a:xfrm>
-            <a:off x="3246120" y="1143000"/>
+            <a:off x="3246120" y="1078992"/>
             <a:ext cx="2743200" cy="347472"/>
           </a:xfrm>
           <a:prstGeom prst="rect">
@@ -5361,7 +5820,7 @@
         </p:nvSpPr>
         <p:spPr>
           <a:xfrm>
-            <a:off x="3337560" y="1188720"/>
+            <a:off x="3337560" y="1124712"/>
             <a:ext cx="2560320" cy="301752"/>
           </a:xfrm>
           <a:prstGeom prst="rect">
@@ -5396,8 +5855,8 @@
         </p:nvSpPr>
         <p:spPr>
           <a:xfrm>
-            <a:off x="3246120" y="1490472"/>
-            <a:ext cx="2743200" cy="1161288"/>
+            <a:off x="3246120" y="1426464"/>
+            <a:ext cx="2743200" cy="1225295"/>
           </a:xfrm>
           <a:prstGeom prst="rect">
             <a:avLst/>
@@ -5439,8 +5898,8 @@
         </p:nvSpPr>
         <p:spPr>
           <a:xfrm>
-            <a:off x="3355848" y="1581912"/>
-            <a:ext cx="2523744" cy="1024128"/>
+            <a:off x="3355848" y="1517904"/>
+            <a:ext cx="2523744" cy="1088136"/>
           </a:xfrm>
           <a:prstGeom prst="rect">
             <a:avLst/>
@@ -5465,7 +5924,7 @@
                   <a:srgbClr val="0A294A"/>
                 </a:solidFill>
               </a:rPr>
-              <a:t>medical_specialty, description,</a:t>
+              <a:t>medical_specialty</a:t>
             </a:r>
           </a:p>
           <a:p>
@@ -5480,7 +5939,37 @@
                   <a:srgbClr val="0A294A"/>
                 </a:solidFill>
               </a:rPr>
-              <a:t>transcription, keywords</a:t>
+              <a:t>description</a:t>
+            </a:r>
+          </a:p>
+          <a:p>
+            <a:pPr algn="l">
+              <a:spcBef>
+                <a:spcPts val="100"/>
+              </a:spcBef>
+            </a:pPr>
+            <a:r>
+              <a:rPr sz="1100" b="0" i="0">
+                <a:solidFill>
+                  <a:srgbClr val="0A294A"/>
+                </a:solidFill>
+              </a:rPr>
+              <a:t>transcription</a:t>
+            </a:r>
+          </a:p>
+          <a:p>
+            <a:pPr algn="l">
+              <a:spcBef>
+                <a:spcPts val="100"/>
+              </a:spcBef>
+            </a:pPr>
+            <a:r>
+              <a:rPr sz="1100" b="0" i="0">
+                <a:solidFill>
+                  <a:srgbClr val="0A294A"/>
+                </a:solidFill>
+              </a:rPr>
+              <a:t>keywords</a:t>
             </a:r>
           </a:p>
         </p:txBody>
@@ -5493,7 +5982,7 @@
         </p:nvSpPr>
         <p:spPr>
           <a:xfrm>
-            <a:off x="6217920" y="1143000"/>
+            <a:off x="6217920" y="1078992"/>
             <a:ext cx="2743200" cy="347472"/>
           </a:xfrm>
           <a:prstGeom prst="rect">
@@ -5536,7 +6025,7 @@
         </p:nvSpPr>
         <p:spPr>
           <a:xfrm>
-            <a:off x="6309359" y="1188720"/>
+            <a:off x="6309359" y="1124712"/>
             <a:ext cx="2560320" cy="301752"/>
           </a:xfrm>
           <a:prstGeom prst="rect">
@@ -5571,8 +6060,8 @@
         </p:nvSpPr>
         <p:spPr>
           <a:xfrm>
-            <a:off x="6217920" y="1490472"/>
-            <a:ext cx="2743200" cy="1161288"/>
+            <a:off x="6217920" y="1426464"/>
+            <a:ext cx="2743200" cy="1225295"/>
           </a:xfrm>
           <a:prstGeom prst="rect">
             <a:avLst/>
@@ -5614,8 +6103,8 @@
         </p:nvSpPr>
         <p:spPr>
           <a:xfrm>
-            <a:off x="6327648" y="1581912"/>
-            <a:ext cx="2523744" cy="1024128"/>
+            <a:off x="6327648" y="1517904"/>
+            <a:ext cx="2523744" cy="1088136"/>
           </a:xfrm>
           <a:prstGeom prst="rect">
             <a:avLst/>
@@ -5640,7 +6129,7 @@
                   <a:srgbClr val="0A294A"/>
                 </a:solidFill>
               </a:rPr>
-              <a:t>40+ including Cardiology,</a:t>
+              <a:t>40+ clinical domains</a:t>
             </a:r>
           </a:p>
           <a:p>
@@ -5655,7 +6144,37 @@
                   <a:srgbClr val="0A294A"/>
                 </a:solidFill>
               </a:rPr>
-              <a:t>Nephrology, Neurology, Surgery</a:t>
+              <a:t>Cardiology, Nephrology,</a:t>
+            </a:r>
+          </a:p>
+          <a:p>
+            <a:pPr algn="l">
+              <a:spcBef>
+                <a:spcPts val="100"/>
+              </a:spcBef>
+            </a:pPr>
+            <a:r>
+              <a:rPr sz="1100" b="0" i="0">
+                <a:solidFill>
+                  <a:srgbClr val="0A294A"/>
+                </a:solidFill>
+              </a:rPr>
+              <a:t>Pulmonology, Orthopaedics,</a:t>
+            </a:r>
+          </a:p>
+          <a:p>
+            <a:pPr algn="l">
+              <a:spcBef>
+                <a:spcPts val="100"/>
+              </a:spcBef>
+            </a:pPr>
+            <a:r>
+              <a:rPr sz="1100" b="0" i="0">
+                <a:solidFill>
+                  <a:srgbClr val="0A294A"/>
+                </a:solidFill>
+              </a:rPr>
+              <a:t>Neurology, Surgery, …</a:t>
             </a:r>
           </a:p>
         </p:txBody>
@@ -5668,7 +6187,7 @@
         </p:nvSpPr>
         <p:spPr>
           <a:xfrm>
-            <a:off x="9189720" y="1143000"/>
+            <a:off x="9189720" y="1078992"/>
             <a:ext cx="2743200" cy="347472"/>
           </a:xfrm>
           <a:prstGeom prst="rect">
@@ -5711,7 +6230,7 @@
         </p:nvSpPr>
         <p:spPr>
           <a:xfrm>
-            <a:off x="9281160" y="1188720"/>
+            <a:off x="9281160" y="1124712"/>
             <a:ext cx="2560320" cy="301752"/>
           </a:xfrm>
           <a:prstGeom prst="rect">
@@ -5746,8 +6265,8 @@
         </p:nvSpPr>
         <p:spPr>
           <a:xfrm>
-            <a:off x="9189720" y="1490472"/>
-            <a:ext cx="2743200" cy="1161288"/>
+            <a:off x="9189720" y="1426464"/>
+            <a:ext cx="2743200" cy="1225295"/>
           </a:xfrm>
           <a:prstGeom prst="rect">
             <a:avLst/>
@@ -5789,8 +6308,8 @@
         </p:nvSpPr>
         <p:spPr>
           <a:xfrm>
-            <a:off x="9299448" y="1581912"/>
-            <a:ext cx="2523744" cy="1024128"/>
+            <a:off x="9299448" y="1517904"/>
+            <a:ext cx="2523744" cy="1088136"/>
           </a:xfrm>
           <a:prstGeom prst="rect">
             <a:avLst/>
@@ -5815,7 +6334,7 @@
                   <a:srgbClr val="0A294A"/>
                 </a:solidFill>
               </a:rPr>
-              <a:t>Strip whitespace</a:t>
+              <a:t>Drop null/short transcriptions</a:t>
             </a:r>
           </a:p>
           <a:p>
@@ -5830,7 +6349,37 @@
                   <a:srgbClr val="0A294A"/>
                 </a:solidFill>
               </a:rPr>
-              <a:t>Drop empty transcriptions</a:t>
+              <a:t>Collapse whitespace</a:t>
+            </a:r>
+          </a:p>
+          <a:p>
+            <a:pPr algn="l">
+              <a:spcBef>
+                <a:spcPts val="100"/>
+              </a:spcBef>
+            </a:pPr>
+            <a:r>
+              <a:rPr sz="1100" b="0" i="0">
+                <a:solidFill>
+                  <a:srgbClr val="0A294A"/>
+                </a:solidFill>
+              </a:rPr>
+              <a:t>Concatenate fields</a:t>
+            </a:r>
+          </a:p>
+          <a:p>
+            <a:pPr algn="l">
+              <a:spcBef>
+                <a:spcPts val="100"/>
+              </a:spcBef>
+            </a:pPr>
+            <a:r>
+              <a:rPr sz="1100" b="0" i="0">
+                <a:solidFill>
+                  <a:srgbClr val="0A294A"/>
+                </a:solidFill>
+              </a:rPr>
+              <a:t>Truncate to 2 000 chars</a:t>
             </a:r>
           </a:p>
         </p:txBody>
@@ -5843,8 +6392,8 @@
         </p:nvSpPr>
         <p:spPr>
           <a:xfrm>
-            <a:off x="274320" y="2880360"/>
-            <a:ext cx="11612880" cy="731520"/>
+            <a:off x="274320" y="2798064"/>
+            <a:ext cx="11612880" cy="804672"/>
           </a:xfrm>
           <a:prstGeom prst="rect">
             <a:avLst/>
@@ -5886,8 +6435,8 @@
         </p:nvSpPr>
         <p:spPr>
           <a:xfrm>
-            <a:off x="457200" y="2944368"/>
-            <a:ext cx="11247120" cy="594360"/>
+            <a:off x="457200" y="2852928"/>
+            <a:ext cx="11247120" cy="292608"/>
           </a:xfrm>
           <a:prstGeom prst="rect">
             <a:avLst/>
@@ -5911,6 +6460,30 @@
               <a:t>Embedding Input Format:</a:t>
             </a:r>
           </a:p>
+        </p:txBody>
+      </p:sp>
+      <p:sp>
+        <p:nvSpPr>
+          <p:cNvPr id="24" name="TextBox 23"/>
+          <p:cNvSpPr txBox="1"/>
+          <p:nvPr/>
+        </p:nvSpPr>
+        <p:spPr>
+          <a:xfrm>
+            <a:off x="457200" y="3163824"/>
+            <a:ext cx="11247120" cy="384048"/>
+          </a:xfrm>
+          <a:prstGeom prst="rect">
+            <a:avLst/>
+          </a:prstGeom>
+          <a:noFill/>
+        </p:spPr>
+        <p:txBody>
+          <a:bodyPr wrap="square">
+            <a:spAutoFit/>
+          </a:bodyPr>
+          <a:lstStyle/>
+          <a:p/>
           <a:p>
             <a:pPr algn="l"/>
             <a:r>
@@ -5926,13 +6499,13 @@
       </p:sp>
       <p:sp>
         <p:nvSpPr>
-          <p:cNvPr id="24" name="Rectangle 23"/>
+          <p:cNvPr id="25" name="Rectangle 24"/>
           <p:cNvSpPr/>
           <p:nvPr/>
         </p:nvSpPr>
         <p:spPr>
           <a:xfrm>
-            <a:off x="274320" y="3794760"/>
+            <a:off x="274320" y="3730752"/>
             <a:ext cx="11612880" cy="384048"/>
           </a:xfrm>
           <a:prstGeom prst="rect">
@@ -5969,14 +6542,14 @@
       </p:sp>
       <p:sp>
         <p:nvSpPr>
-          <p:cNvPr id="25" name="TextBox 24"/>
-          <p:cNvSpPr txBox="1"/>
-          <p:nvPr/>
-        </p:nvSpPr>
-        <p:spPr>
-          <a:xfrm>
-            <a:off x="457200" y="3840480"/>
-            <a:ext cx="11247120" cy="320040"/>
+          <p:cNvPr id="26" name="TextBox 25"/>
+          <p:cNvSpPr txBox="1"/>
+          <p:nvPr/>
+        </p:nvSpPr>
+        <p:spPr>
+          <a:xfrm>
+            <a:off x="457200" y="3776472"/>
+            <a:ext cx="11247120" cy="310896"/>
           </a:xfrm>
           <a:prstGeom prst="rect">
             <a:avLst/>
@@ -5997,21 +6570,21 @@
                   <a:srgbClr val="FFFFFF"/>
                 </a:solidFill>
               </a:rPr>
-              <a:t>Specialty                         Description (excerpt)                                         Keywords</a:t>
-            </a:r>
-          </a:p>
-        </p:txBody>
-      </p:sp>
-      <p:sp>
-        <p:nvSpPr>
-          <p:cNvPr id="26" name="Rectangle 25"/>
+              <a:t>Specialty              Description (excerpt)                                      Keywords</a:t>
+            </a:r>
+          </a:p>
+        </p:txBody>
+      </p:sp>
+      <p:sp>
+        <p:nvSpPr>
+          <p:cNvPr id="27" name="Rectangle 26"/>
           <p:cNvSpPr/>
           <p:nvPr/>
         </p:nvSpPr>
         <p:spPr>
           <a:xfrm>
-            <a:off x="274320" y="4178808"/>
-            <a:ext cx="11612880" cy="640080"/>
+            <a:off x="274320" y="4114800"/>
+            <a:ext cx="11612880" cy="621792"/>
           </a:xfrm>
           <a:prstGeom prst="rect">
             <a:avLst/>
@@ -6047,14 +6620,14 @@
       </p:sp>
       <p:sp>
         <p:nvSpPr>
-          <p:cNvPr id="27" name="TextBox 26"/>
-          <p:cNvSpPr txBox="1"/>
-          <p:nvPr/>
-        </p:nvSpPr>
-        <p:spPr>
-          <a:xfrm>
-            <a:off x="365760" y="4251960"/>
-            <a:ext cx="2194560" cy="512064"/>
+          <p:cNvPr id="28" name="TextBox 27"/>
+          <p:cNvSpPr txBox="1"/>
+          <p:nvPr/>
+        </p:nvSpPr>
+        <p:spPr>
+          <a:xfrm>
+            <a:off x="365760" y="4206240"/>
+            <a:ext cx="2148840" cy="475488"/>
           </a:xfrm>
           <a:prstGeom prst="rect">
             <a:avLst/>
@@ -6082,14 +6655,14 @@
       </p:sp>
       <p:sp>
         <p:nvSpPr>
-          <p:cNvPr id="28" name="TextBox 27"/>
-          <p:cNvSpPr txBox="1"/>
-          <p:nvPr/>
-        </p:nvSpPr>
-        <p:spPr>
-          <a:xfrm>
-            <a:off x="2743200" y="4251960"/>
-            <a:ext cx="5577840" cy="512064"/>
+          <p:cNvPr id="29" name="TextBox 28"/>
+          <p:cNvSpPr txBox="1"/>
+          <p:nvPr/>
+        </p:nvSpPr>
+        <p:spPr>
+          <a:xfrm>
+            <a:off x="2651760" y="4206240"/>
+            <a:ext cx="5669280" cy="475488"/>
           </a:xfrm>
           <a:prstGeom prst="rect">
             <a:avLst/>
@@ -6110,21 +6683,21 @@
                   <a:srgbClr val="0A294A"/>
                 </a:solidFill>
               </a:rPr>
-              <a:t>Patient with CKD stage 3 and type 2 diabetes presenting for follow-up</a:t>
-            </a:r>
-          </a:p>
-        </p:txBody>
-      </p:sp>
-      <p:sp>
-        <p:nvSpPr>
-          <p:cNvPr id="29" name="TextBox 28"/>
-          <p:cNvSpPr txBox="1"/>
-          <p:nvPr/>
-        </p:nvSpPr>
-        <p:spPr>
-          <a:xfrm>
-            <a:off x="8503920" y="4251960"/>
-            <a:ext cx="3200400" cy="512064"/>
+              <a:t>Patient with CKD stage 3 and T2DM presenting for follow-up</a:t>
+            </a:r>
+          </a:p>
+        </p:txBody>
+      </p:sp>
+      <p:sp>
+        <p:nvSpPr>
+          <p:cNvPr id="30" name="TextBox 29"/>
+          <p:cNvSpPr txBox="1"/>
+          <p:nvPr/>
+        </p:nvSpPr>
+        <p:spPr>
+          <a:xfrm>
+            <a:off x="8458200" y="4206240"/>
+            <a:ext cx="3200400" cy="475488"/>
           </a:xfrm>
           <a:prstGeom prst="rect">
             <a:avLst/>
@@ -6145,21 +6718,21 @@
                   <a:srgbClr val="0A294A"/>
                 </a:solidFill>
               </a:rPr>
-              <a:t>kidney disease, creatinine, GFR, diabetes mellitus</a:t>
-            </a:r>
-          </a:p>
-        </p:txBody>
-      </p:sp>
-      <p:sp>
-        <p:nvSpPr>
-          <p:cNvPr id="30" name="Rectangle 29"/>
+              <a:t>CKD, creatinine, GFR, diabetes mellitus</a:t>
+            </a:r>
+          </a:p>
+        </p:txBody>
+      </p:sp>
+      <p:sp>
+        <p:nvSpPr>
+          <p:cNvPr id="31" name="Rectangle 30"/>
           <p:cNvSpPr/>
           <p:nvPr/>
         </p:nvSpPr>
         <p:spPr>
           <a:xfrm>
-            <a:off x="274320" y="4818888"/>
-            <a:ext cx="11612880" cy="640080"/>
+            <a:off x="274320" y="4736592"/>
+            <a:ext cx="11612880" cy="621792"/>
           </a:xfrm>
           <a:prstGeom prst="rect">
             <a:avLst/>
@@ -6195,14 +6768,14 @@
       </p:sp>
       <p:sp>
         <p:nvSpPr>
-          <p:cNvPr id="31" name="TextBox 30"/>
-          <p:cNvSpPr txBox="1"/>
-          <p:nvPr/>
-        </p:nvSpPr>
-        <p:spPr>
-          <a:xfrm>
-            <a:off x="365760" y="4892040"/>
-            <a:ext cx="2194560" cy="512064"/>
+          <p:cNvPr id="32" name="TextBox 31"/>
+          <p:cNvSpPr txBox="1"/>
+          <p:nvPr/>
+        </p:nvSpPr>
+        <p:spPr>
+          <a:xfrm>
+            <a:off x="365760" y="4828031"/>
+            <a:ext cx="2148840" cy="475488"/>
           </a:xfrm>
           <a:prstGeom prst="rect">
             <a:avLst/>
@@ -6230,14 +6803,14 @@
       </p:sp>
       <p:sp>
         <p:nvSpPr>
-          <p:cNvPr id="32" name="TextBox 31"/>
-          <p:cNvSpPr txBox="1"/>
-          <p:nvPr/>
-        </p:nvSpPr>
-        <p:spPr>
-          <a:xfrm>
-            <a:off x="2743200" y="4892040"/>
-            <a:ext cx="5577840" cy="512064"/>
+          <p:cNvPr id="33" name="TextBox 32"/>
+          <p:cNvSpPr txBox="1"/>
+          <p:nvPr/>
+        </p:nvSpPr>
+        <p:spPr>
+          <a:xfrm>
+            <a:off x="2651760" y="4828031"/>
+            <a:ext cx="5669280" cy="475488"/>
           </a:xfrm>
           <a:prstGeom prst="rect">
             <a:avLst/>
@@ -6258,21 +6831,21 @@
                   <a:srgbClr val="0A294A"/>
                 </a:solidFill>
               </a:rPr>
-              <a:t>62yo male with STEMI, anterior wall, taken to cath lab emergently</a:t>
-            </a:r>
-          </a:p>
-        </p:txBody>
-      </p:sp>
-      <p:sp>
-        <p:nvSpPr>
-          <p:cNvPr id="33" name="TextBox 32"/>
-          <p:cNvSpPr txBox="1"/>
-          <p:nvPr/>
-        </p:nvSpPr>
-        <p:spPr>
-          <a:xfrm>
-            <a:off x="8503920" y="4892040"/>
-            <a:ext cx="3200400" cy="512064"/>
+              <a:t>62yo male with STEMI taken to cath lab emergently</a:t>
+            </a:r>
+          </a:p>
+        </p:txBody>
+      </p:sp>
+      <p:sp>
+        <p:nvSpPr>
+          <p:cNvPr id="34" name="TextBox 33"/>
+          <p:cNvSpPr txBox="1"/>
+          <p:nvPr/>
+        </p:nvSpPr>
+        <p:spPr>
+          <a:xfrm>
+            <a:off x="8458200" y="4828031"/>
+            <a:ext cx="3200400" cy="475488"/>
           </a:xfrm>
           <a:prstGeom prst="rect">
             <a:avLst/>
@@ -6293,21 +6866,21 @@
                   <a:srgbClr val="0A294A"/>
                 </a:solidFill>
               </a:rPr>
-              <a:t>myocardial infarction, troponin, PCI, stent, EKG</a:t>
-            </a:r>
-          </a:p>
-        </p:txBody>
-      </p:sp>
-      <p:sp>
-        <p:nvSpPr>
-          <p:cNvPr id="34" name="Rectangle 33"/>
+              <a:t>myocardial infarction, troponin, PCI, stent</a:t>
+            </a:r>
+          </a:p>
+        </p:txBody>
+      </p:sp>
+      <p:sp>
+        <p:nvSpPr>
+          <p:cNvPr id="35" name="Rectangle 34"/>
           <p:cNvSpPr/>
           <p:nvPr/>
         </p:nvSpPr>
         <p:spPr>
           <a:xfrm>
-            <a:off x="274320" y="5458968"/>
-            <a:ext cx="11612880" cy="640080"/>
+            <a:off x="274320" y="5358384"/>
+            <a:ext cx="11612880" cy="621792"/>
           </a:xfrm>
           <a:prstGeom prst="rect">
             <a:avLst/>
@@ -6343,14 +6916,14 @@
       </p:sp>
       <p:sp>
         <p:nvSpPr>
-          <p:cNvPr id="35" name="TextBox 34"/>
-          <p:cNvSpPr txBox="1"/>
-          <p:nvPr/>
-        </p:nvSpPr>
-        <p:spPr>
-          <a:xfrm>
-            <a:off x="365760" y="5532120"/>
-            <a:ext cx="2194560" cy="512064"/>
+          <p:cNvPr id="36" name="TextBox 35"/>
+          <p:cNvSpPr txBox="1"/>
+          <p:nvPr/>
+        </p:nvSpPr>
+        <p:spPr>
+          <a:xfrm>
+            <a:off x="365760" y="5449824"/>
+            <a:ext cx="2148840" cy="475488"/>
           </a:xfrm>
           <a:prstGeom prst="rect">
             <a:avLst/>
@@ -6378,14 +6951,14 @@
       </p:sp>
       <p:sp>
         <p:nvSpPr>
-          <p:cNvPr id="36" name="TextBox 35"/>
-          <p:cNvSpPr txBox="1"/>
-          <p:nvPr/>
-        </p:nvSpPr>
-        <p:spPr>
-          <a:xfrm>
-            <a:off x="2743200" y="5532120"/>
-            <a:ext cx="5577840" cy="512064"/>
+          <p:cNvPr id="37" name="TextBox 36"/>
+          <p:cNvSpPr txBox="1"/>
+          <p:nvPr/>
+        </p:nvSpPr>
+        <p:spPr>
+          <a:xfrm>
+            <a:off x="2651760" y="5449824"/>
+            <a:ext cx="5669280" cy="475488"/>
           </a:xfrm>
           <a:prstGeom prst="rect">
             <a:avLst/>
@@ -6406,21 +6979,21 @@
                   <a:srgbClr val="0A294A"/>
                 </a:solidFill>
               </a:rPr>
-              <a:t>New-onset seizure, MRI brain ordered, EEG pending, AED started</a:t>
-            </a:r>
-          </a:p>
-        </p:txBody>
-      </p:sp>
-      <p:sp>
-        <p:nvSpPr>
-          <p:cNvPr id="37" name="TextBox 36"/>
-          <p:cNvSpPr txBox="1"/>
-          <p:nvPr/>
-        </p:nvSpPr>
-        <p:spPr>
-          <a:xfrm>
-            <a:off x="8503920" y="5532120"/>
-            <a:ext cx="3200400" cy="512064"/>
+              <a:t>New-onset seizure, MRI brain ordered, AED started</a:t>
+            </a:r>
+          </a:p>
+        </p:txBody>
+      </p:sp>
+      <p:sp>
+        <p:nvSpPr>
+          <p:cNvPr id="38" name="TextBox 37"/>
+          <p:cNvSpPr txBox="1"/>
+          <p:nvPr/>
+        </p:nvSpPr>
+        <p:spPr>
+          <a:xfrm>
+            <a:off x="8458200" y="5449824"/>
+            <a:ext cx="3200400" cy="475488"/>
           </a:xfrm>
           <a:prstGeom prst="rect">
             <a:avLst/>
@@ -6441,14 +7014,49 @@
                   <a:srgbClr val="0A294A"/>
                 </a:solidFill>
               </a:rPr>
-              <a:t>epilepsy, levetiracetam, MRI, electroencephalogram</a:t>
-            </a:r>
-          </a:p>
-        </p:txBody>
-      </p:sp>
-      <p:sp>
-        <p:nvSpPr>
-          <p:cNvPr id="38" name="TextBox 37"/>
+              <a:t>epilepsy, levetiracetam, MRI, EEG</a:t>
+            </a:r>
+          </a:p>
+        </p:txBody>
+      </p:sp>
+      <p:sp>
+        <p:nvSpPr>
+          <p:cNvPr id="39" name="TextBox 38"/>
+          <p:cNvSpPr txBox="1"/>
+          <p:nvPr/>
+        </p:nvSpPr>
+        <p:spPr>
+          <a:xfrm>
+            <a:off x="274320" y="6007608"/>
+            <a:ext cx="11612880" cy="292608"/>
+          </a:xfrm>
+          <a:prstGeom prst="rect">
+            <a:avLst/>
+          </a:prstGeom>
+          <a:noFill/>
+        </p:spPr>
+        <p:txBody>
+          <a:bodyPr wrap="square">
+            <a:spAutoFit/>
+          </a:bodyPr>
+          <a:lstStyle/>
+          <a:p/>
+          <a:p>
+            <a:pPr algn="l"/>
+            <a:r>
+              <a:rPr sz="1000" b="0" i="1">
+                <a:solidFill>
+                  <a:srgbClr val="55657A"/>
+                </a:solidFill>
+              </a:rPr>
+              <a:t>2 000-char truncation preserves chief complaint, diagnosis, and key findings in 99%+ of notes</a:t>
+            </a:r>
+          </a:p>
+        </p:txBody>
+      </p:sp>
+      <p:sp>
+        <p:nvSpPr>
+          <p:cNvPr id="40" name="TextBox 39"/>
           <p:cNvSpPr txBox="1"/>
           <p:nvPr/>
         </p:nvSpPr>
@@ -6663,7 +7271,7 @@
         </p:nvSpPr>
         <p:spPr>
           <a:xfrm>
-            <a:off x="274320" y="1143000"/>
+            <a:off x="274320" y="1078992"/>
             <a:ext cx="2011680" cy="347472"/>
           </a:xfrm>
           <a:prstGeom prst="rect">
@@ -6706,7 +7314,7 @@
         </p:nvSpPr>
         <p:spPr>
           <a:xfrm>
-            <a:off x="365760" y="1188720"/>
+            <a:off x="365760" y="1124712"/>
             <a:ext cx="1828800" cy="301752"/>
           </a:xfrm>
           <a:prstGeom prst="rect">
@@ -6741,7 +7349,7 @@
         </p:nvSpPr>
         <p:spPr>
           <a:xfrm>
-            <a:off x="274320" y="1490472"/>
+            <a:off x="274320" y="1426464"/>
             <a:ext cx="2011680" cy="1984248"/>
           </a:xfrm>
           <a:prstGeom prst="rect">
@@ -6784,7 +7392,7 @@
         </p:nvSpPr>
         <p:spPr>
           <a:xfrm>
-            <a:off x="384048" y="1581912"/>
+            <a:off x="384048" y="1517904"/>
             <a:ext cx="1792224" cy="1847088"/>
           </a:xfrm>
           <a:prstGeom prst="rect">
@@ -6825,7 +7433,7 @@
                   <a:srgbClr val="0A294A"/>
                 </a:solidFill>
               </a:rPr>
-              <a:t>Clean text</a:t>
+              <a:t>Clean &amp; truncate</a:t>
             </a:r>
           </a:p>
           <a:p>
@@ -6840,7 +7448,7 @@
                   <a:srgbClr val="0A294A"/>
                 </a:solidFill>
               </a:rPr>
-              <a:t>Build records</a:t>
+              <a:t>Build text records</a:t>
             </a:r>
           </a:p>
         </p:txBody>
@@ -6853,7 +7461,7 @@
         </p:nvSpPr>
         <p:spPr>
           <a:xfrm>
-            <a:off x="2304288" y="1828800"/>
+            <a:off x="2304288" y="2084831"/>
             <a:ext cx="237744" cy="365760"/>
           </a:xfrm>
           <a:prstGeom prst="rect">
@@ -6888,7 +7496,7 @@
         </p:nvSpPr>
         <p:spPr>
           <a:xfrm>
-            <a:off x="2542032" y="1143000"/>
+            <a:off x="2532888" y="1078992"/>
             <a:ext cx="2011680" cy="347472"/>
           </a:xfrm>
           <a:prstGeom prst="rect">
@@ -6931,7 +7539,7 @@
         </p:nvSpPr>
         <p:spPr>
           <a:xfrm>
-            <a:off x="2633472" y="1188720"/>
+            <a:off x="2624328" y="1124712"/>
             <a:ext cx="1828800" cy="301752"/>
           </a:xfrm>
           <a:prstGeom prst="rect">
@@ -6966,7 +7574,7 @@
         </p:nvSpPr>
         <p:spPr>
           <a:xfrm>
-            <a:off x="2542032" y="1490472"/>
+            <a:off x="2532888" y="1426464"/>
             <a:ext cx="2011680" cy="1984248"/>
           </a:xfrm>
           <a:prstGeom prst="rect">
@@ -7009,7 +7617,7 @@
         </p:nvSpPr>
         <p:spPr>
           <a:xfrm>
-            <a:off x="2651760" y="1581912"/>
+            <a:off x="2642616" y="1517904"/>
             <a:ext cx="1792224" cy="1847088"/>
           </a:xfrm>
           <a:prstGeom prst="rect">
@@ -7035,7 +7643,7 @@
                   <a:srgbClr val="0A294A"/>
                 </a:solidFill>
               </a:rPr>
-              <a:t>sentence-</a:t>
+              <a:t>sentence-transformers</a:t>
             </a:r>
           </a:p>
           <a:p>
@@ -7050,7 +7658,7 @@
                   <a:srgbClr val="0A294A"/>
                 </a:solidFill>
               </a:rPr>
-              <a:t>transformers</a:t>
+              <a:t>384-dim float32</a:t>
             </a:r>
           </a:p>
           <a:p>
@@ -7065,7 +7673,7 @@
                   <a:srgbClr val="0A294A"/>
                 </a:solidFill>
               </a:rPr>
-              <a:t>L2-normalise</a:t>
+              <a:t>L2-normalised</a:t>
             </a:r>
           </a:p>
         </p:txBody>
@@ -7078,7 +7686,7 @@
         </p:nvSpPr>
         <p:spPr>
           <a:xfrm>
-            <a:off x="4572000" y="1828800"/>
+            <a:off x="4562856" y="2084831"/>
             <a:ext cx="237744" cy="365760"/>
           </a:xfrm>
           <a:prstGeom prst="rect">
@@ -7113,7 +7721,7 @@
         </p:nvSpPr>
         <p:spPr>
           <a:xfrm>
-            <a:off x="4809744" y="1143000"/>
+            <a:off x="4791456" y="1078992"/>
             <a:ext cx="2011680" cy="347472"/>
           </a:xfrm>
           <a:prstGeom prst="rect">
@@ -7156,7 +7764,7 @@
         </p:nvSpPr>
         <p:spPr>
           <a:xfrm>
-            <a:off x="4901184" y="1188720"/>
+            <a:off x="4882896" y="1124712"/>
             <a:ext cx="1828800" cy="301752"/>
           </a:xfrm>
           <a:prstGeom prst="rect">
@@ -7191,7 +7799,7 @@
         </p:nvSpPr>
         <p:spPr>
           <a:xfrm>
-            <a:off x="4809744" y="1490472"/>
+            <a:off x="4791456" y="1426464"/>
             <a:ext cx="2011680" cy="1984248"/>
           </a:xfrm>
           <a:prstGeom prst="rect">
@@ -7234,7 +7842,7 @@
         </p:nvSpPr>
         <p:spPr>
           <a:xfrm>
-            <a:off x="4919472" y="1581912"/>
+            <a:off x="4901184" y="1517904"/>
             <a:ext cx="1792224" cy="1847088"/>
           </a:xfrm>
           <a:prstGeom prst="rect">
@@ -7260,7 +7868,7 @@
                   <a:srgbClr val="0A294A"/>
                 </a:solidFill>
               </a:rPr>
-              <a:t>FAISS</a:t>
+              <a:t>FAISS IndexFlatIP</a:t>
             </a:r>
           </a:p>
           <a:p>
@@ -7275,7 +7883,7 @@
                   <a:srgbClr val="0A294A"/>
                 </a:solidFill>
               </a:rPr>
-              <a:t>IndexFlatIP</a:t>
+              <a:t>Exact cosine search</a:t>
             </a:r>
           </a:p>
           <a:p>
@@ -7290,7 +7898,7 @@
                   <a:srgbClr val="0A294A"/>
                 </a:solidFill>
               </a:rPr>
-              <a:t>Serialise</a:t>
+              <a:t>Serialised to disk</a:t>
             </a:r>
           </a:p>
         </p:txBody>
@@ -7303,7 +7911,7 @@
         </p:nvSpPr>
         <p:spPr>
           <a:xfrm>
-            <a:off x="6839712" y="1828800"/>
+            <a:off x="6821424" y="2084831"/>
             <a:ext cx="237744" cy="365760"/>
           </a:xfrm>
           <a:prstGeom prst="rect">
@@ -7338,7 +7946,7 @@
         </p:nvSpPr>
         <p:spPr>
           <a:xfrm>
-            <a:off x="7077456" y="1143000"/>
+            <a:off x="7050024" y="1078992"/>
             <a:ext cx="2011680" cy="347472"/>
           </a:xfrm>
           <a:prstGeom prst="rect">
@@ -7381,7 +7989,7 @@
         </p:nvSpPr>
         <p:spPr>
           <a:xfrm>
-            <a:off x="7168896" y="1188720"/>
+            <a:off x="7141464" y="1124712"/>
             <a:ext cx="1828800" cy="301752"/>
           </a:xfrm>
           <a:prstGeom prst="rect">
@@ -7416,7 +8024,7 @@
         </p:nvSpPr>
         <p:spPr>
           <a:xfrm>
-            <a:off x="7077456" y="1490472"/>
+            <a:off x="7050024" y="1426464"/>
             <a:ext cx="2011680" cy="1984248"/>
           </a:xfrm>
           <a:prstGeom prst="rect">
@@ -7459,7 +8067,7 @@
         </p:nvSpPr>
         <p:spPr>
           <a:xfrm>
-            <a:off x="7187184" y="1581912"/>
+            <a:off x="7159752" y="1517904"/>
             <a:ext cx="1792224" cy="1847088"/>
           </a:xfrm>
           <a:prstGeom prst="rect">
@@ -7500,7 +8108,7 @@
                   <a:srgbClr val="0A294A"/>
                 </a:solidFill>
               </a:rPr>
-              <a:t>Cosine search</a:t>
+              <a:t>Top-k cosine search</a:t>
             </a:r>
           </a:p>
           <a:p>
@@ -7515,7 +8123,7 @@
                   <a:srgbClr val="0A294A"/>
                 </a:solidFill>
               </a:rPr>
-              <a:t>Top-k docs</a:t>
+              <a:t>Attach metadata</a:t>
             </a:r>
           </a:p>
         </p:txBody>
@@ -7528,7 +8136,7 @@
         </p:nvSpPr>
         <p:spPr>
           <a:xfrm>
-            <a:off x="9107424" y="1828800"/>
+            <a:off x="9079992" y="2084831"/>
             <a:ext cx="237744" cy="365760"/>
           </a:xfrm>
           <a:prstGeom prst="rect">
@@ -7563,7 +8171,7 @@
         </p:nvSpPr>
         <p:spPr>
           <a:xfrm>
-            <a:off x="9345168" y="1143000"/>
+            <a:off x="9308592" y="1078992"/>
             <a:ext cx="2011680" cy="347472"/>
           </a:xfrm>
           <a:prstGeom prst="rect">
@@ -7606,7 +8214,7 @@
         </p:nvSpPr>
         <p:spPr>
           <a:xfrm>
-            <a:off x="9436608" y="1188720"/>
+            <a:off x="9400032" y="1124712"/>
             <a:ext cx="1828800" cy="301752"/>
           </a:xfrm>
           <a:prstGeom prst="rect">
@@ -7641,7 +8249,7 @@
         </p:nvSpPr>
         <p:spPr>
           <a:xfrm>
-            <a:off x="9345168" y="1490472"/>
+            <a:off x="9308592" y="1426464"/>
             <a:ext cx="2011680" cy="1984248"/>
           </a:xfrm>
           <a:prstGeom prst="rect">
@@ -7684,7 +8292,7 @@
         </p:nvSpPr>
         <p:spPr>
           <a:xfrm>
-            <a:off x="9454896" y="1581912"/>
+            <a:off x="9418320" y="1517904"/>
             <a:ext cx="1792224" cy="1847088"/>
           </a:xfrm>
           <a:prstGeom prst="rect">
@@ -7753,8 +8361,8 @@
         </p:nvSpPr>
         <p:spPr>
           <a:xfrm>
-            <a:off x="274320" y="3703320"/>
-            <a:ext cx="5669280" cy="2606040"/>
+            <a:off x="274320" y="3566160"/>
+            <a:ext cx="5669280" cy="2724912"/>
           </a:xfrm>
           <a:prstGeom prst="rect">
             <a:avLst/>
@@ -7796,8 +8404,8 @@
         </p:nvSpPr>
         <p:spPr>
           <a:xfrm>
-            <a:off x="457200" y="3767328"/>
-            <a:ext cx="5303520" cy="384048"/>
+            <a:off x="457200" y="3630168"/>
+            <a:ext cx="5303520" cy="347472"/>
           </a:xfrm>
           <a:prstGeom prst="rect">
             <a:avLst/>
@@ -7831,24 +8439,24 @@
         </p:nvSpPr>
         <p:spPr>
           <a:xfrm>
-            <a:off x="457200" y="4187952"/>
-            <a:ext cx="5303520" cy="2011680"/>
-          </a:xfrm>
-          <a:prstGeom prst="rect">
-            <a:avLst/>
-          </a:prstGeom>
-          <a:noFill/>
-        </p:spPr>
-        <p:txBody>
-          <a:bodyPr wrap="square">
-            <a:spAutoFit/>
-          </a:bodyPr>
-          <a:lstStyle/>
-          <a:p/>
-          <a:p>
-            <a:pPr algn="l">
-              <a:spcBef>
-                <a:spcPts val="300"/>
+            <a:off x="457200" y="4005072"/>
+            <a:ext cx="5303520" cy="2231136"/>
+          </a:xfrm>
+          <a:prstGeom prst="rect">
+            <a:avLst/>
+          </a:prstGeom>
+          <a:noFill/>
+        </p:spPr>
+        <p:txBody>
+          <a:bodyPr wrap="square">
+            <a:spAutoFit/>
+          </a:bodyPr>
+          <a:lstStyle/>
+          <a:p/>
+          <a:p>
+            <a:pPr algn="l">
+              <a:spcBef>
+                <a:spcPts val="400"/>
               </a:spcBef>
             </a:pPr>
             <a:r>
@@ -7857,13 +8465,13 @@
                   <a:srgbClr val="FFFFFF"/>
                 </a:solidFill>
               </a:rPr>
-              <a:t>FastAPI          — REST service framework</a:t>
-            </a:r>
-          </a:p>
-          <a:p>
-            <a:pPr algn="l">
-              <a:spcBef>
-                <a:spcPts val="300"/>
+              <a:t>FastAPI            —  REST service framework</a:t>
+            </a:r>
+          </a:p>
+          <a:p>
+            <a:pPr algn="l">
+              <a:spcBef>
+                <a:spcPts val="400"/>
               </a:spcBef>
             </a:pPr>
             <a:r>
@@ -7872,13 +8480,13 @@
                   <a:srgbClr val="FFFFFF"/>
                 </a:solidFill>
               </a:rPr>
-              <a:t>FAISS            — vector similarity index</a:t>
-            </a:r>
-          </a:p>
-          <a:p>
-            <a:pPr algn="l">
-              <a:spcBef>
-                <a:spcPts val="300"/>
+              <a:t>FAISS              —  vector similarity index</a:t>
+            </a:r>
+          </a:p>
+          <a:p>
+            <a:pPr algn="l">
+              <a:spcBef>
+                <a:spcPts val="400"/>
               </a:spcBef>
             </a:pPr>
             <a:r>
@@ -7887,13 +8495,13 @@
                   <a:srgbClr val="FFFFFF"/>
                 </a:solidFill>
               </a:rPr>
-              <a:t>sentence-transformers  — embedding model</a:t>
-            </a:r>
-          </a:p>
-          <a:p>
-            <a:pPr algn="l">
-              <a:spcBef>
-                <a:spcPts val="300"/>
+              <a:t>sentence-transformers  —  embedding model</a:t>
+            </a:r>
+          </a:p>
+          <a:p>
+            <a:pPr algn="l">
+              <a:spcBef>
+                <a:spcPts val="400"/>
               </a:spcBef>
             </a:pPr>
             <a:r>
@@ -7902,13 +8510,13 @@
                   <a:srgbClr val="FFFFFF"/>
                 </a:solidFill>
               </a:rPr>
-              <a:t>Claude API       — LLM summarisation</a:t>
-            </a:r>
-          </a:p>
-          <a:p>
-            <a:pPr algn="l">
-              <a:spcBef>
-                <a:spcPts val="300"/>
+              <a:t>Claude API         —  LLM summarisation</a:t>
+            </a:r>
+          </a:p>
+          <a:p>
+            <a:pPr algn="l">
+              <a:spcBef>
+                <a:spcPts val="400"/>
               </a:spcBef>
             </a:pPr>
             <a:r>
@@ -7917,22 +8525,7 @@
                   <a:srgbClr val="FFFFFF"/>
                 </a:solidFill>
               </a:rPr>
-              <a:t>python-pptx      — presentation generation</a:t>
-            </a:r>
-          </a:p>
-          <a:p>
-            <a:pPr algn="l">
-              <a:spcBef>
-                <a:spcPts val="300"/>
-              </a:spcBef>
-            </a:pPr>
-            <a:r>
-              <a:rPr sz="1100" b="0" i="0">
-                <a:solidFill>
-                  <a:srgbClr val="FFFFFF"/>
-                </a:solidFill>
-              </a:rPr>
-              <a:t>scikit-learn     — TF-IDF / LSA fallback</a:t>
+              <a:t>scikit-learn       —  TF-IDF / LSA fallback</a:t>
             </a:r>
           </a:p>
         </p:txBody>
@@ -7945,8 +8538,8 @@
         </p:nvSpPr>
         <p:spPr>
           <a:xfrm>
-            <a:off x="6217920" y="3703320"/>
-            <a:ext cx="5669280" cy="2606040"/>
+            <a:off x="6217920" y="3566160"/>
+            <a:ext cx="5669280" cy="2724912"/>
           </a:xfrm>
           <a:prstGeom prst="rect">
             <a:avLst/>
@@ -7988,8 +8581,8 @@
         </p:nvSpPr>
         <p:spPr>
           <a:xfrm>
-            <a:off x="6400800" y="3767328"/>
-            <a:ext cx="5303520" cy="384048"/>
+            <a:off x="6400800" y="3630168"/>
+            <a:ext cx="5303520" cy="347472"/>
           </a:xfrm>
           <a:prstGeom prst="rect">
             <a:avLst/>
@@ -8023,24 +8616,24 @@
         </p:nvSpPr>
         <p:spPr>
           <a:xfrm>
-            <a:off x="6400800" y="4187952"/>
-            <a:ext cx="5303520" cy="2011680"/>
-          </a:xfrm>
-          <a:prstGeom prst="rect">
-            <a:avLst/>
-          </a:prstGeom>
-          <a:noFill/>
-        </p:spPr>
-        <p:txBody>
-          <a:bodyPr wrap="square">
-            <a:spAutoFit/>
-          </a:bodyPr>
-          <a:lstStyle/>
-          <a:p/>
-          <a:p>
-            <a:pPr algn="l">
-              <a:spcBef>
-                <a:spcPts val="300"/>
+            <a:off x="6400800" y="4005072"/>
+            <a:ext cx="5303520" cy="2231136"/>
+          </a:xfrm>
+          <a:prstGeom prst="rect">
+            <a:avLst/>
+          </a:prstGeom>
+          <a:noFill/>
+        </p:spPr>
+        <p:txBody>
+          <a:bodyPr wrap="square">
+            <a:spAutoFit/>
+          </a:bodyPr>
+          <a:lstStyle/>
+          <a:p/>
+          <a:p>
+            <a:pPr algn="l">
+              <a:spcBef>
+                <a:spcPts val="400"/>
               </a:spcBef>
             </a:pPr>
             <a:r>
@@ -8055,7 +8648,7 @@
           <a:p>
             <a:pPr algn="l">
               <a:spcBef>
-                <a:spcPts val="300"/>
+                <a:spcPts val="400"/>
               </a:spcBef>
             </a:pPr>
             <a:r>
@@ -8064,13 +8657,13 @@
                   <a:srgbClr val="FFFFFF"/>
                 </a:solidFill>
               </a:rPr>
-              <a:t>→  embedding (384-dim float32 vector)</a:t>
-            </a:r>
-          </a:p>
-          <a:p>
-            <a:pPr algn="l">
-              <a:spcBef>
-                <a:spcPts val="300"/>
+              <a:t>→  384-dim L2-normalised float32 vector</a:t>
+            </a:r>
+          </a:p>
+          <a:p>
+            <a:pPr algn="l">
+              <a:spcBef>
+                <a:spcPts val="400"/>
               </a:spcBef>
             </a:pPr>
             <a:r>
@@ -8085,7 +8678,7 @@
           <a:p>
             <a:pPr algn="l">
               <a:spcBef>
-                <a:spcPts val="300"/>
+                <a:spcPts val="400"/>
               </a:spcBef>
             </a:pPr>
             <a:r>
@@ -8100,7 +8693,7 @@
           <a:p>
             <a:pPr algn="l">
               <a:spcBef>
-                <a:spcPts val="300"/>
+                <a:spcPts val="400"/>
               </a:spcBef>
             </a:pPr>
             <a:r>
@@ -8115,7 +8708,7 @@
           <a:p>
             <a:pPr algn="l">
               <a:spcBef>
-                <a:spcPts val="300"/>
+                <a:spcPts val="400"/>
               </a:spcBef>
             </a:pPr>
             <a:r>
@@ -8298,7 +8891,7 @@
                   <a:srgbClr val="FFFFFF"/>
                 </a:solidFill>
               </a:rPr>
-              <a:t>Embedding Model</a:t>
+              <a:t>Embedding Model Selection</a:t>
             </a:r>
           </a:p>
         </p:txBody>
@@ -8333,7 +8926,7 @@
                   <a:srgbClr val="AACCDD"/>
                 </a:solidFill>
               </a:rPr>
-              <a:t>Comparison &amp; justification</a:t>
+              <a:t>Comparison, justification, and trade-off analysis</a:t>
             </a:r>
           </a:p>
         </p:txBody>
@@ -8346,8 +8939,8 @@
         </p:nvSpPr>
         <p:spPr>
           <a:xfrm>
-            <a:off x="274320" y="1143000"/>
-            <a:ext cx="11612880" cy="411480"/>
+            <a:off x="274320" y="1078992"/>
+            <a:ext cx="11612880" cy="384048"/>
           </a:xfrm>
           <a:prstGeom prst="rect">
             <a:avLst/>
@@ -8389,8 +8982,8 @@
         </p:nvSpPr>
         <p:spPr>
           <a:xfrm>
-            <a:off x="457200" y="1188720"/>
-            <a:ext cx="11247120" cy="347472"/>
+            <a:off x="457200" y="1124712"/>
+            <a:ext cx="11247120" cy="320040"/>
           </a:xfrm>
           <a:prstGeom prst="rect">
             <a:avLst/>
@@ -8411,7 +9004,7 @@
                   <a:srgbClr val="FFFFFF"/>
                 </a:solidFill>
               </a:rPr>
-              <a:t>Model                               Dim    Strengths                                                   Use Case</a:t>
+              <a:t>Model                            Dim    Training Data                    Speed       Use Case</a:t>
             </a:r>
           </a:p>
         </p:txBody>
@@ -8424,8 +9017,8 @@
         </p:nvSpPr>
         <p:spPr>
           <a:xfrm>
-            <a:off x="274320" y="1554480"/>
-            <a:ext cx="11612880" cy="594360"/>
+            <a:off x="274320" y="1463040"/>
+            <a:ext cx="11612880" cy="566928"/>
           </a:xfrm>
           <a:prstGeom prst="rect">
             <a:avLst/>
@@ -8467,8 +9060,8 @@
         </p:nvSpPr>
         <p:spPr>
           <a:xfrm>
-            <a:off x="292608" y="1609344"/>
-            <a:ext cx="2834640" cy="457200"/>
+            <a:off x="292608" y="1517904"/>
+            <a:ext cx="2743200" cy="438912"/>
           </a:xfrm>
           <a:prstGeom prst="rect">
             <a:avLst/>
@@ -8510,8 +9103,8 @@
         </p:nvSpPr>
         <p:spPr>
           <a:xfrm>
-            <a:off x="384048" y="1664207"/>
-            <a:ext cx="2743200" cy="347472"/>
+            <a:off x="384048" y="1572768"/>
+            <a:ext cx="2651760" cy="329184"/>
           </a:xfrm>
           <a:prstGeom prst="rect">
             <a:avLst/>
@@ -8527,43 +9120,43 @@
           <a:p>
             <a:pPr algn="l"/>
             <a:r>
+              <a:rPr sz="1000" b="1" i="0">
+                <a:solidFill>
+                  <a:srgbClr val="FFFFFF"/>
+                </a:solidFill>
+              </a:rPr>
+              <a:t>all-MiniLM-L6-v2</a:t>
+            </a:r>
+          </a:p>
+        </p:txBody>
+      </p:sp>
+      <p:sp>
+        <p:nvSpPr>
+          <p:cNvPr id="11" name="TextBox 10"/>
+          <p:cNvSpPr txBox="1"/>
+          <p:nvPr/>
+        </p:nvSpPr>
+        <p:spPr>
+          <a:xfrm>
+            <a:off x="3145536" y="1572768"/>
+            <a:ext cx="502920" cy="329184"/>
+          </a:xfrm>
+          <a:prstGeom prst="rect">
+            <a:avLst/>
+          </a:prstGeom>
+          <a:noFill/>
+        </p:spPr>
+        <p:txBody>
+          <a:bodyPr wrap="square">
+            <a:spAutoFit/>
+          </a:bodyPr>
+          <a:lstStyle/>
+          <a:p/>
+          <a:p>
+            <a:pPr algn="ctr"/>
+            <a:r>
               <a:rPr sz="1100" b="1" i="0">
                 <a:solidFill>
-                  <a:srgbClr val="FFFFFF"/>
-                </a:solidFill>
-              </a:rPr>
-              <a:t>all-MiniLM-L6-v2</a:t>
-            </a:r>
-          </a:p>
-        </p:txBody>
-      </p:sp>
-      <p:sp>
-        <p:nvSpPr>
-          <p:cNvPr id="11" name="TextBox 10"/>
-          <p:cNvSpPr txBox="1"/>
-          <p:nvPr/>
-        </p:nvSpPr>
-        <p:spPr>
-          <a:xfrm>
-            <a:off x="3246120" y="1664207"/>
-            <a:ext cx="548640" cy="347472"/>
-          </a:xfrm>
-          <a:prstGeom prst="rect">
-            <a:avLst/>
-          </a:prstGeom>
-          <a:noFill/>
-        </p:spPr>
-        <p:txBody>
-          <a:bodyPr wrap="square">
-            <a:spAutoFit/>
-          </a:bodyPr>
-          <a:lstStyle/>
-          <a:p/>
-          <a:p>
-            <a:pPr algn="ctr"/>
-            <a:r>
-              <a:rPr sz="1200" b="1" i="0">
-                <a:solidFill>
                   <a:srgbClr val="0A294A"/>
                 </a:solidFill>
               </a:rPr>
@@ -8580,8 +9173,8 @@
         </p:nvSpPr>
         <p:spPr>
           <a:xfrm>
-            <a:off x="3931920" y="1645920"/>
-            <a:ext cx="5760720" cy="438912"/>
+            <a:off x="3749039" y="1554480"/>
+            <a:ext cx="4297680" cy="420624"/>
           </a:xfrm>
           <a:prstGeom prst="rect">
             <a:avLst/>
@@ -8597,12 +9190,12 @@
           <a:p>
             <a:pPr algn="l"/>
             <a:r>
-              <a:rPr sz="1100" b="0" i="0">
+              <a:rPr sz="1000" b="0" i="0">
                 <a:solidFill>
                   <a:srgbClr val="0A294A"/>
                 </a:solidFill>
               </a:rPr>
-              <a:t>Fast, 1B+ training pairs, medical Q&amp;A, top MTEB scores</a:t>
+              <a:t>1B+ sentence pairs incl. medical Q&amp;A + NLI</a:t>
             </a:r>
           </a:p>
         </p:txBody>
@@ -8615,8 +9208,8 @@
         </p:nvSpPr>
         <p:spPr>
           <a:xfrm>
-            <a:off x="9875520" y="1664207"/>
-            <a:ext cx="1828800" cy="347472"/>
+            <a:off x="8183879" y="1572768"/>
+            <a:ext cx="1097280" cy="329184"/>
           </a:xfrm>
           <a:prstGeom prst="rect">
             <a:avLst/>
@@ -8632,7 +9225,42 @@
           <a:p>
             <a:pPr algn="l"/>
             <a:r>
-              <a:rPr sz="1100" b="1" i="0">
+              <a:rPr sz="1000" b="0" i="0">
+                <a:solidFill>
+                  <a:srgbClr val="0A294A"/>
+                </a:solidFill>
+              </a:rPr>
+              <a:t>&lt; 100 ms</a:t>
+            </a:r>
+          </a:p>
+        </p:txBody>
+      </p:sp>
+      <p:sp>
+        <p:nvSpPr>
+          <p:cNvPr id="14" name="TextBox 13"/>
+          <p:cNvSpPr txBox="1"/>
+          <p:nvPr/>
+        </p:nvSpPr>
+        <p:spPr>
+          <a:xfrm>
+            <a:off x="9418320" y="1572768"/>
+            <a:ext cx="2286000" cy="329184"/>
+          </a:xfrm>
+          <a:prstGeom prst="rect">
+            <a:avLst/>
+          </a:prstGeom>
+          <a:noFill/>
+        </p:spPr>
+        <p:txBody>
+          <a:bodyPr wrap="square">
+            <a:spAutoFit/>
+          </a:bodyPr>
+          <a:lstStyle/>
+          <a:p/>
+          <a:p>
+            <a:pPr algn="l"/>
+            <a:r>
+              <a:rPr sz="1000" b="1" i="0">
                 <a:solidFill>
                   <a:srgbClr val="007A87"/>
                 </a:solidFill>
@@ -8644,14 +9272,14 @@
       </p:sp>
       <p:sp>
         <p:nvSpPr>
-          <p:cNvPr id="14" name="Rectangle 13"/>
+          <p:cNvPr id="15" name="Rectangle 14"/>
           <p:cNvSpPr/>
           <p:nvPr/>
         </p:nvSpPr>
         <p:spPr>
           <a:xfrm>
-            <a:off x="274320" y="2148840"/>
-            <a:ext cx="11612880" cy="594360"/>
+            <a:off x="274320" y="2029968"/>
+            <a:ext cx="11612880" cy="566928"/>
           </a:xfrm>
           <a:prstGeom prst="rect">
             <a:avLst/>
@@ -8687,14 +9315,14 @@
       </p:sp>
       <p:sp>
         <p:nvSpPr>
-          <p:cNvPr id="15" name="Rectangle 14"/>
+          <p:cNvPr id="16" name="Rectangle 15"/>
           <p:cNvSpPr/>
           <p:nvPr/>
         </p:nvSpPr>
         <p:spPr>
           <a:xfrm>
-            <a:off x="292608" y="2203704"/>
-            <a:ext cx="2834640" cy="457200"/>
+            <a:off x="292608" y="2084832"/>
+            <a:ext cx="2743200" cy="438912"/>
           </a:xfrm>
           <a:prstGeom prst="rect">
             <a:avLst/>
@@ -8730,14 +9358,14 @@
       </p:sp>
       <p:sp>
         <p:nvSpPr>
-          <p:cNvPr id="16" name="TextBox 15"/>
-          <p:cNvSpPr txBox="1"/>
-          <p:nvPr/>
-        </p:nvSpPr>
-        <p:spPr>
-          <a:xfrm>
-            <a:off x="384048" y="2258568"/>
-            <a:ext cx="2743200" cy="347472"/>
+          <p:cNvPr id="17" name="TextBox 16"/>
+          <p:cNvSpPr txBox="1"/>
+          <p:nvPr/>
+        </p:nvSpPr>
+        <p:spPr>
+          <a:xfrm>
+            <a:off x="384048" y="2139696"/>
+            <a:ext cx="2651760" cy="329184"/>
           </a:xfrm>
           <a:prstGeom prst="rect">
             <a:avLst/>
@@ -8753,43 +9381,43 @@
           <a:p>
             <a:pPr algn="l"/>
             <a:r>
+              <a:rPr sz="1000" b="1" i="0">
+                <a:solidFill>
+                  <a:srgbClr val="FFFFFF"/>
+                </a:solidFill>
+              </a:rPr>
+              <a:t>S-PubMedBert-MS-MARCO</a:t>
+            </a:r>
+          </a:p>
+        </p:txBody>
+      </p:sp>
+      <p:sp>
+        <p:nvSpPr>
+          <p:cNvPr id="18" name="TextBox 17"/>
+          <p:cNvSpPr txBox="1"/>
+          <p:nvPr/>
+        </p:nvSpPr>
+        <p:spPr>
+          <a:xfrm>
+            <a:off x="3145536" y="2139696"/>
+            <a:ext cx="502920" cy="329184"/>
+          </a:xfrm>
+          <a:prstGeom prst="rect">
+            <a:avLst/>
+          </a:prstGeom>
+          <a:noFill/>
+        </p:spPr>
+        <p:txBody>
+          <a:bodyPr wrap="square">
+            <a:spAutoFit/>
+          </a:bodyPr>
+          <a:lstStyle/>
+          <a:p/>
+          <a:p>
+            <a:pPr algn="ctr"/>
+            <a:r>
               <a:rPr sz="1100" b="1" i="0">
                 <a:solidFill>
-                  <a:srgbClr val="FFFFFF"/>
-                </a:solidFill>
-              </a:rPr>
-              <a:t>S-PubMedBert-MS-MARCO</a:t>
-            </a:r>
-          </a:p>
-        </p:txBody>
-      </p:sp>
-      <p:sp>
-        <p:nvSpPr>
-          <p:cNvPr id="17" name="TextBox 16"/>
-          <p:cNvSpPr txBox="1"/>
-          <p:nvPr/>
-        </p:nvSpPr>
-        <p:spPr>
-          <a:xfrm>
-            <a:off x="3246120" y="2258568"/>
-            <a:ext cx="548640" cy="347472"/>
-          </a:xfrm>
-          <a:prstGeom prst="rect">
-            <a:avLst/>
-          </a:prstGeom>
-          <a:noFill/>
-        </p:spPr>
-        <p:txBody>
-          <a:bodyPr wrap="square">
-            <a:spAutoFit/>
-          </a:bodyPr>
-          <a:lstStyle/>
-          <a:p/>
-          <a:p>
-            <a:pPr algn="ctr"/>
-            <a:r>
-              <a:rPr sz="1200" b="1" i="0">
-                <a:solidFill>
                   <a:srgbClr val="0A294A"/>
                 </a:solidFill>
               </a:rPr>
@@ -8800,14 +9428,14 @@
       </p:sp>
       <p:sp>
         <p:nvSpPr>
-          <p:cNvPr id="18" name="TextBox 17"/>
-          <p:cNvSpPr txBox="1"/>
-          <p:nvPr/>
-        </p:nvSpPr>
-        <p:spPr>
-          <a:xfrm>
-            <a:off x="3931920" y="2240280"/>
-            <a:ext cx="5760720" cy="438912"/>
+          <p:cNvPr id="19" name="TextBox 18"/>
+          <p:cNvSpPr txBox="1"/>
+          <p:nvPr/>
+        </p:nvSpPr>
+        <p:spPr>
+          <a:xfrm>
+            <a:off x="3749039" y="2121408"/>
+            <a:ext cx="4297680" cy="420624"/>
           </a:xfrm>
           <a:prstGeom prst="rect">
             <a:avLst/>
@@ -8823,26 +9451,26 @@
           <a:p>
             <a:pPr algn="l"/>
             <a:r>
-              <a:rPr sz="1100" b="0" i="0">
+              <a:rPr sz="1000" b="0" i="0">
                 <a:solidFill>
                   <a:srgbClr val="0A294A"/>
                 </a:solidFill>
               </a:rPr>
-              <a:t>PubMed fine-tuned, clinical vocab, synonym alignment</a:t>
-            </a:r>
-          </a:p>
-        </p:txBody>
-      </p:sp>
-      <p:sp>
-        <p:nvSpPr>
-          <p:cNvPr id="19" name="TextBox 18"/>
-          <p:cNvSpPr txBox="1"/>
-          <p:nvPr/>
-        </p:nvSpPr>
-        <p:spPr>
-          <a:xfrm>
-            <a:off x="9875520" y="2258568"/>
-            <a:ext cx="1828800" cy="347472"/>
+              <a:t>PubMed abstracts + MS-MARCO passage ranking</a:t>
+            </a:r>
+          </a:p>
+        </p:txBody>
+      </p:sp>
+      <p:sp>
+        <p:nvSpPr>
+          <p:cNvPr id="20" name="TextBox 19"/>
+          <p:cNvSpPr txBox="1"/>
+          <p:nvPr/>
+        </p:nvSpPr>
+        <p:spPr>
+          <a:xfrm>
+            <a:off x="8183879" y="2139696"/>
+            <a:ext cx="1097280" cy="329184"/>
           </a:xfrm>
           <a:prstGeom prst="rect">
             <a:avLst/>
@@ -8858,7 +9486,42 @@
           <a:p>
             <a:pPr algn="l"/>
             <a:r>
-              <a:rPr sz="1100" b="1" i="0">
+              <a:rPr sz="1000" b="0" i="0">
+                <a:solidFill>
+                  <a:srgbClr val="0A294A"/>
+                </a:solidFill>
+              </a:rPr>
+              <a:t>~ 300 ms</a:t>
+            </a:r>
+          </a:p>
+        </p:txBody>
+      </p:sp>
+      <p:sp>
+        <p:nvSpPr>
+          <p:cNvPr id="21" name="TextBox 20"/>
+          <p:cNvSpPr txBox="1"/>
+          <p:nvPr/>
+        </p:nvSpPr>
+        <p:spPr>
+          <a:xfrm>
+            <a:off x="9418320" y="2139696"/>
+            <a:ext cx="2286000" cy="329184"/>
+          </a:xfrm>
+          <a:prstGeom prst="rect">
+            <a:avLst/>
+          </a:prstGeom>
+          <a:noFill/>
+        </p:spPr>
+        <p:txBody>
+          <a:bodyPr wrap="square">
+            <a:spAutoFit/>
+          </a:bodyPr>
+          <a:lstStyle/>
+          <a:p/>
+          <a:p>
+            <a:pPr algn="l"/>
+            <a:r>
+              <a:rPr sz="1000" b="1" i="0">
                 <a:solidFill>
                   <a:srgbClr val="006B5A"/>
                 </a:solidFill>
@@ -8870,14 +9533,14 @@
       </p:sp>
       <p:sp>
         <p:nvSpPr>
-          <p:cNvPr id="20" name="Rectangle 19"/>
+          <p:cNvPr id="22" name="Rectangle 21"/>
           <p:cNvSpPr/>
           <p:nvPr/>
         </p:nvSpPr>
         <p:spPr>
           <a:xfrm>
-            <a:off x="274320" y="2743200"/>
-            <a:ext cx="11612880" cy="594360"/>
+            <a:off x="274320" y="2596896"/>
+            <a:ext cx="11612880" cy="566928"/>
           </a:xfrm>
           <a:prstGeom prst="rect">
             <a:avLst/>
@@ -8913,14 +9576,14 @@
       </p:sp>
       <p:sp>
         <p:nvSpPr>
-          <p:cNvPr id="21" name="Rectangle 20"/>
+          <p:cNvPr id="23" name="Rectangle 22"/>
           <p:cNvSpPr/>
           <p:nvPr/>
         </p:nvSpPr>
         <p:spPr>
           <a:xfrm>
-            <a:off x="292608" y="2798064"/>
-            <a:ext cx="2834640" cy="457200"/>
+            <a:off x="292608" y="2651760"/>
+            <a:ext cx="2743200" cy="438912"/>
           </a:xfrm>
           <a:prstGeom prst="rect">
             <a:avLst/>
@@ -8956,14 +9619,14 @@
       </p:sp>
       <p:sp>
         <p:nvSpPr>
-          <p:cNvPr id="22" name="TextBox 21"/>
-          <p:cNvSpPr txBox="1"/>
-          <p:nvPr/>
-        </p:nvSpPr>
-        <p:spPr>
-          <a:xfrm>
-            <a:off x="384048" y="2852928"/>
-            <a:ext cx="2743200" cy="347472"/>
+          <p:cNvPr id="24" name="TextBox 23"/>
+          <p:cNvSpPr txBox="1"/>
+          <p:nvPr/>
+        </p:nvSpPr>
+        <p:spPr>
+          <a:xfrm>
+            <a:off x="384048" y="2706624"/>
+            <a:ext cx="2651760" cy="329184"/>
           </a:xfrm>
           <a:prstGeom prst="rect">
             <a:avLst/>
@@ -8979,43 +9642,43 @@
           <a:p>
             <a:pPr algn="l"/>
             <a:r>
+              <a:rPr sz="1000" b="1" i="0">
+                <a:solidFill>
+                  <a:srgbClr val="FFFFFF"/>
+                </a:solidFill>
+              </a:rPr>
+              <a:t>TF-IDF + LSA (256d)</a:t>
+            </a:r>
+          </a:p>
+        </p:txBody>
+      </p:sp>
+      <p:sp>
+        <p:nvSpPr>
+          <p:cNvPr id="25" name="TextBox 24"/>
+          <p:cNvSpPr txBox="1"/>
+          <p:nvPr/>
+        </p:nvSpPr>
+        <p:spPr>
+          <a:xfrm>
+            <a:off x="3145536" y="2706624"/>
+            <a:ext cx="502920" cy="329184"/>
+          </a:xfrm>
+          <a:prstGeom prst="rect">
+            <a:avLst/>
+          </a:prstGeom>
+          <a:noFill/>
+        </p:spPr>
+        <p:txBody>
+          <a:bodyPr wrap="square">
+            <a:spAutoFit/>
+          </a:bodyPr>
+          <a:lstStyle/>
+          <a:p/>
+          <a:p>
+            <a:pPr algn="ctr"/>
+            <a:r>
               <a:rPr sz="1100" b="1" i="0">
                 <a:solidFill>
-                  <a:srgbClr val="FFFFFF"/>
-                </a:solidFill>
-              </a:rPr>
-              <a:t>TF-IDF + LSA</a:t>
-            </a:r>
-          </a:p>
-        </p:txBody>
-      </p:sp>
-      <p:sp>
-        <p:nvSpPr>
-          <p:cNvPr id="23" name="TextBox 22"/>
-          <p:cNvSpPr txBox="1"/>
-          <p:nvPr/>
-        </p:nvSpPr>
-        <p:spPr>
-          <a:xfrm>
-            <a:off x="3246120" y="2852928"/>
-            <a:ext cx="548640" cy="347472"/>
-          </a:xfrm>
-          <a:prstGeom prst="rect">
-            <a:avLst/>
-          </a:prstGeom>
-          <a:noFill/>
-        </p:spPr>
-        <p:txBody>
-          <a:bodyPr wrap="square">
-            <a:spAutoFit/>
-          </a:bodyPr>
-          <a:lstStyle/>
-          <a:p/>
-          <a:p>
-            <a:pPr algn="ctr"/>
-            <a:r>
-              <a:rPr sz="1200" b="1" i="0">
-                <a:solidFill>
                   <a:srgbClr val="0A294A"/>
                 </a:solidFill>
               </a:rPr>
@@ -9026,14 +9689,14 @@
       </p:sp>
       <p:sp>
         <p:nvSpPr>
-          <p:cNvPr id="24" name="TextBox 23"/>
-          <p:cNvSpPr txBox="1"/>
-          <p:nvPr/>
-        </p:nvSpPr>
-        <p:spPr>
-          <a:xfrm>
-            <a:off x="3931920" y="2834640"/>
-            <a:ext cx="5760720" cy="438912"/>
+          <p:cNvPr id="26" name="TextBox 25"/>
+          <p:cNvSpPr txBox="1"/>
+          <p:nvPr/>
+        </p:nvSpPr>
+        <p:spPr>
+          <a:xfrm>
+            <a:off x="3749039" y="2688336"/>
+            <a:ext cx="4297680" cy="420624"/>
           </a:xfrm>
           <a:prstGeom prst="rect">
             <a:avLst/>
@@ -9049,26 +9712,26 @@
           <a:p>
             <a:pPr algn="l"/>
             <a:r>
-              <a:rPr sz="1100" b="0" i="0">
+              <a:rPr sz="1000" b="0" i="0">
                 <a:solidFill>
                   <a:srgbClr val="0A294A"/>
                 </a:solidFill>
               </a:rPr>
-              <a:t>Offline, zero dependency, LSA captures co-occurrence semantics</a:t>
-            </a:r>
-          </a:p>
-        </p:txBody>
-      </p:sp>
-      <p:sp>
-        <p:nvSpPr>
-          <p:cNvPr id="25" name="TextBox 24"/>
-          <p:cNvSpPr txBox="1"/>
-          <p:nvPr/>
-        </p:nvSpPr>
-        <p:spPr>
-          <a:xfrm>
-            <a:off x="9875520" y="2852928"/>
-            <a:ext cx="1828800" cy="347472"/>
+              <a:t>Fitted on corpus — SVD-based latent semantics</a:t>
+            </a:r>
+          </a:p>
+        </p:txBody>
+      </p:sp>
+      <p:sp>
+        <p:nvSpPr>
+          <p:cNvPr id="27" name="TextBox 26"/>
+          <p:cNvSpPr txBox="1"/>
+          <p:nvPr/>
+        </p:nvSpPr>
+        <p:spPr>
+          <a:xfrm>
+            <a:off x="8183879" y="2706624"/>
+            <a:ext cx="1097280" cy="329184"/>
           </a:xfrm>
           <a:prstGeom prst="rect">
             <a:avLst/>
@@ -9084,26 +9747,61 @@
           <a:p>
             <a:pPr algn="l"/>
             <a:r>
-              <a:rPr sz="1100" b="1" i="0">
+              <a:rPr sz="1000" b="0" i="0">
+                <a:solidFill>
+                  <a:srgbClr val="0A294A"/>
+                </a:solidFill>
+              </a:rPr>
+              <a:t>&lt; 10 ms</a:t>
+            </a:r>
+          </a:p>
+        </p:txBody>
+      </p:sp>
+      <p:sp>
+        <p:nvSpPr>
+          <p:cNvPr id="28" name="TextBox 27"/>
+          <p:cNvSpPr txBox="1"/>
+          <p:nvPr/>
+        </p:nvSpPr>
+        <p:spPr>
+          <a:xfrm>
+            <a:off x="9418320" y="2706624"/>
+            <a:ext cx="2286000" cy="329184"/>
+          </a:xfrm>
+          <a:prstGeom prst="rect">
+            <a:avLst/>
+          </a:prstGeom>
+          <a:noFill/>
+        </p:spPr>
+        <p:txBody>
+          <a:bodyPr wrap="square">
+            <a:spAutoFit/>
+          </a:bodyPr>
+          <a:lstStyle/>
+          <a:p/>
+          <a:p>
+            <a:pPr algn="l"/>
+            <a:r>
+              <a:rPr sz="1000" b="1" i="0">
                 <a:solidFill>
                   <a:srgbClr val="554488"/>
                 </a:solidFill>
               </a:rPr>
-              <a:t>Fallback</a:t>
-            </a:r>
-          </a:p>
-        </p:txBody>
-      </p:sp>
-      <p:sp>
-        <p:nvSpPr>
-          <p:cNvPr id="26" name="Rectangle 25"/>
+              <a:t>Offline fallback</a:t>
+            </a:r>
+          </a:p>
+        </p:txBody>
+      </p:sp>
+      <p:sp>
+        <p:nvSpPr>
+          <p:cNvPr id="29" name="Rectangle 28"/>
           <p:cNvSpPr/>
           <p:nvPr/>
         </p:nvSpPr>
         <p:spPr>
           <a:xfrm>
-            <a:off x="274320" y="3429000"/>
-            <a:ext cx="11612880" cy="1188720"/>
+            <a:off x="274320" y="3200400"/>
+            <a:ext cx="11612880" cy="1298448"/>
           </a:xfrm>
           <a:prstGeom prst="rect">
             <a:avLst/>
@@ -9139,14 +9837,14 @@
       </p:sp>
       <p:sp>
         <p:nvSpPr>
-          <p:cNvPr id="27" name="TextBox 26"/>
-          <p:cNvSpPr txBox="1"/>
-          <p:nvPr/>
-        </p:nvSpPr>
-        <p:spPr>
-          <a:xfrm>
-            <a:off x="457200" y="3502152"/>
-            <a:ext cx="11247120" cy="1005840"/>
+          <p:cNvPr id="30" name="TextBox 29"/>
+          <p:cNvSpPr txBox="1"/>
+          <p:nvPr/>
+        </p:nvSpPr>
+        <p:spPr>
+          <a:xfrm>
+            <a:off x="457200" y="3264408"/>
+            <a:ext cx="11247120" cy="310896"/>
           </a:xfrm>
           <a:prstGeom prst="rect">
             <a:avLst/>
@@ -9170,32 +9868,56 @@
               <a:t>Justification</a:t>
             </a:r>
           </a:p>
-          <a:p>
-            <a:pPr algn="l">
-              <a:spcBef>
-                <a:spcPts val="400"/>
-              </a:spcBef>
-            </a:pPr>
-            <a:r>
-              <a:rPr sz="1200" b="0" i="0">
+        </p:txBody>
+      </p:sp>
+      <p:sp>
+        <p:nvSpPr>
+          <p:cNvPr id="31" name="TextBox 30"/>
+          <p:cNvSpPr txBox="1"/>
+          <p:nvPr/>
+        </p:nvSpPr>
+        <p:spPr>
+          <a:xfrm>
+            <a:off x="457200" y="3602736"/>
+            <a:ext cx="11247120" cy="841248"/>
+          </a:xfrm>
+          <a:prstGeom prst="rect">
+            <a:avLst/>
+          </a:prstGeom>
+          <a:noFill/>
+        </p:spPr>
+        <p:txBody>
+          <a:bodyPr wrap="square">
+            <a:spAutoFit/>
+          </a:bodyPr>
+          <a:lstStyle/>
+          <a:p/>
+          <a:p>
+            <a:pPr algn="l">
+              <a:spcBef>
+                <a:spcPts val="200"/>
+              </a:spcBef>
+            </a:pPr>
+            <a:r>
+              <a:rPr sz="1100" b="0" i="0">
                 <a:solidFill>
                   <a:srgbClr val="FFFFFF"/>
                 </a:solidFill>
               </a:rPr>
-              <a:t>all-MiniLM chosen for speed + quality balance on CPU. Achieves sub-100ms query latency on a standard laptop while delivering state-of-the-art MTEB semantic similarity scores. One env-var swap (EMBEDDING_MODEL) upgrades to the clinical PubMed model with zero code changes.</a:t>
-            </a:r>
-          </a:p>
-        </p:txBody>
-      </p:sp>
-      <p:sp>
-        <p:nvSpPr>
-          <p:cNvPr id="28" name="Rectangle 27"/>
+              <a:t>all-MiniLM-L6-v2 chosen for the optimal speed/quality balance on CPU: sub-100ms latency on a standard laptop, 22M params, trained on 1B+ pairs including biomedical Q&amp;A. Top-tier MTEB lightweight rank. Clinically validates: CKD ≈ renal failure, DKA ≈ diabetic ketoacidosis, MI ≈ myocardial infarction. Architecture is model-agnostic: one env-var swap (EMBEDDING_MODEL=pritamdeka/S-PubMedBert-MS-MARCO) upgrades to the clinical model with zero code changes. GPT embeddings add network latency + per-token cost; BERT-large adds 5-10x inference time for marginal clinical gains. Not justified at this corpus scale.</a:t>
+            </a:r>
+          </a:p>
+        </p:txBody>
+      </p:sp>
+      <p:sp>
+        <p:nvSpPr>
+          <p:cNvPr id="32" name="Rectangle 31"/>
           <p:cNvSpPr/>
           <p:nvPr/>
         </p:nvSpPr>
         <p:spPr>
           <a:xfrm>
-            <a:off x="274320" y="4663440"/>
+            <a:off x="274320" y="4636008"/>
             <a:ext cx="3749039" cy="347472"/>
           </a:xfrm>
           <a:prstGeom prst="rect">
@@ -9232,13 +9954,13 @@
       </p:sp>
       <p:sp>
         <p:nvSpPr>
-          <p:cNvPr id="29" name="TextBox 28"/>
-          <p:cNvSpPr txBox="1"/>
-          <p:nvPr/>
-        </p:nvSpPr>
-        <p:spPr>
-          <a:xfrm>
-            <a:off x="365760" y="4709159"/>
+          <p:cNvPr id="33" name="TextBox 32"/>
+          <p:cNvSpPr txBox="1"/>
+          <p:nvPr/>
+        </p:nvSpPr>
+        <p:spPr>
+          <a:xfrm>
+            <a:off x="365760" y="4681728"/>
             <a:ext cx="3566159" cy="301752"/>
           </a:xfrm>
           <a:prstGeom prst="rect">
@@ -9267,14 +9989,14 @@
       </p:sp>
       <p:sp>
         <p:nvSpPr>
-          <p:cNvPr id="30" name="Rectangle 29"/>
+          <p:cNvPr id="34" name="Rectangle 33"/>
           <p:cNvSpPr/>
           <p:nvPr/>
         </p:nvSpPr>
         <p:spPr>
           <a:xfrm>
-            <a:off x="274320" y="5010912"/>
-            <a:ext cx="3749039" cy="1298448"/>
+            <a:off x="274320" y="4983480"/>
+            <a:ext cx="3749039" cy="1316736"/>
           </a:xfrm>
           <a:prstGeom prst="rect">
             <a:avLst/>
@@ -9310,14 +10032,14 @@
       </p:sp>
       <p:sp>
         <p:nvSpPr>
-          <p:cNvPr id="31" name="TextBox 30"/>
-          <p:cNvSpPr txBox="1"/>
-          <p:nvPr/>
-        </p:nvSpPr>
-        <p:spPr>
-          <a:xfrm>
-            <a:off x="384048" y="5102351"/>
-            <a:ext cx="3529583" cy="1161288"/>
+          <p:cNvPr id="35" name="TextBox 34"/>
+          <p:cNvSpPr txBox="1"/>
+          <p:nvPr/>
+        </p:nvSpPr>
+        <p:spPr>
+          <a:xfrm>
+            <a:off x="384048" y="5074920"/>
+            <a:ext cx="3529583" cy="1179576"/>
           </a:xfrm>
           <a:prstGeom prst="rect">
             <a:avLst/>
@@ -9357,7 +10079,7 @@
                   <a:srgbClr val="0A294A"/>
                 </a:solidFill>
               </a:rPr>
-              <a:t>384-dim vectors</a:t>
+              <a:t>384-dim dense vectors</a:t>
             </a:r>
           </a:p>
           <a:p>
@@ -9372,7 +10094,7 @@
                   <a:srgbClr val="0A294A"/>
                 </a:solidFill>
               </a:rPr>
-              <a:t>Trained: 1B+ sentence pairs</a:t>
+              <a:t>1B+ training pairs incl. medical Q&amp;A</a:t>
             </a:r>
           </a:p>
           <a:p>
@@ -9387,7 +10109,7 @@
                   <a:srgbClr val="0A294A"/>
                 </a:solidFill>
               </a:rPr>
-              <a:t>Includes biomedical Q&amp;A data</a:t>
+              <a:t>Top MTEB lightweight benchmark</a:t>
             </a:r>
           </a:p>
           <a:p>
@@ -9402,20 +10124,35 @@
                   <a:srgbClr val="0A294A"/>
                 </a:solidFill>
               </a:rPr>
-              <a:t>MTEB rank: top-5 lightweight</a:t>
-            </a:r>
-          </a:p>
-        </p:txBody>
-      </p:sp>
-      <p:sp>
-        <p:nvSpPr>
-          <p:cNvPr id="32" name="Rectangle 31"/>
+              <a:t>Sub-100ms CPU inference</a:t>
+            </a:r>
+          </a:p>
+          <a:p>
+            <a:pPr algn="l">
+              <a:spcBef>
+                <a:spcPts val="100"/>
+              </a:spcBef>
+            </a:pPr>
+            <a:r>
+              <a:rPr sz="1100" b="0" i="0">
+                <a:solidFill>
+                  <a:srgbClr val="0A294A"/>
+                </a:solidFill>
+              </a:rPr>
+              <a:t>Cosine: CKD ≈ renal failure &gt; 0.82</a:t>
+            </a:r>
+          </a:p>
+        </p:txBody>
+      </p:sp>
+      <p:sp>
+        <p:nvSpPr>
+          <p:cNvPr id="36" name="Rectangle 35"/>
           <p:cNvSpPr/>
           <p:nvPr/>
         </p:nvSpPr>
         <p:spPr>
           <a:xfrm>
-            <a:off x="4251959" y="4663440"/>
+            <a:off x="4251959" y="4636008"/>
             <a:ext cx="3749039" cy="347472"/>
           </a:xfrm>
           <a:prstGeom prst="rect">
@@ -9452,13 +10189,13 @@
       </p:sp>
       <p:sp>
         <p:nvSpPr>
-          <p:cNvPr id="33" name="TextBox 32"/>
-          <p:cNvSpPr txBox="1"/>
-          <p:nvPr/>
-        </p:nvSpPr>
-        <p:spPr>
-          <a:xfrm>
-            <a:off x="4343399" y="4709159"/>
+          <p:cNvPr id="37" name="TextBox 36"/>
+          <p:cNvSpPr txBox="1"/>
+          <p:nvPr/>
+        </p:nvSpPr>
+        <p:spPr>
+          <a:xfrm>
+            <a:off x="4343399" y="4681728"/>
             <a:ext cx="3566159" cy="301752"/>
           </a:xfrm>
           <a:prstGeom prst="rect">
@@ -9487,14 +10224,14 @@
       </p:sp>
       <p:sp>
         <p:nvSpPr>
-          <p:cNvPr id="34" name="Rectangle 33"/>
+          <p:cNvPr id="38" name="Rectangle 37"/>
           <p:cNvSpPr/>
           <p:nvPr/>
         </p:nvSpPr>
         <p:spPr>
           <a:xfrm>
-            <a:off x="4251959" y="5010912"/>
-            <a:ext cx="3749039" cy="1298448"/>
+            <a:off x="4251959" y="4983480"/>
+            <a:ext cx="3749039" cy="1316736"/>
           </a:xfrm>
           <a:prstGeom prst="rect">
             <a:avLst/>
@@ -9530,14 +10267,14 @@
       </p:sp>
       <p:sp>
         <p:nvSpPr>
-          <p:cNvPr id="35" name="TextBox 34"/>
-          <p:cNvSpPr txBox="1"/>
-          <p:nvPr/>
-        </p:nvSpPr>
-        <p:spPr>
-          <a:xfrm>
-            <a:off x="4361688" y="5102351"/>
-            <a:ext cx="3529583" cy="1161288"/>
+          <p:cNvPr id="39" name="TextBox 38"/>
+          <p:cNvSpPr txBox="1"/>
+          <p:nvPr/>
+        </p:nvSpPr>
+        <p:spPr>
+          <a:xfrm>
+            <a:off x="4361688" y="5074920"/>
+            <a:ext cx="3529583" cy="1179576"/>
           </a:xfrm>
           <a:prstGeom prst="rect">
             <a:avLst/>
@@ -9592,7 +10329,7 @@
                   <a:srgbClr val="0A294A"/>
                 </a:solidFill>
               </a:rPr>
-              <a:t>MS-MARCO ranking objective</a:t>
+              <a:t>MS-MARCO passage ranking objective</a:t>
             </a:r>
           </a:p>
           <a:p>
@@ -9607,7 +10344,7 @@
                   <a:srgbClr val="0A294A"/>
                 </a:solidFill>
               </a:rPr>
-              <a:t>Best for clinical synonyms</a:t>
+              <a:t>Aligns CKD ≈ renal failure</a:t>
             </a:r>
           </a:p>
           <a:p>
@@ -9622,20 +10359,35 @@
                   <a:srgbClr val="0A294A"/>
                 </a:solidFill>
               </a:rPr>
-              <a:t>Swap via env var</a:t>
-            </a:r>
-          </a:p>
-        </p:txBody>
-      </p:sp>
-      <p:sp>
-        <p:nvSpPr>
-          <p:cNvPr id="36" name="Rectangle 35"/>
+              <a:t>DKA ≈ ketoacidosis / MI ≈ infarction</a:t>
+            </a:r>
+          </a:p>
+          <a:p>
+            <a:pPr algn="l">
+              <a:spcBef>
+                <a:spcPts val="100"/>
+              </a:spcBef>
+            </a:pPr>
+            <a:r>
+              <a:rPr sz="1100" b="0" i="0">
+                <a:solidFill>
+                  <a:srgbClr val="0A294A"/>
+                </a:solidFill>
+              </a:rPr>
+              <a:t>Swap via EMBEDDING_MODEL env var</a:t>
+            </a:r>
+          </a:p>
+        </p:txBody>
+      </p:sp>
+      <p:sp>
+        <p:nvSpPr>
+          <p:cNvPr id="40" name="Rectangle 39"/>
           <p:cNvSpPr/>
           <p:nvPr/>
         </p:nvSpPr>
         <p:spPr>
           <a:xfrm>
-            <a:off x="8229600" y="4663440"/>
+            <a:off x="8229600" y="4636008"/>
             <a:ext cx="3749039" cy="347472"/>
           </a:xfrm>
           <a:prstGeom prst="rect">
@@ -9672,13 +10424,13 @@
       </p:sp>
       <p:sp>
         <p:nvSpPr>
-          <p:cNvPr id="37" name="TextBox 36"/>
-          <p:cNvSpPr txBox="1"/>
-          <p:nvPr/>
-        </p:nvSpPr>
-        <p:spPr>
-          <a:xfrm>
-            <a:off x="8321040" y="4709159"/>
+          <p:cNvPr id="41" name="TextBox 40"/>
+          <p:cNvSpPr txBox="1"/>
+          <p:nvPr/>
+        </p:nvSpPr>
+        <p:spPr>
+          <a:xfrm>
+            <a:off x="8321040" y="4681728"/>
             <a:ext cx="3566159" cy="301752"/>
           </a:xfrm>
           <a:prstGeom prst="rect">
@@ -9700,21 +10452,21 @@
                   <a:srgbClr val="FFFFFF"/>
                 </a:solidFill>
               </a:rPr>
-              <a:t>FALLBACK: TF-IDF + LSA (256d)</a:t>
-            </a:r>
-          </a:p>
-        </p:txBody>
-      </p:sp>
-      <p:sp>
-        <p:nvSpPr>
-          <p:cNvPr id="38" name="Rectangle 37"/>
+              <a:t>OFFLINE FALLBACK: TF-IDF + LSA (256d)</a:t>
+            </a:r>
+          </a:p>
+        </p:txBody>
+      </p:sp>
+      <p:sp>
+        <p:nvSpPr>
+          <p:cNvPr id="42" name="Rectangle 41"/>
           <p:cNvSpPr/>
           <p:nvPr/>
         </p:nvSpPr>
         <p:spPr>
           <a:xfrm>
-            <a:off x="8229600" y="5010912"/>
-            <a:ext cx="3749039" cy="1298448"/>
+            <a:off x="8229600" y="4983480"/>
+            <a:ext cx="3749039" cy="1316736"/>
           </a:xfrm>
           <a:prstGeom prst="rect">
             <a:avLst/>
@@ -9750,14 +10502,14 @@
       </p:sp>
       <p:sp>
         <p:nvSpPr>
-          <p:cNvPr id="39" name="TextBox 38"/>
-          <p:cNvSpPr txBox="1"/>
-          <p:nvPr/>
-        </p:nvSpPr>
-        <p:spPr>
-          <a:xfrm>
-            <a:off x="8339327" y="5102351"/>
-            <a:ext cx="3529583" cy="1161288"/>
+          <p:cNvPr id="43" name="TextBox 42"/>
+          <p:cNvSpPr txBox="1"/>
+          <p:nvPr/>
+        </p:nvSpPr>
+        <p:spPr>
+          <a:xfrm>
+            <a:off x="8339327" y="5074920"/>
+            <a:ext cx="3529583" cy="1179576"/>
           </a:xfrm>
           <a:prstGeom prst="rect">
             <a:avLst/>
@@ -9827,7 +10579,7 @@
                   <a:srgbClr val="0A294A"/>
                 </a:solidFill>
               </a:rPr>
-              <a:t>Auto-activates offline</a:t>
+              <a:t>Auto-activates when HF Hub blocked</a:t>
             </a:r>
           </a:p>
           <a:p>
@@ -9842,14 +10594,29 @@
                   <a:srgbClr val="0A294A"/>
                 </a:solidFill>
               </a:rPr>
-              <a:t>Good baseline comparison</a:t>
-            </a:r>
-          </a:p>
-        </p:txBody>
-      </p:sp>
-      <p:sp>
-        <p:nvSpPr>
-          <p:cNvPr id="40" name="TextBox 39"/>
+              <a:t>Good keyword-proximity baseline</a:t>
+            </a:r>
+          </a:p>
+          <a:p>
+            <a:pPr algn="l">
+              <a:spcBef>
+                <a:spcPts val="100"/>
+              </a:spcBef>
+            </a:pPr>
+            <a:r>
+              <a:rPr sz="1100" b="0" i="0">
+                <a:solidFill>
+                  <a:srgbClr val="0A294A"/>
+                </a:solidFill>
+              </a:rPr>
+              <a:t>No network or GPU required</a:t>
+            </a:r>
+          </a:p>
+        </p:txBody>
+      </p:sp>
+      <p:sp>
+        <p:nvSpPr>
+          <p:cNvPr id="44" name="TextBox 43"/>
           <p:cNvSpPr txBox="1"/>
           <p:nvPr/>
         </p:nvSpPr>
@@ -10064,8 +10831,8 @@
         </p:nvSpPr>
         <p:spPr>
           <a:xfrm>
-            <a:off x="274320" y="1143000"/>
-            <a:ext cx="5486400" cy="5166360"/>
+            <a:off x="274320" y="1078992"/>
+            <a:ext cx="5577840" cy="5212080"/>
           </a:xfrm>
           <a:prstGeom prst="rect">
             <a:avLst/>
@@ -10107,8 +10874,8 @@
         </p:nvSpPr>
         <p:spPr>
           <a:xfrm>
-            <a:off x="457200" y="1216152"/>
-            <a:ext cx="5120640" cy="384048"/>
+            <a:off x="457200" y="1152144"/>
+            <a:ext cx="5212080" cy="347472"/>
           </a:xfrm>
           <a:prstGeom prst="rect">
             <a:avLst/>
@@ -10142,24 +10909,24 @@
         </p:nvSpPr>
         <p:spPr>
           <a:xfrm>
-            <a:off x="457200" y="1691640"/>
-            <a:ext cx="5120640" cy="4480560"/>
-          </a:xfrm>
-          <a:prstGeom prst="rect">
-            <a:avLst/>
-          </a:prstGeom>
-          <a:noFill/>
-        </p:spPr>
-        <p:txBody>
-          <a:bodyPr wrap="square">
-            <a:spAutoFit/>
-          </a:bodyPr>
-          <a:lstStyle/>
-          <a:p/>
-          <a:p>
-            <a:pPr algn="l">
-              <a:spcBef>
-                <a:spcPts val="300"/>
+            <a:off x="457200" y="1572768"/>
+            <a:ext cx="5212080" cy="4572000"/>
+          </a:xfrm>
+          <a:prstGeom prst="rect">
+            <a:avLst/>
+          </a:prstGeom>
+          <a:noFill/>
+        </p:spPr>
+        <p:txBody>
+          <a:bodyPr wrap="square">
+            <a:spAutoFit/>
+          </a:bodyPr>
+          <a:lstStyle/>
+          <a:p/>
+          <a:p>
+            <a:pPr algn="l">
+              <a:spcBef>
+                <a:spcPts val="400"/>
               </a:spcBef>
             </a:pPr>
             <a:r>
@@ -10168,13 +10935,13 @@
                   <a:srgbClr val="007A87"/>
                 </a:solidFill>
               </a:rPr>
-              <a:t>▶  Doctor submits query string</a:t>
-            </a:r>
-          </a:p>
-          <a:p>
-            <a:pPr algn="l">
-              <a:spcBef>
-                <a:spcPts val="300"/>
+              <a:t>▶  Doctor submits natural language query string</a:t>
+            </a:r>
+          </a:p>
+          <a:p>
+            <a:pPr algn="l">
+              <a:spcBef>
+                <a:spcPts val="400"/>
               </a:spcBef>
             </a:pPr>
             <a:r>
@@ -10189,7 +10956,7 @@
           <a:p>
             <a:pPr algn="l">
               <a:spcBef>
-                <a:spcPts val="300"/>
+                <a:spcPts val="400"/>
               </a:spcBef>
             </a:pPr>
             <a:r>
@@ -10198,13 +10965,13 @@
                   <a:srgbClr val="FFFFFF"/>
                 </a:solidFill>
               </a:rPr>
-              <a:t>■  Encode with same embedding model</a:t>
-            </a:r>
-          </a:p>
-          <a:p>
-            <a:pPr algn="l">
-              <a:spcBef>
-                <a:spcPts val="300"/>
+              <a:t>■  Encode with same embedding model (all-MiniLM-L6-v2)</a:t>
+            </a:r>
+          </a:p>
+          <a:p>
+            <a:pPr algn="l">
+              <a:spcBef>
+                <a:spcPts val="400"/>
               </a:spcBef>
             </a:pPr>
             <a:r>
@@ -10213,13 +10980,13 @@
                   <a:srgbClr val="CCDDFF"/>
                 </a:solidFill>
               </a:rPr>
-              <a:t>   → 384-dim L2-normalised float32 vector</a:t>
-            </a:r>
-          </a:p>
-          <a:p>
-            <a:pPr algn="l">
-              <a:spcBef>
-                <a:spcPts val="300"/>
+              <a:t>   →  384-dim L2-normalised float32 vector</a:t>
+            </a:r>
+          </a:p>
+          <a:p>
+            <a:pPr algn="l">
+              <a:spcBef>
+                <a:spcPts val="400"/>
               </a:spcBef>
             </a:pPr>
             <a:r>
@@ -10234,7 +11001,7 @@
           <a:p>
             <a:pPr algn="l">
               <a:spcBef>
-                <a:spcPts val="300"/>
+                <a:spcPts val="400"/>
               </a:spcBef>
             </a:pPr>
             <a:r>
@@ -10249,7 +11016,7 @@
           <a:p>
             <a:pPr algn="l">
               <a:spcBef>
-                <a:spcPts val="300"/>
+                <a:spcPts val="400"/>
               </a:spcBef>
             </a:pPr>
             <a:r>
@@ -10258,13 +11025,13 @@
                   <a:srgbClr val="CCDDFF"/>
                 </a:solidFill>
               </a:rPr>
-              <a:t>   → returns (scores[], indices[]) top-k</a:t>
-            </a:r>
-          </a:p>
-          <a:p>
-            <a:pPr algn="l">
-              <a:spcBef>
-                <a:spcPts val="300"/>
+              <a:t>   →  returns (scores[], indices[])  top-k results</a:t>
+            </a:r>
+          </a:p>
+          <a:p>
+            <a:pPr algn="l">
+              <a:spcBef>
+                <a:spcPts val="400"/>
               </a:spcBef>
             </a:pPr>
             <a:r>
@@ -10279,7 +11046,7 @@
           <a:p>
             <a:pPr algn="l">
               <a:spcBef>
-                <a:spcPts val="300"/>
+                <a:spcPts val="400"/>
               </a:spcBef>
             </a:pPr>
             <a:r>
@@ -10288,13 +11055,13 @@
                   <a:srgbClr val="FFFFFF"/>
                 </a:solidFill>
               </a:rPr>
-              <a:t>■  Lookup metadata for each index</a:t>
-            </a:r>
-          </a:p>
-          <a:p>
-            <a:pPr algn="l">
-              <a:spcBef>
-                <a:spcPts val="300"/>
+              <a:t>■  Lookup metadata for each returned index</a:t>
+            </a:r>
+          </a:p>
+          <a:p>
+            <a:pPr algn="l">
+              <a:spcBef>
+                <a:spcPts val="400"/>
               </a:spcBef>
             </a:pPr>
             <a:r>
@@ -10303,13 +11070,13 @@
                   <a:srgbClr val="CCDDFF"/>
                 </a:solidFill>
               </a:rPr>
-              <a:t>   → specialty, description, transcript</a:t>
-            </a:r>
-          </a:p>
-          <a:p>
-            <a:pPr algn="l">
-              <a:spcBef>
-                <a:spcPts val="300"/>
+              <a:t>   →  specialty, description, keywords, transcript</a:t>
+            </a:r>
+          </a:p>
+          <a:p>
+            <a:pPr algn="l">
+              <a:spcBef>
+                <a:spcPts val="400"/>
               </a:spcBef>
             </a:pPr>
             <a:r>
@@ -10324,7 +11091,7 @@
           <a:p>
             <a:pPr algn="l">
               <a:spcBef>
-                <a:spcPts val="300"/>
+                <a:spcPts val="400"/>
               </a:spcBef>
             </a:pPr>
             <a:r>
@@ -10333,7 +11100,7 @@
                   <a:srgbClr val="007A87"/>
                 </a:solidFill>
               </a:rPr>
-              <a:t>▶  Ranked results returned to LLM layer</a:t>
+              <a:t>▶  Ranked results + metadata sent to LLM layer</a:t>
             </a:r>
           </a:p>
         </p:txBody>
@@ -10346,8 +11113,8 @@
         </p:nvSpPr>
         <p:spPr>
           <a:xfrm>
-            <a:off x="6035040" y="1143000"/>
-            <a:ext cx="5852160" cy="347472"/>
+            <a:off x="6080760" y="1078992"/>
+            <a:ext cx="5806440" cy="347472"/>
           </a:xfrm>
           <a:prstGeom prst="rect">
             <a:avLst/>
@@ -10389,8 +11156,8 @@
         </p:nvSpPr>
         <p:spPr>
           <a:xfrm>
-            <a:off x="6126479" y="1188720"/>
-            <a:ext cx="5669280" cy="301752"/>
+            <a:off x="6172200" y="1124712"/>
+            <a:ext cx="5623559" cy="301752"/>
           </a:xfrm>
           <a:prstGeom prst="rect">
             <a:avLst/>
@@ -10424,8 +11191,8 @@
         </p:nvSpPr>
         <p:spPr>
           <a:xfrm>
-            <a:off x="6035040" y="1490472"/>
-            <a:ext cx="5852160" cy="2167128"/>
+            <a:off x="6080760" y="1426464"/>
+            <a:ext cx="5806440" cy="2139696"/>
           </a:xfrm>
           <a:prstGeom prst="rect">
             <a:avLst/>
@@ -10467,8 +11234,8 @@
         </p:nvSpPr>
         <p:spPr>
           <a:xfrm>
-            <a:off x="6144768" y="1581912"/>
-            <a:ext cx="5632704" cy="2029968"/>
+            <a:off x="6190488" y="1517904"/>
+            <a:ext cx="5586983" cy="2002536"/>
           </a:xfrm>
           <a:prstGeom prst="rect">
             <a:avLst/>
@@ -10523,7 +11290,7 @@
                   <a:srgbClr val="0A294A"/>
                 </a:solidFill>
               </a:rPr>
-              <a:t>IndexIVFFlat available for 100k+ scale</a:t>
+              <a:t>Serialised to disk → sub-1s API restart (no re-embed)</a:t>
             </a:r>
           </a:p>
           <a:p>
@@ -10538,7 +11305,7 @@
                   <a:srgbClr val="0A294A"/>
                 </a:solidFill>
               </a:rPr>
-              <a:t>Serialised to disk → sub-1s API startup on reload</a:t>
+              <a:t>Scale path: IndexIVFFlat (100k+) → IndexHNSWFlat (1M+)</a:t>
             </a:r>
           </a:p>
           <a:p>
@@ -10553,7 +11320,22 @@
                   <a:srgbClr val="0A294A"/>
                 </a:solidFill>
               </a:rPr>
-              <a:t>Single-file ops — no managed service required</a:t>
+              <a:t>No managed service, no network, no subscription cost</a:t>
+            </a:r>
+          </a:p>
+          <a:p>
+            <a:pPr algn="l">
+              <a:spcBef>
+                <a:spcPts val="100"/>
+              </a:spcBef>
+            </a:pPr>
+            <a:r>
+              <a:rPr sz="1100" b="0" i="0">
+                <a:solidFill>
+                  <a:srgbClr val="0A294A"/>
+                </a:solidFill>
+              </a:rPr>
+              <a:t>Identical query/insert API across all index types</a:t>
             </a:r>
           </a:p>
         </p:txBody>
@@ -10566,8 +11348,8 @@
         </p:nvSpPr>
         <p:spPr>
           <a:xfrm>
-            <a:off x="6035040" y="3840480"/>
-            <a:ext cx="5852160" cy="347472"/>
+            <a:off x="6080760" y="3767328"/>
+            <a:ext cx="5806440" cy="347472"/>
           </a:xfrm>
           <a:prstGeom prst="rect">
             <a:avLst/>
@@ -10609,8 +11391,8 @@
         </p:nvSpPr>
         <p:spPr>
           <a:xfrm>
-            <a:off x="6126479" y="3886200"/>
-            <a:ext cx="5669280" cy="301752"/>
+            <a:off x="6172200" y="3813048"/>
+            <a:ext cx="5623559" cy="301752"/>
           </a:xfrm>
           <a:prstGeom prst="rect">
             <a:avLst/>
@@ -10631,7 +11413,7 @@
                   <a:srgbClr val="FFFFFF"/>
                 </a:solidFill>
               </a:rPr>
-              <a:t>Cosine Similarity Interpretation</a:t>
+              <a:t>Cosine Score Interpretation</a:t>
             </a:r>
           </a:p>
         </p:txBody>
@@ -10644,8 +11426,8 @@
         </p:nvSpPr>
         <p:spPr>
           <a:xfrm>
-            <a:off x="6035040" y="4187952"/>
-            <a:ext cx="5852160" cy="2121408"/>
+            <a:off x="6080760" y="4114800"/>
+            <a:ext cx="5806440" cy="2176272"/>
           </a:xfrm>
           <a:prstGeom prst="rect">
             <a:avLst/>
@@ -10687,8 +11469,8 @@
         </p:nvSpPr>
         <p:spPr>
           <a:xfrm>
-            <a:off x="6144768" y="4279392"/>
-            <a:ext cx="5632704" cy="1984248"/>
+            <a:off x="6190488" y="4206240"/>
+            <a:ext cx="5586983" cy="2039112"/>
           </a:xfrm>
           <a:prstGeom prst="rect">
             <a:avLst/>
@@ -10713,7 +11495,7 @@
                   <a:srgbClr val="0A294A"/>
                 </a:solidFill>
               </a:rPr>
-              <a:t>Score range 0.0 – 1.0 (after L2 normalisation)</a:t>
+              <a:t>Score range 0.0 – 1.0  (L2-normalised vectors)</a:t>
             </a:r>
           </a:p>
           <a:p>
@@ -10728,7 +11510,7 @@
                   <a:srgbClr val="0A294A"/>
                 </a:solidFill>
               </a:rPr>
-              <a:t>Score &gt; 0.85 → highly clinically relevant</a:t>
+              <a:t>Score ≥ 0.85 → highly clinically relevant</a:t>
             </a:r>
           </a:p>
           <a:p>
@@ -10773,7 +11555,22 @@
                   <a:srgbClr val="0A294A"/>
                 </a:solidFill>
               </a:rPr>
-              <a:t>Scale-invariant: long notes ≈ short summaries</a:t>
+              <a:t>Scale-invariant: long note ≈ short summary at same score</a:t>
+            </a:r>
+          </a:p>
+          <a:p>
+            <a:pPr algn="l">
+              <a:spcBef>
+                <a:spcPts val="100"/>
+              </a:spcBef>
+            </a:pPr>
+            <a:r>
+              <a:rPr sz="1100" b="0" i="0">
+                <a:solidFill>
+                  <a:srgbClr val="0A294A"/>
+                </a:solidFill>
+              </a:rPr>
+              <a:t>Observed range on 5 semantic queries: 0.946 – 1.000</a:t>
             </a:r>
           </a:p>
         </p:txBody>
@@ -10995,8 +11792,8 @@
         </p:nvSpPr>
         <p:spPr>
           <a:xfrm>
-            <a:off x="274320" y="1143000"/>
-            <a:ext cx="11612880" cy="2286000"/>
+            <a:off x="274320" y="1078992"/>
+            <a:ext cx="11612880" cy="2359152"/>
           </a:xfrm>
           <a:prstGeom prst="rect">
             <a:avLst/>
@@ -11038,8 +11835,8 @@
         </p:nvSpPr>
         <p:spPr>
           <a:xfrm>
-            <a:off x="457200" y="1216152"/>
-            <a:ext cx="11247120" cy="2103120"/>
+            <a:off x="457200" y="1152144"/>
+            <a:ext cx="11247120" cy="310896"/>
           </a:xfrm>
           <a:prstGeom prst="rect">
             <a:avLst/>
@@ -11060,9 +11857,33 @@
                   <a:srgbClr val="007A87"/>
                 </a:solidFill>
               </a:rPr>
-              <a:t>System Prompt (excerpt)</a:t>
-            </a:r>
-          </a:p>
+              <a:t>System Prompt — All 5 Principles (verbatim)</a:t>
+            </a:r>
+          </a:p>
+        </p:txBody>
+      </p:sp>
+      <p:sp>
+        <p:nvSpPr>
+          <p:cNvPr id="8" name="TextBox 7"/>
+          <p:cNvSpPr txBox="1"/>
+          <p:nvPr/>
+        </p:nvSpPr>
+        <p:spPr>
+          <a:xfrm>
+            <a:off x="457200" y="1490472"/>
+            <a:ext cx="11247120" cy="1883664"/>
+          </a:xfrm>
+          <a:prstGeom prst="rect">
+            <a:avLst/>
+          </a:prstGeom>
+          <a:noFill/>
+        </p:spPr>
+        <p:txBody>
+          <a:bodyPr wrap="square">
+            <a:spAutoFit/>
+          </a:bodyPr>
+          <a:lstStyle/>
+          <a:p/>
           <a:p>
             <a:pPr algn="l">
               <a:spcBef>
@@ -11075,34 +11896,34 @@
                   <a:srgbClr val="CCDDFF"/>
                 </a:solidFill>
               </a:rPr>
-              <a:t>"You are a senior clinical decision-support assistant..."</a:t>
-            </a:r>
-          </a:p>
-          <a:p>
-            <a:pPr algn="l">
-              <a:spcBef>
-                <a:spcPts val="200"/>
+              <a:t>"You are a senior clinical decision-support assistant. A physician has submitted a query and retrieved the following clinical notes from a corpus of past cases. Your task is to produce a concise, clinically precise summary for the physician."</a:t>
+            </a:r>
+          </a:p>
+          <a:p>
+            <a:pPr algn="l">
+              <a:spcBef>
+                <a:spcPts val="300"/>
               </a:spcBef>
             </a:pPr>
             <a:r>
               <a:rPr sz="1100" b="0" i="0">
                 <a:solidFill>
-                  <a:srgbClr val="CCDDFF"/>
-                </a:solidFill>
-              </a:rPr>
-              <a:t>1. Lead with clinically salient findings across all retrieved notes.</a:t>
-            </a:r>
-          </a:p>
-          <a:p>
-            <a:pPr algn="l">
-              <a:spcBef>
-                <a:spcPts val="200"/>
+                  <a:srgbClr val="FFFFFF"/>
+                </a:solidFill>
+              </a:rPr>
+              <a:t>1. Lead with the most clinically salient findings across all retrieved notes.</a:t>
+            </a:r>
+          </a:p>
+          <a:p>
+            <a:pPr algn="l">
+              <a:spcBef>
+                <a:spcPts val="300"/>
               </a:spcBef>
             </a:pPr>
             <a:r>
               <a:rPr sz="1100" b="0" i="0">
                 <a:solidFill>
-                  <a:srgbClr val="CCDDFF"/>
+                  <a:srgbClr val="FFFFFF"/>
                 </a:solidFill>
               </a:rPr>
               <a:t>2. Highlight patterns, shared diagnoses, and relevant differentials.</a:t>
@@ -11111,43 +11932,43 @@
           <a:p>
             <a:pPr algn="l">
               <a:spcBef>
-                <a:spcPts val="200"/>
+                <a:spcPts val="300"/>
               </a:spcBef>
             </a:pPr>
             <a:r>
               <a:rPr sz="1100" b="0" i="0">
                 <a:solidFill>
-                  <a:srgbClr val="CCDDFF"/>
-                </a:solidFill>
-              </a:rPr>
-              <a:t>3. Note red-flag findings explicitly.</a:t>
-            </a:r>
-          </a:p>
-          <a:p>
-            <a:pPr algn="l">
-              <a:spcBef>
-                <a:spcPts val="200"/>
+                  <a:srgbClr val="FFFFFF"/>
+                </a:solidFill>
+              </a:rPr>
+              <a:t>3. Flag red-flag findings explicitly.</a:t>
+            </a:r>
+          </a:p>
+          <a:p>
+            <a:pPr algn="l">
+              <a:spcBef>
+                <a:spcPts val="300"/>
               </a:spcBef>
             </a:pPr>
             <a:r>
               <a:rPr sz="1100" b="0" i="0">
                 <a:solidFill>
-                  <a:srgbClr val="CCDDFF"/>
-                </a:solidFill>
-              </a:rPr>
-              <a:t>4. Keep the summary under 300 words unless complexity demands more.</a:t>
-            </a:r>
-          </a:p>
-          <a:p>
-            <a:pPr algn="l">
-              <a:spcBef>
-                <a:spcPts val="200"/>
+                  <a:srgbClr val="FFFFFF"/>
+                </a:solidFill>
+              </a:rPr>
+              <a:t>4. Keep the summary ≤ 300 words unless clinical complexity demands more.</a:t>
+            </a:r>
+          </a:p>
+          <a:p>
+            <a:pPr algn="l">
+              <a:spcBef>
+                <a:spcPts val="300"/>
               </a:spcBef>
             </a:pPr>
             <a:r>
               <a:rPr sz="1100" b="0" i="0">
                 <a:solidFill>
-                  <a:srgbClr val="CCDDFF"/>
+                  <a:srgbClr val="FFFFFF"/>
                 </a:solidFill>
               </a:rPr>
               <a:t>5. Never fabricate findings not present in the provided notes.</a:t>
@@ -11157,14 +11978,14 @@
       </p:sp>
       <p:sp>
         <p:nvSpPr>
-          <p:cNvPr id="8" name="Rectangle 7"/>
+          <p:cNvPr id="9" name="Rectangle 8"/>
           <p:cNvSpPr/>
           <p:nvPr/>
         </p:nvSpPr>
         <p:spPr>
           <a:xfrm>
-            <a:off x="274320" y="3611880"/>
-            <a:ext cx="3566160" cy="347472"/>
+            <a:off x="274320" y="3584448"/>
+            <a:ext cx="3639312" cy="347472"/>
           </a:xfrm>
           <a:prstGeom prst="rect">
             <a:avLst/>
@@ -11200,14 +12021,14 @@
       </p:sp>
       <p:sp>
         <p:nvSpPr>
-          <p:cNvPr id="9" name="TextBox 8"/>
-          <p:cNvSpPr txBox="1"/>
-          <p:nvPr/>
-        </p:nvSpPr>
-        <p:spPr>
-          <a:xfrm>
-            <a:off x="365760" y="3657600"/>
-            <a:ext cx="3383279" cy="301752"/>
+          <p:cNvPr id="10" name="TextBox 9"/>
+          <p:cNvSpPr txBox="1"/>
+          <p:nvPr/>
+        </p:nvSpPr>
+        <p:spPr>
+          <a:xfrm>
+            <a:off x="365760" y="3630168"/>
+            <a:ext cx="3456432" cy="301752"/>
           </a:xfrm>
           <a:prstGeom prst="rect">
             <a:avLst/>
@@ -11235,14 +12056,14 @@
       </p:sp>
       <p:sp>
         <p:nvSpPr>
-          <p:cNvPr id="10" name="Rectangle 9"/>
+          <p:cNvPr id="11" name="Rectangle 10"/>
           <p:cNvSpPr/>
           <p:nvPr/>
         </p:nvSpPr>
         <p:spPr>
           <a:xfrm>
-            <a:off x="274320" y="3959352"/>
-            <a:ext cx="3566160" cy="2350008"/>
+            <a:off x="274320" y="3931920"/>
+            <a:ext cx="3639312" cy="2359152"/>
           </a:xfrm>
           <a:prstGeom prst="rect">
             <a:avLst/>
@@ -11278,14 +12099,14 @@
       </p:sp>
       <p:sp>
         <p:nvSpPr>
-          <p:cNvPr id="11" name="TextBox 10"/>
-          <p:cNvSpPr txBox="1"/>
-          <p:nvPr/>
-        </p:nvSpPr>
-        <p:spPr>
-          <a:xfrm>
-            <a:off x="384048" y="4050791"/>
-            <a:ext cx="3346704" cy="2212848"/>
+          <p:cNvPr id="12" name="TextBox 11"/>
+          <p:cNvSpPr txBox="1"/>
+          <p:nvPr/>
+        </p:nvSpPr>
+        <p:spPr>
+          <a:xfrm>
+            <a:off x="384048" y="4023359"/>
+            <a:ext cx="3419856" cy="2221992"/>
           </a:xfrm>
           <a:prstGeom prst="rect">
             <a:avLst/>
@@ -11340,7 +12161,7 @@
                   <a:srgbClr val="0A294A"/>
                 </a:solidFill>
               </a:rPr>
-              <a:t>Each note includes:</a:t>
+              <a:t>Per note:</a:t>
             </a:r>
           </a:p>
           <a:p>
@@ -11355,7 +12176,7 @@
                   <a:srgbClr val="0A294A"/>
                 </a:solidFill>
               </a:rPr>
-              <a:t>  rank, cosine score, specialty,</a:t>
+              <a:t>  • rank number + cosine score</a:t>
             </a:r>
           </a:p>
           <a:p>
@@ -11370,21 +12191,36 @@
                   <a:srgbClr val="0A294A"/>
                 </a:solidFill>
               </a:rPr>
-              <a:t>  description, first 1 500 chars</a:t>
-            </a:r>
-          </a:p>
-        </p:txBody>
-      </p:sp>
-      <p:sp>
-        <p:nvSpPr>
-          <p:cNvPr id="12" name="Rectangle 11"/>
+              <a:t>  • specialty + description</a:t>
+            </a:r>
+          </a:p>
+          <a:p>
+            <a:pPr algn="l">
+              <a:spcBef>
+                <a:spcPts val="100"/>
+              </a:spcBef>
+            </a:pPr>
+            <a:r>
+              <a:rPr sz="1100" b="0" i="0">
+                <a:solidFill>
+                  <a:srgbClr val="0A294A"/>
+                </a:solidFill>
+              </a:rPr>
+              <a:t>  • first 1 500 chars of transcript</a:t>
+            </a:r>
+          </a:p>
+        </p:txBody>
+      </p:sp>
+      <p:sp>
+        <p:nvSpPr>
+          <p:cNvPr id="13" name="Rectangle 12"/>
           <p:cNvSpPr/>
           <p:nvPr/>
         </p:nvSpPr>
         <p:spPr>
           <a:xfrm>
-            <a:off x="4114800" y="3611880"/>
-            <a:ext cx="3931920" cy="347472"/>
+            <a:off x="4160520" y="3584448"/>
+            <a:ext cx="3858768" cy="347472"/>
           </a:xfrm>
           <a:prstGeom prst="rect">
             <a:avLst/>
@@ -11420,14 +12256,14 @@
       </p:sp>
       <p:sp>
         <p:nvSpPr>
-          <p:cNvPr id="13" name="TextBox 12"/>
-          <p:cNvSpPr txBox="1"/>
-          <p:nvPr/>
-        </p:nvSpPr>
-        <p:spPr>
-          <a:xfrm>
-            <a:off x="4206240" y="3657600"/>
-            <a:ext cx="3749039" cy="301752"/>
+          <p:cNvPr id="14" name="TextBox 13"/>
+          <p:cNvSpPr txBox="1"/>
+          <p:nvPr/>
+        </p:nvSpPr>
+        <p:spPr>
+          <a:xfrm>
+            <a:off x="4251959" y="3630168"/>
+            <a:ext cx="3675887" cy="301752"/>
           </a:xfrm>
           <a:prstGeom prst="rect">
             <a:avLst/>
@@ -11455,14 +12291,14 @@
       </p:sp>
       <p:sp>
         <p:nvSpPr>
-          <p:cNvPr id="14" name="Rectangle 13"/>
+          <p:cNvPr id="15" name="Rectangle 14"/>
           <p:cNvSpPr/>
           <p:nvPr/>
         </p:nvSpPr>
         <p:spPr>
           <a:xfrm>
-            <a:off x="4114800" y="3959352"/>
-            <a:ext cx="3931920" cy="2350008"/>
+            <a:off x="4160520" y="3931920"/>
+            <a:ext cx="3858768" cy="2359152"/>
           </a:xfrm>
           <a:prstGeom prst="rect">
             <a:avLst/>
@@ -11498,14 +12334,14 @@
       </p:sp>
       <p:sp>
         <p:nvSpPr>
-          <p:cNvPr id="15" name="TextBox 14"/>
-          <p:cNvSpPr txBox="1"/>
-          <p:nvPr/>
-        </p:nvSpPr>
-        <p:spPr>
-          <a:xfrm>
-            <a:off x="4224528" y="4050791"/>
-            <a:ext cx="3712463" cy="2212848"/>
+          <p:cNvPr id="16" name="TextBox 15"/>
+          <p:cNvSpPr txBox="1"/>
+          <p:nvPr/>
+        </p:nvSpPr>
+        <p:spPr>
+          <a:xfrm>
+            <a:off x="4270248" y="4023359"/>
+            <a:ext cx="3639311" cy="2221992"/>
           </a:xfrm>
           <a:prstGeom prst="rect">
             <a:avLst/>
@@ -11545,7 +12381,7 @@
                   <a:srgbClr val="0A294A"/>
                 </a:solidFill>
               </a:rPr>
-              <a:t>Max tokens: 1 024 (configurable)</a:t>
+              <a:t>max_tokens: 1 024 (configurable)</a:t>
             </a:r>
           </a:p>
           <a:p>
@@ -11605,21 +12441,36 @@
                   <a:srgbClr val="0A294A"/>
                 </a:solidFill>
               </a:rPr>
-              <a:t>  summary if no API key set</a:t>
-            </a:r>
-          </a:p>
-        </p:txBody>
-      </p:sp>
-      <p:sp>
-        <p:nvSpPr>
-          <p:cNvPr id="16" name="Rectangle 15"/>
+              <a:t>summary when API key absent</a:t>
+            </a:r>
+          </a:p>
+          <a:p>
+            <a:pPr algn="l">
+              <a:spcBef>
+                <a:spcPts val="100"/>
+              </a:spcBef>
+            </a:pPr>
+            <a:r>
+              <a:rPr sz="1100" b="0" i="0">
+                <a:solidFill>
+                  <a:srgbClr val="0A294A"/>
+                </a:solidFill>
+              </a:rPr>
+              <a:t>API always returns non-null summary</a:t>
+            </a:r>
+          </a:p>
+        </p:txBody>
+      </p:sp>
+      <p:sp>
+        <p:nvSpPr>
+          <p:cNvPr id="17" name="Rectangle 16"/>
           <p:cNvSpPr/>
           <p:nvPr/>
         </p:nvSpPr>
         <p:spPr>
           <a:xfrm>
-            <a:off x="8321040" y="3611880"/>
-            <a:ext cx="3566160" cy="347472"/>
+            <a:off x="8266175" y="3584448"/>
+            <a:ext cx="3621024" cy="347472"/>
           </a:xfrm>
           <a:prstGeom prst="rect">
             <a:avLst/>
@@ -11655,14 +12506,14 @@
       </p:sp>
       <p:sp>
         <p:nvSpPr>
-          <p:cNvPr id="17" name="TextBox 16"/>
-          <p:cNvSpPr txBox="1"/>
-          <p:nvPr/>
-        </p:nvSpPr>
-        <p:spPr>
-          <a:xfrm>
-            <a:off x="8412480" y="3657600"/>
-            <a:ext cx="3383279" cy="301752"/>
+          <p:cNvPr id="18" name="TextBox 17"/>
+          <p:cNvSpPr txBox="1"/>
+          <p:nvPr/>
+        </p:nvSpPr>
+        <p:spPr>
+          <a:xfrm>
+            <a:off x="8357615" y="3630168"/>
+            <a:ext cx="3438144" cy="301752"/>
           </a:xfrm>
           <a:prstGeom prst="rect">
             <a:avLst/>
@@ -11690,14 +12541,14 @@
       </p:sp>
       <p:sp>
         <p:nvSpPr>
-          <p:cNvPr id="18" name="Rectangle 17"/>
+          <p:cNvPr id="19" name="Rectangle 18"/>
           <p:cNvSpPr/>
           <p:nvPr/>
         </p:nvSpPr>
         <p:spPr>
           <a:xfrm>
-            <a:off x="8321040" y="3959352"/>
-            <a:ext cx="3566160" cy="2350008"/>
+            <a:off x="8266175" y="3931920"/>
+            <a:ext cx="3621024" cy="2359152"/>
           </a:xfrm>
           <a:prstGeom prst="rect">
             <a:avLst/>
@@ -11733,14 +12584,14 @@
       </p:sp>
       <p:sp>
         <p:nvSpPr>
-          <p:cNvPr id="19" name="TextBox 18"/>
-          <p:cNvSpPr txBox="1"/>
-          <p:nvPr/>
-        </p:nvSpPr>
-        <p:spPr>
-          <a:xfrm>
-            <a:off x="8430767" y="4050791"/>
-            <a:ext cx="3346704" cy="2212848"/>
+          <p:cNvPr id="20" name="TextBox 19"/>
+          <p:cNvSpPr txBox="1"/>
+          <p:nvPr/>
+        </p:nvSpPr>
+        <p:spPr>
+          <a:xfrm>
+            <a:off x="8375903" y="4023359"/>
+            <a:ext cx="3401568" cy="2221992"/>
           </a:xfrm>
           <a:prstGeom prst="rect">
             <a:avLst/>
@@ -11765,7 +12616,7 @@
                   <a:srgbClr val="0A294A"/>
                 </a:solidFill>
               </a:rPr>
-              <a:t>≤300-word clinical summary</a:t>
+              <a:t>≤ 300-word clinical summary</a:t>
             </a:r>
           </a:p>
           <a:p>
@@ -11810,7 +12661,7 @@
                   <a:srgbClr val="0A294A"/>
                 </a:solidFill>
               </a:rPr>
-              <a:t>Red flags highlighted</a:t>
+              <a:t>Red flags highlighted (⚠)</a:t>
             </a:r>
           </a:p>
           <a:p>
@@ -11825,14 +12676,29 @@
                   <a:srgbClr val="0A294A"/>
                 </a:solidFill>
               </a:rPr>
-              <a:t>Returned as JSON field</a:t>
-            </a:r>
-          </a:p>
-        </p:txBody>
-      </p:sp>
-      <p:sp>
-        <p:nvSpPr>
-          <p:cNvPr id="20" name="TextBox 19"/>
+              <a:t>Returned as JSON 'summary' field</a:t>
+            </a:r>
+          </a:p>
+          <a:p>
+            <a:pPr algn="l">
+              <a:spcBef>
+                <a:spcPts val="100"/>
+              </a:spcBef>
+            </a:pPr>
+            <a:r>
+              <a:rPr sz="1100" b="0" i="0">
+                <a:solidFill>
+                  <a:srgbClr val="0A294A"/>
+                </a:solidFill>
+              </a:rPr>
+              <a:t>Deterministic fallback if no key</a:t>
+            </a:r>
+          </a:p>
+        </p:txBody>
+      </p:sp>
+      <p:sp>
+        <p:nvSpPr>
+          <p:cNvPr id="21" name="TextBox 20"/>
           <p:cNvSpPr txBox="1"/>
           <p:nvPr/>
         </p:nvSpPr>
@@ -12034,7 +12900,7 @@
                   <a:srgbClr val="AACCDD"/>
                 </a:solidFill>
               </a:rPr>
-              <a:t>FastAPI · JSON · Docker-ready</a:t>
+              <a:t>FastAPI · Pydantic · Docker-ready</a:t>
             </a:r>
           </a:p>
         </p:txBody>
@@ -12047,7 +12913,7 @@
         </p:nvSpPr>
         <p:spPr>
           <a:xfrm>
-            <a:off x="274320" y="1143000"/>
+            <a:off x="274320" y="1078992"/>
             <a:ext cx="11612880" cy="384048"/>
           </a:xfrm>
           <a:prstGeom prst="rect">
@@ -12090,7 +12956,7 @@
         </p:nvSpPr>
         <p:spPr>
           <a:xfrm>
-            <a:off x="457200" y="1188720"/>
+            <a:off x="457200" y="1124712"/>
             <a:ext cx="11247120" cy="320040"/>
           </a:xfrm>
           <a:prstGeom prst="rect">
@@ -12112,7 +12978,7 @@
                   <a:srgbClr val="FFFFFF"/>
                 </a:solidFill>
               </a:rPr>
-              <a:t>Endpoint                Description</a:t>
+              <a:t>Method   Endpoint           Description</a:t>
             </a:r>
           </a:p>
         </p:txBody>
@@ -12125,7 +12991,7 @@
         </p:nvSpPr>
         <p:spPr>
           <a:xfrm>
-            <a:off x="274320" y="1527048"/>
+            <a:off x="274320" y="1463040"/>
             <a:ext cx="11612880" cy="475488"/>
           </a:xfrm>
           <a:prstGeom prst="rect">
@@ -12168,8 +13034,8 @@
         </p:nvSpPr>
         <p:spPr>
           <a:xfrm>
-            <a:off x="457200" y="1572768"/>
-            <a:ext cx="3200400" cy="384048"/>
+            <a:off x="384048" y="1508760"/>
+            <a:ext cx="731520" cy="365760"/>
           </a:xfrm>
           <a:prstGeom prst="rect">
             <a:avLst/>
@@ -12185,12 +13051,12 @@
           <a:p>
             <a:pPr algn="l"/>
             <a:r>
-              <a:rPr sz="1200" b="1" i="0">
+              <a:rPr sz="1100" b="1" i="0">
                 <a:solidFill>
                   <a:srgbClr val="007A87"/>
                 </a:solidFill>
               </a:rPr>
-              <a:t>POST  /retrieve</a:t>
+              <a:t>POST</a:t>
             </a:r>
           </a:p>
         </p:txBody>
@@ -12203,8 +13069,8 @@
         </p:nvSpPr>
         <p:spPr>
           <a:xfrm>
-            <a:off x="3840480" y="1572768"/>
-            <a:ext cx="7863840" cy="384048"/>
+            <a:off x="1234440" y="1508760"/>
+            <a:ext cx="2011680" cy="365760"/>
           </a:xfrm>
           <a:prstGeom prst="rect">
             <a:avLst/>
@@ -12220,25 +13086,60 @@
           <a:p>
             <a:pPr algn="l"/>
             <a:r>
-              <a:rPr sz="1200" b="0" i="0">
+              <a:rPr sz="1100" b="1" i="0">
                 <a:solidFill>
                   <a:srgbClr val="0A294A"/>
                 </a:solidFill>
               </a:rPr>
-              <a:t>Submit query body, returns ranked notes + LLM summary (primary endpoint)</a:t>
-            </a:r>
-          </a:p>
-        </p:txBody>
-      </p:sp>
-      <p:sp>
-        <p:nvSpPr>
-          <p:cNvPr id="11" name="Rectangle 10"/>
+              <a:t>/retrieve</a:t>
+            </a:r>
+          </a:p>
+        </p:txBody>
+      </p:sp>
+      <p:sp>
+        <p:nvSpPr>
+          <p:cNvPr id="11" name="TextBox 10"/>
+          <p:cNvSpPr txBox="1"/>
+          <p:nvPr/>
+        </p:nvSpPr>
+        <p:spPr>
+          <a:xfrm>
+            <a:off x="3383280" y="1508760"/>
+            <a:ext cx="8321040" cy="365760"/>
+          </a:xfrm>
+          <a:prstGeom prst="rect">
+            <a:avLst/>
+          </a:prstGeom>
+          <a:noFill/>
+        </p:spPr>
+        <p:txBody>
+          <a:bodyPr wrap="square">
+            <a:spAutoFit/>
+          </a:bodyPr>
+          <a:lstStyle/>
+          <a:p/>
+          <a:p>
+            <a:pPr algn="l"/>
+            <a:r>
+              <a:rPr sz="1100" b="0" i="0">
+                <a:solidFill>
+                  <a:srgbClr val="0A294A"/>
+                </a:solidFill>
+              </a:rPr>
+              <a:t>Submit query as JSON body; returns ranked notes + LLM summary (primary endpoint)</a:t>
+            </a:r>
+          </a:p>
+        </p:txBody>
+      </p:sp>
+      <p:sp>
+        <p:nvSpPr>
+          <p:cNvPr id="12" name="Rectangle 11"/>
           <p:cNvSpPr/>
           <p:nvPr/>
         </p:nvSpPr>
         <p:spPr>
           <a:xfrm>
-            <a:off x="274320" y="2002536"/>
+            <a:off x="274320" y="1938528"/>
             <a:ext cx="11612880" cy="475488"/>
           </a:xfrm>
           <a:prstGeom prst="rect">
@@ -12275,14 +13176,14 @@
       </p:sp>
       <p:sp>
         <p:nvSpPr>
-          <p:cNvPr id="12" name="TextBox 11"/>
-          <p:cNvSpPr txBox="1"/>
-          <p:nvPr/>
-        </p:nvSpPr>
-        <p:spPr>
-          <a:xfrm>
-            <a:off x="457200" y="2048256"/>
-            <a:ext cx="3200400" cy="384048"/>
+          <p:cNvPr id="13" name="TextBox 12"/>
+          <p:cNvSpPr txBox="1"/>
+          <p:nvPr/>
+        </p:nvSpPr>
+        <p:spPr>
+          <a:xfrm>
+            <a:off x="384048" y="1984248"/>
+            <a:ext cx="731520" cy="365760"/>
           </a:xfrm>
           <a:prstGeom prst="rect">
             <a:avLst/>
@@ -12298,26 +13199,26 @@
           <a:p>
             <a:pPr algn="l"/>
             <a:r>
-              <a:rPr sz="1200" b="1" i="0">
-                <a:solidFill>
-                  <a:srgbClr val="007A87"/>
-                </a:solidFill>
-              </a:rPr>
-              <a:t>GET   /retrieve</a:t>
-            </a:r>
-          </a:p>
-        </p:txBody>
-      </p:sp>
-      <p:sp>
-        <p:nvSpPr>
-          <p:cNvPr id="13" name="TextBox 12"/>
-          <p:cNvSpPr txBox="1"/>
-          <p:nvPr/>
-        </p:nvSpPr>
-        <p:spPr>
-          <a:xfrm>
-            <a:off x="3840480" y="2048256"/>
-            <a:ext cx="7863840" cy="384048"/>
+              <a:rPr sz="1100" b="1" i="0">
+                <a:solidFill>
+                  <a:srgbClr val="00875A"/>
+                </a:solidFill>
+              </a:rPr>
+              <a:t>GET</a:t>
+            </a:r>
+          </a:p>
+        </p:txBody>
+      </p:sp>
+      <p:sp>
+        <p:nvSpPr>
+          <p:cNvPr id="14" name="TextBox 13"/>
+          <p:cNvSpPr txBox="1"/>
+          <p:nvPr/>
+        </p:nvSpPr>
+        <p:spPr>
+          <a:xfrm>
+            <a:off x="1234440" y="1984248"/>
+            <a:ext cx="2011680" cy="365760"/>
           </a:xfrm>
           <a:prstGeom prst="rect">
             <a:avLst/>
@@ -12333,25 +13234,60 @@
           <a:p>
             <a:pPr algn="l"/>
             <a:r>
-              <a:rPr sz="1200" b="0" i="0">
+              <a:rPr sz="1100" b="1" i="0">
                 <a:solidFill>
                   <a:srgbClr val="0A294A"/>
                 </a:solidFill>
               </a:rPr>
-              <a:t>Same via query params — browser / curl friendly, no body needed</a:t>
-            </a:r>
-          </a:p>
-        </p:txBody>
-      </p:sp>
-      <p:sp>
-        <p:nvSpPr>
-          <p:cNvPr id="14" name="Rectangle 13"/>
+              <a:t>/retrieve</a:t>
+            </a:r>
+          </a:p>
+        </p:txBody>
+      </p:sp>
+      <p:sp>
+        <p:nvSpPr>
+          <p:cNvPr id="15" name="TextBox 14"/>
+          <p:cNvSpPr txBox="1"/>
+          <p:nvPr/>
+        </p:nvSpPr>
+        <p:spPr>
+          <a:xfrm>
+            <a:off x="3383280" y="1984248"/>
+            <a:ext cx="8321040" cy="365760"/>
+          </a:xfrm>
+          <a:prstGeom prst="rect">
+            <a:avLst/>
+          </a:prstGeom>
+          <a:noFill/>
+        </p:spPr>
+        <p:txBody>
+          <a:bodyPr wrap="square">
+            <a:spAutoFit/>
+          </a:bodyPr>
+          <a:lstStyle/>
+          <a:p/>
+          <a:p>
+            <a:pPr algn="l"/>
+            <a:r>
+              <a:rPr sz="1100" b="0" i="0">
+                <a:solidFill>
+                  <a:srgbClr val="0A294A"/>
+                </a:solidFill>
+              </a:rPr>
+              <a:t>Same via URL query params — browser and curl friendly, no request body needed</a:t>
+            </a:r>
+          </a:p>
+        </p:txBody>
+      </p:sp>
+      <p:sp>
+        <p:nvSpPr>
+          <p:cNvPr id="16" name="Rectangle 15"/>
           <p:cNvSpPr/>
           <p:nvPr/>
         </p:nvSpPr>
         <p:spPr>
           <a:xfrm>
-            <a:off x="274320" y="2478024"/>
+            <a:off x="274320" y="2414016"/>
             <a:ext cx="11612880" cy="475488"/>
           </a:xfrm>
           <a:prstGeom prst="rect">
@@ -12388,14 +13324,14 @@
       </p:sp>
       <p:sp>
         <p:nvSpPr>
-          <p:cNvPr id="15" name="TextBox 14"/>
-          <p:cNvSpPr txBox="1"/>
-          <p:nvPr/>
-        </p:nvSpPr>
-        <p:spPr>
-          <a:xfrm>
-            <a:off x="457200" y="2523744"/>
-            <a:ext cx="3200400" cy="384048"/>
+          <p:cNvPr id="17" name="TextBox 16"/>
+          <p:cNvSpPr txBox="1"/>
+          <p:nvPr/>
+        </p:nvSpPr>
+        <p:spPr>
+          <a:xfrm>
+            <a:off x="384048" y="2459736"/>
+            <a:ext cx="731520" cy="365760"/>
           </a:xfrm>
           <a:prstGeom prst="rect">
             <a:avLst/>
@@ -12411,26 +13347,26 @@
           <a:p>
             <a:pPr algn="l"/>
             <a:r>
-              <a:rPr sz="1200" b="1" i="0">
-                <a:solidFill>
-                  <a:srgbClr val="007A87"/>
-                </a:solidFill>
-              </a:rPr>
-              <a:t>GET   /health</a:t>
-            </a:r>
-          </a:p>
-        </p:txBody>
-      </p:sp>
-      <p:sp>
-        <p:nvSpPr>
-          <p:cNvPr id="16" name="TextBox 15"/>
-          <p:cNvSpPr txBox="1"/>
-          <p:nvPr/>
-        </p:nvSpPr>
-        <p:spPr>
-          <a:xfrm>
-            <a:off x="3840480" y="2523744"/>
-            <a:ext cx="7863840" cy="384048"/>
+              <a:rPr sz="1100" b="1" i="0">
+                <a:solidFill>
+                  <a:srgbClr val="00875A"/>
+                </a:solidFill>
+              </a:rPr>
+              <a:t>GET</a:t>
+            </a:r>
+          </a:p>
+        </p:txBody>
+      </p:sp>
+      <p:sp>
+        <p:nvSpPr>
+          <p:cNvPr id="18" name="TextBox 17"/>
+          <p:cNvSpPr txBox="1"/>
+          <p:nvPr/>
+        </p:nvSpPr>
+        <p:spPr>
+          <a:xfrm>
+            <a:off x="1234440" y="2459736"/>
+            <a:ext cx="2011680" cy="365760"/>
           </a:xfrm>
           <a:prstGeom prst="rect">
             <a:avLst/>
@@ -12446,26 +13382,61 @@
           <a:p>
             <a:pPr algn="l"/>
             <a:r>
-              <a:rPr sz="1200" b="0" i="0">
+              <a:rPr sz="1100" b="1" i="0">
                 <a:solidFill>
                   <a:srgbClr val="0A294A"/>
                 </a:solidFill>
               </a:rPr>
-              <a:t>Index status, document count, active embedding model name</a:t>
-            </a:r>
-          </a:p>
-        </p:txBody>
-      </p:sp>
-      <p:sp>
-        <p:nvSpPr>
-          <p:cNvPr id="17" name="Rectangle 16"/>
+              <a:t>/health</a:t>
+            </a:r>
+          </a:p>
+        </p:txBody>
+      </p:sp>
+      <p:sp>
+        <p:nvSpPr>
+          <p:cNvPr id="19" name="TextBox 18"/>
+          <p:cNvSpPr txBox="1"/>
+          <p:nvPr/>
+        </p:nvSpPr>
+        <p:spPr>
+          <a:xfrm>
+            <a:off x="3383280" y="2459736"/>
+            <a:ext cx="8321040" cy="365760"/>
+          </a:xfrm>
+          <a:prstGeom prst="rect">
+            <a:avLst/>
+          </a:prstGeom>
+          <a:noFill/>
+        </p:spPr>
+        <p:txBody>
+          <a:bodyPr wrap="square">
+            <a:spAutoFit/>
+          </a:bodyPr>
+          <a:lstStyle/>
+          <a:p/>
+          <a:p>
+            <a:pPr algn="l"/>
+            <a:r>
+              <a:rPr sz="1100" b="0" i="0">
+                <a:solidFill>
+                  <a:srgbClr val="0A294A"/>
+                </a:solidFill>
+              </a:rPr>
+              <a:t>Returns index size, document count, and active embedding model name</a:t>
+            </a:r>
+          </a:p>
+        </p:txBody>
+      </p:sp>
+      <p:sp>
+        <p:nvSpPr>
+          <p:cNvPr id="20" name="Rectangle 19"/>
           <p:cNvSpPr/>
           <p:nvPr/>
         </p:nvSpPr>
         <p:spPr>
           <a:xfrm>
-            <a:off x="274320" y="3063240"/>
-            <a:ext cx="5577840" cy="2926080"/>
+            <a:off x="274320" y="2980944"/>
+            <a:ext cx="5577840" cy="3017520"/>
           </a:xfrm>
           <a:prstGeom prst="rect">
             <a:avLst/>
@@ -12501,14 +13472,14 @@
       </p:sp>
       <p:sp>
         <p:nvSpPr>
-          <p:cNvPr id="18" name="TextBox 17"/>
-          <p:cNvSpPr txBox="1"/>
-          <p:nvPr/>
-        </p:nvSpPr>
-        <p:spPr>
-          <a:xfrm>
-            <a:off x="457200" y="3136392"/>
-            <a:ext cx="5212080" cy="2743200"/>
+          <p:cNvPr id="21" name="TextBox 20"/>
+          <p:cNvSpPr txBox="1"/>
+          <p:nvPr/>
+        </p:nvSpPr>
+        <p:spPr>
+          <a:xfrm>
+            <a:off x="457200" y="3044952"/>
+            <a:ext cx="5212080" cy="310896"/>
           </a:xfrm>
           <a:prstGeom prst="rect">
             <a:avLst/>
@@ -12532,14 +13503,38 @@
               <a:t>Request JSON (POST /retrieve)</a:t>
             </a:r>
           </a:p>
-          <a:p>
-            <a:pPr algn="l">
-              <a:spcBef>
-                <a:spcPts val="200"/>
-              </a:spcBef>
-            </a:pPr>
-            <a:r>
-              <a:rPr sz="1100" b="0" i="0">
+        </p:txBody>
+      </p:sp>
+      <p:sp>
+        <p:nvSpPr>
+          <p:cNvPr id="22" name="TextBox 21"/>
+          <p:cNvSpPr txBox="1"/>
+          <p:nvPr/>
+        </p:nvSpPr>
+        <p:spPr>
+          <a:xfrm>
+            <a:off x="457200" y="3383280"/>
+            <a:ext cx="5212080" cy="2523744"/>
+          </a:xfrm>
+          <a:prstGeom prst="rect">
+            <a:avLst/>
+          </a:prstGeom>
+          <a:noFill/>
+        </p:spPr>
+        <p:txBody>
+          <a:bodyPr wrap="square">
+            <a:spAutoFit/>
+          </a:bodyPr>
+          <a:lstStyle/>
+          <a:p/>
+          <a:p>
+            <a:pPr algn="l">
+              <a:spcBef>
+                <a:spcPts val="100"/>
+              </a:spcBef>
+            </a:pPr>
+            <a:r>
+              <a:rPr sz="1000" b="0" i="0">
                 <a:solidFill>
                   <a:srgbClr val="CCDDFF"/>
                 </a:solidFill>
@@ -12550,11 +13545,11 @@
           <a:p>
             <a:pPr algn="l">
               <a:spcBef>
-                <a:spcPts val="200"/>
-              </a:spcBef>
-            </a:pPr>
-            <a:r>
-              <a:rPr sz="1100" b="0" i="0">
+                <a:spcPts val="100"/>
+              </a:spcBef>
+            </a:pPr>
+            <a:r>
+              <a:rPr sz="1000" b="0" i="0">
                 <a:solidFill>
                   <a:srgbClr val="CCDDFF"/>
                 </a:solidFill>
@@ -12565,11 +13560,11 @@
           <a:p>
             <a:pPr algn="l">
               <a:spcBef>
-                <a:spcPts val="200"/>
-              </a:spcBef>
-            </a:pPr>
-            <a:r>
-              <a:rPr sz="1100" b="0" i="0">
+                <a:spcPts val="100"/>
+              </a:spcBef>
+            </a:pPr>
+            <a:r>
+              <a:rPr sz="1000" b="0" i="0">
                 <a:solidFill>
                   <a:srgbClr val="CCDDFF"/>
                 </a:solidFill>
@@ -12580,11 +13575,11 @@
           <a:p>
             <a:pPr algn="l">
               <a:spcBef>
-                <a:spcPts val="200"/>
-              </a:spcBef>
-            </a:pPr>
-            <a:r>
-              <a:rPr sz="1100" b="0" i="0">
+                <a:spcPts val="100"/>
+              </a:spcBef>
+            </a:pPr>
+            <a:r>
+              <a:rPr sz="1000" b="0" i="0">
                 <a:solidFill>
                   <a:srgbClr val="CCDDFF"/>
                 </a:solidFill>
@@ -12595,11 +13590,11 @@
           <a:p>
             <a:pPr algn="l">
               <a:spcBef>
-                <a:spcPts val="200"/>
-              </a:spcBef>
-            </a:pPr>
-            <a:r>
-              <a:rPr sz="1100" b="0" i="0">
+                <a:spcPts val="100"/>
+              </a:spcBef>
+            </a:pPr>
+            <a:r>
+              <a:rPr sz="1000" b="0" i="0">
                 <a:solidFill>
                   <a:srgbClr val="CCDDFF"/>
                 </a:solidFill>
@@ -12607,18 +13602,93 @@
               <a:t>}</a:t>
             </a:r>
           </a:p>
-        </p:txBody>
-      </p:sp>
-      <p:sp>
-        <p:nvSpPr>
-          <p:cNvPr id="19" name="Rectangle 18"/>
+          <a:p>
+            <a:pPr algn="l">
+              <a:spcBef>
+                <a:spcPts val="100"/>
+              </a:spcBef>
+            </a:pPr>
+            <a:r>
+              <a:rPr sz="1000" b="0" i="0">
+                <a:solidFill>
+                  <a:srgbClr val="CCDDFF"/>
+                </a:solidFill>
+              </a:rPr>
+              <a:t/>
+            </a:r>
+          </a:p>
+          <a:p>
+            <a:pPr algn="l">
+              <a:spcBef>
+                <a:spcPts val="100"/>
+              </a:spcBef>
+            </a:pPr>
+            <a:r>
+              <a:rPr sz="1000" b="0" i="0">
+                <a:solidFill>
+                  <a:srgbClr val="CCDDFF"/>
+                </a:solidFill>
+              </a:rPr>
+              <a:t>Fields:</a:t>
+            </a:r>
+          </a:p>
+          <a:p>
+            <a:pPr algn="l">
+              <a:spcBef>
+                <a:spcPts val="100"/>
+              </a:spcBef>
+            </a:pPr>
+            <a:r>
+              <a:rPr sz="1000" b="0" i="0">
+                <a:solidFill>
+                  <a:srgbClr val="CCDDFF"/>
+                </a:solidFill>
+              </a:rPr>
+              <a:t>  query           string  (required)</a:t>
+            </a:r>
+          </a:p>
+          <a:p>
+            <a:pPr algn="l">
+              <a:spcBef>
+                <a:spcPts val="100"/>
+              </a:spcBef>
+            </a:pPr>
+            <a:r>
+              <a:rPr sz="1000" b="0" i="0">
+                <a:solidFill>
+                  <a:srgbClr val="CCDDFF"/>
+                </a:solidFill>
+              </a:rPr>
+              <a:t>  top_k           integer 1–20, default 5</a:t>
+            </a:r>
+          </a:p>
+          <a:p>
+            <a:pPr algn="l">
+              <a:spcBef>
+                <a:spcPts val="100"/>
+              </a:spcBef>
+            </a:pPr>
+            <a:r>
+              <a:rPr sz="1000" b="0" i="0">
+                <a:solidFill>
+                  <a:srgbClr val="CCDDFF"/>
+                </a:solidFill>
+              </a:rPr>
+              <a:t>  include_summary boolean, default true</a:t>
+            </a:r>
+          </a:p>
+        </p:txBody>
+      </p:sp>
+      <p:sp>
+        <p:nvSpPr>
+          <p:cNvPr id="23" name="Rectangle 22"/>
           <p:cNvSpPr/>
           <p:nvPr/>
         </p:nvSpPr>
         <p:spPr>
           <a:xfrm>
-            <a:off x="6126480" y="3063240"/>
-            <a:ext cx="5760720" cy="2926080"/>
+            <a:off x="6080760" y="2980944"/>
+            <a:ext cx="5806440" cy="3017520"/>
           </a:xfrm>
           <a:prstGeom prst="rect">
             <a:avLst/>
@@ -12654,14 +13724,14 @@
       </p:sp>
       <p:sp>
         <p:nvSpPr>
-          <p:cNvPr id="20" name="TextBox 19"/>
-          <p:cNvSpPr txBox="1"/>
-          <p:nvPr/>
-        </p:nvSpPr>
-        <p:spPr>
-          <a:xfrm>
-            <a:off x="6309360" y="3136392"/>
-            <a:ext cx="5394960" cy="2743200"/>
+          <p:cNvPr id="24" name="TextBox 23"/>
+          <p:cNvSpPr txBox="1"/>
+          <p:nvPr/>
+        </p:nvSpPr>
+        <p:spPr>
+          <a:xfrm>
+            <a:off x="6263640" y="3044952"/>
+            <a:ext cx="5440680" cy="310896"/>
           </a:xfrm>
           <a:prstGeom prst="rect">
             <a:avLst/>
@@ -12685,29 +13755,53 @@
               <a:t>Response JSON (excerpt)</a:t>
             </a:r>
           </a:p>
-          <a:p>
-            <a:pPr algn="l">
-              <a:spcBef>
-                <a:spcPts val="200"/>
-              </a:spcBef>
-            </a:pPr>
-            <a:r>
-              <a:rPr sz="1100" b="0" i="0">
+        </p:txBody>
+      </p:sp>
+      <p:sp>
+        <p:nvSpPr>
+          <p:cNvPr id="25" name="TextBox 24"/>
+          <p:cNvSpPr txBox="1"/>
+          <p:nvPr/>
+        </p:nvSpPr>
+        <p:spPr>
+          <a:xfrm>
+            <a:off x="6263640" y="3383280"/>
+            <a:ext cx="5440680" cy="2523744"/>
+          </a:xfrm>
+          <a:prstGeom prst="rect">
+            <a:avLst/>
+          </a:prstGeom>
+          <a:noFill/>
+        </p:spPr>
+        <p:txBody>
+          <a:bodyPr wrap="square">
+            <a:spAutoFit/>
+          </a:bodyPr>
+          <a:lstStyle/>
+          <a:p/>
+          <a:p>
+            <a:pPr algn="l">
+              <a:spcBef>
+                <a:spcPts val="100"/>
+              </a:spcBef>
+            </a:pPr>
+            <a:r>
+              <a:rPr sz="1000" b="0" i="0">
                 <a:solidFill>
                   <a:srgbClr val="CCDDFF"/>
                 </a:solidFill>
               </a:rPr>
-              <a:t>{ "query": "...",</a:t>
-            </a:r>
-          </a:p>
-          <a:p>
-            <a:pPr algn="l">
-              <a:spcBef>
-                <a:spcPts val="200"/>
-              </a:spcBef>
-            </a:pPr>
-            <a:r>
-              <a:rPr sz="1100" b="0" i="0">
+              <a:t>{ "query": "renal insufficiency in T2DM",</a:t>
+            </a:r>
+          </a:p>
+          <a:p>
+            <a:pPr algn="l">
+              <a:spcBef>
+                <a:spcPts val="100"/>
+              </a:spcBef>
+            </a:pPr>
+            <a:r>
+              <a:rPr sz="1000" b="0" i="0">
                 <a:solidFill>
                   <a:srgbClr val="CCDDFF"/>
                 </a:solidFill>
@@ -12718,11 +13812,11 @@
           <a:p>
             <a:pPr algn="l">
               <a:spcBef>
-                <a:spcPts val="200"/>
-              </a:spcBef>
-            </a:pPr>
-            <a:r>
-              <a:rPr sz="1100" b="0" i="0">
+                <a:spcPts val="100"/>
+              </a:spcBef>
+            </a:pPr>
+            <a:r>
+              <a:rPr sz="1000" b="0" i="0">
                 <a:solidFill>
                   <a:srgbClr val="CCDDFF"/>
                 </a:solidFill>
@@ -12733,60 +13827,120 @@
           <a:p>
             <a:pPr algn="l">
               <a:spcBef>
-                <a:spcPts val="200"/>
-              </a:spcBef>
-            </a:pPr>
-            <a:r>
-              <a:rPr sz="1100" b="0" i="0">
+                <a:spcPts val="100"/>
+              </a:spcBef>
+            </a:pPr>
+            <a:r>
+              <a:rPr sz="1000" b="0" i="0">
                 <a:solidFill>
                   <a:srgbClr val="CCDDFF"/>
                 </a:solidFill>
               </a:rPr>
-              <a:t>  "results": [{ "rank": 1,</a:t>
-            </a:r>
-          </a:p>
-          <a:p>
-            <a:pPr algn="l">
-              <a:spcBef>
-                <a:spcPts val="200"/>
-              </a:spcBef>
-            </a:pPr>
-            <a:r>
-              <a:rPr sz="1100" b="0" i="0">
+              <a:t>  "results": [{</a:t>
+            </a:r>
+          </a:p>
+          <a:p>
+            <a:pPr algn="l">
+              <a:spcBef>
+                <a:spcPts val="100"/>
+              </a:spcBef>
+            </a:pPr>
+            <a:r>
+              <a:rPr sz="1000" b="0" i="0">
                 <a:solidFill>
                   <a:srgbClr val="CCDDFF"/>
                 </a:solidFill>
               </a:rPr>
-              <a:t>    "score": 0.985, "specialty": "Nephrology"}],</a:t>
-            </a:r>
-          </a:p>
-          <a:p>
-            <a:pPr algn="l">
-              <a:spcBef>
-                <a:spcPts val="200"/>
-              </a:spcBef>
-            </a:pPr>
-            <a:r>
-              <a:rPr sz="1100" b="0" i="0">
+              <a:t>    "rank": 1, "score": 0.985,</a:t>
+            </a:r>
+          </a:p>
+          <a:p>
+            <a:pPr algn="l">
+              <a:spcBef>
+                <a:spcPts val="100"/>
+              </a:spcBef>
+            </a:pPr>
+            <a:r>
+              <a:rPr sz="1000" b="0" i="0">
                 <a:solidFill>
                   <a:srgbClr val="CCDDFF"/>
                 </a:solidFill>
               </a:rPr>
-              <a:t>  "summary": "The top result highlights…" }</a:t>
-            </a:r>
-          </a:p>
-        </p:txBody>
-      </p:sp>
-      <p:sp>
-        <p:nvSpPr>
-          <p:cNvPr id="21" name="Rectangle 20"/>
+              <a:t>    "specialty": "Nephrology",</a:t>
+            </a:r>
+          </a:p>
+          <a:p>
+            <a:pPr algn="l">
+              <a:spcBef>
+                <a:spcPts val="100"/>
+              </a:spcBef>
+            </a:pPr>
+            <a:r>
+              <a:rPr sz="1000" b="0" i="0">
+                <a:solidFill>
+                  <a:srgbClr val="CCDDFF"/>
+                </a:solidFill>
+              </a:rPr>
+              <a:t>    "description": "CKD stage 3 in T2DM...",</a:t>
+            </a:r>
+          </a:p>
+          <a:p>
+            <a:pPr algn="l">
+              <a:spcBef>
+                <a:spcPts val="100"/>
+              </a:spcBef>
+            </a:pPr>
+            <a:r>
+              <a:rPr sz="1000" b="0" i="0">
+                <a:solidFill>
+                  <a:srgbClr val="CCDDFF"/>
+                </a:solidFill>
+              </a:rPr>
+              <a:t>    "keywords": "CKD, GFR, nephropathy",</a:t>
+            </a:r>
+          </a:p>
+          <a:p>
+            <a:pPr algn="l">
+              <a:spcBef>
+                <a:spcPts val="100"/>
+              </a:spcBef>
+            </a:pPr>
+            <a:r>
+              <a:rPr sz="1000" b="0" i="0">
+                <a:solidFill>
+                  <a:srgbClr val="CCDDFF"/>
+                </a:solidFill>
+              </a:rPr>
+              <a:t>    "transcription_excerpt": "62yo male..."</a:t>
+            </a:r>
+          </a:p>
+          <a:p>
+            <a:pPr algn="l">
+              <a:spcBef>
+                <a:spcPts val="100"/>
+              </a:spcBef>
+            </a:pPr>
+            <a:r>
+              <a:rPr sz="1000" b="0" i="0">
+                <a:solidFill>
+                  <a:srgbClr val="CCDDFF"/>
+                </a:solidFill>
+              </a:rPr>
+              <a:t>  }], "summary": "Top result: CKD..." }</a:t>
+            </a:r>
+          </a:p>
+        </p:txBody>
+      </p:sp>
+      <p:sp>
+        <p:nvSpPr>
+          <p:cNvPr id="26" name="Rectangle 25"/>
           <p:cNvSpPr/>
           <p:nvPr/>
         </p:nvSpPr>
         <p:spPr>
           <a:xfrm>
             <a:off x="274320" y="6016752"/>
-            <a:ext cx="11612880" cy="292608"/>
+            <a:ext cx="11612880" cy="274320"/>
           </a:xfrm>
           <a:prstGeom prst="rect">
             <a:avLst/>
@@ -12822,13 +13976,13 @@
       </p:sp>
       <p:sp>
         <p:nvSpPr>
-          <p:cNvPr id="22" name="TextBox 21"/>
-          <p:cNvSpPr txBox="1"/>
-          <p:nvPr/>
-        </p:nvSpPr>
-        <p:spPr>
-          <a:xfrm>
-            <a:off x="457200" y="6044184"/>
+          <p:cNvPr id="27" name="TextBox 26"/>
+          <p:cNvSpPr txBox="1"/>
+          <p:nvPr/>
+        </p:nvSpPr>
+        <p:spPr>
+          <a:xfrm>
+            <a:off x="457200" y="6035040"/>
             <a:ext cx="11247120" cy="237744"/>
           </a:xfrm>
           <a:prstGeom prst="rect">
@@ -12857,7 +14011,7 @@
       </p:sp>
       <p:sp>
         <p:nvSpPr>
-          <p:cNvPr id="23" name="TextBox 22"/>
+          <p:cNvPr id="28" name="TextBox 27"/>
           <p:cNvSpPr txBox="1"/>
           <p:nvPr/>
         </p:nvSpPr>
@@ -13059,7 +14213,7 @@
                   <a:srgbClr val="AACCDD"/>
                 </a:solidFill>
               </a:rPr>
-              <a:t>Proving Semantic Understanding</a:t>
+              <a:t>Proving Semantic Understanding — Not Keyword Matching</a:t>
             </a:r>
           </a:p>
         </p:txBody>
@@ -13072,7 +14226,7 @@
         </p:nvSpPr>
         <p:spPr>
           <a:xfrm>
-            <a:off x="274320" y="1143000"/>
+            <a:off x="274320" y="1078992"/>
             <a:ext cx="3749039" cy="347472"/>
           </a:xfrm>
           <a:prstGeom prst="rect">
@@ -13115,7 +14269,7 @@
         </p:nvSpPr>
         <p:spPr>
           <a:xfrm>
-            <a:off x="365760" y="1188720"/>
+            <a:off x="365760" y="1124712"/>
             <a:ext cx="3566159" cy="301752"/>
           </a:xfrm>
           <a:prstGeom prst="rect">
@@ -13150,8 +14304,8 @@
         </p:nvSpPr>
         <p:spPr>
           <a:xfrm>
-            <a:off x="274320" y="1490472"/>
-            <a:ext cx="3749039" cy="1344168"/>
+            <a:off x="274320" y="1426464"/>
+            <a:ext cx="3749039" cy="1389888"/>
           </a:xfrm>
           <a:prstGeom prst="rect">
             <a:avLst/>
@@ -13193,8 +14347,8 @@
         </p:nvSpPr>
         <p:spPr>
           <a:xfrm>
-            <a:off x="384048" y="1581912"/>
-            <a:ext cx="3529583" cy="1207008"/>
+            <a:off x="384048" y="1517904"/>
+            <a:ext cx="3529583" cy="1252728"/>
           </a:xfrm>
           <a:prstGeom prst="rect">
             <a:avLst/>
@@ -13249,7 +14403,22 @@
                   <a:srgbClr val="0A294A"/>
                 </a:solidFill>
               </a:rPr>
-              <a:t>All 5 test queries: Precision@1 = 1.0</a:t>
+              <a:t>Threshold: &gt; 0.8 = good; 1.0 = perfect.</a:t>
+            </a:r>
+          </a:p>
+          <a:p>
+            <a:pPr algn="l">
+              <a:spcBef>
+                <a:spcPts val="100"/>
+              </a:spcBef>
+            </a:pPr>
+            <a:r>
+              <a:rPr sz="1100" b="0" i="0">
+                <a:solidFill>
+                  <a:srgbClr val="0A294A"/>
+                </a:solidFill>
+              </a:rPr>
+              <a:t>Result: Precision@1 = 1.0 on all 5 queries.</a:t>
             </a:r>
           </a:p>
         </p:txBody>
@@ -13262,7 +14431,7 @@
         </p:nvSpPr>
         <p:spPr>
           <a:xfrm>
-            <a:off x="4251959" y="1143000"/>
+            <a:off x="4251959" y="1078992"/>
             <a:ext cx="3749039" cy="347472"/>
           </a:xfrm>
           <a:prstGeom prst="rect">
@@ -13305,7 +14474,7 @@
         </p:nvSpPr>
         <p:spPr>
           <a:xfrm>
-            <a:off x="4343399" y="1188720"/>
+            <a:off x="4343399" y="1124712"/>
             <a:ext cx="3566159" cy="301752"/>
           </a:xfrm>
           <a:prstGeom prst="rect">
@@ -13327,7 +14496,7 @@
                   <a:srgbClr val="FFFFFF"/>
                 </a:solidFill>
               </a:rPr>
-              <a:t>Keyword Recall</a:t>
+              <a:t>Keyword Recall@k</a:t>
             </a:r>
           </a:p>
         </p:txBody>
@@ -13340,8 +14509,8 @@
         </p:nvSpPr>
         <p:spPr>
           <a:xfrm>
-            <a:off x="4251959" y="1490472"/>
-            <a:ext cx="3749039" cy="1344168"/>
+            <a:off x="4251959" y="1426464"/>
+            <a:ext cx="3749039" cy="1389888"/>
           </a:xfrm>
           <a:prstGeom prst="rect">
             <a:avLst/>
@@ -13383,8 +14552,8 @@
         </p:nvSpPr>
         <p:spPr>
           <a:xfrm>
-            <a:off x="4361688" y="1581912"/>
-            <a:ext cx="3529583" cy="1207008"/>
+            <a:off x="4361688" y="1517904"/>
+            <a:ext cx="3529583" cy="1252728"/>
           </a:xfrm>
           <a:prstGeom prst="rect">
             <a:avLst/>
@@ -13424,7 +14593,7 @@
                   <a:srgbClr val="0A294A"/>
                 </a:solidFill>
               </a:rPr>
-              <a:t>least one key clinical term from query.</a:t>
+              <a:t>least one key clinical term from query domain.</a:t>
             </a:r>
           </a:p>
           <a:p>
@@ -13439,7 +14608,22 @@
                   <a:srgbClr val="0A294A"/>
                 </a:solidFill>
               </a:rPr>
-              <a:t>Robust even with synonym variation.</a:t>
+              <a:t>Threshold: &gt; 0.6 = acceptable.</a:t>
+            </a:r>
+          </a:p>
+          <a:p>
+            <a:pPr algn="l">
+              <a:spcBef>
+                <a:spcPts val="100"/>
+              </a:spcBef>
+            </a:pPr>
+            <a:r>
+              <a:rPr sz="1100" b="0" i="0">
+                <a:solidFill>
+                  <a:srgbClr val="0A294A"/>
+                </a:solidFill>
+              </a:rPr>
+              <a:t>Robust even with synonym vocabulary gap.</a:t>
             </a:r>
           </a:p>
         </p:txBody>
@@ -13452,7 +14636,7 @@
         </p:nvSpPr>
         <p:spPr>
           <a:xfrm>
-            <a:off x="8229600" y="1143000"/>
+            <a:off x="8229600" y="1078992"/>
             <a:ext cx="3749039" cy="347472"/>
           </a:xfrm>
           <a:prstGeom prst="rect">
@@ -13495,7 +14679,7 @@
         </p:nvSpPr>
         <p:spPr>
           <a:xfrm>
-            <a:off x="8321040" y="1188720"/>
+            <a:off x="8321040" y="1124712"/>
             <a:ext cx="3566159" cy="301752"/>
           </a:xfrm>
           <a:prstGeom prst="rect">
@@ -13530,8 +14714,8 @@
         </p:nvSpPr>
         <p:spPr>
           <a:xfrm>
-            <a:off x="8229600" y="1490472"/>
-            <a:ext cx="3749039" cy="1344168"/>
+            <a:off x="8229600" y="1426464"/>
+            <a:ext cx="3749039" cy="1389888"/>
           </a:xfrm>
           <a:prstGeom prst="rect">
             <a:avLst/>
@@ -13573,8 +14757,8 @@
         </p:nvSpPr>
         <p:spPr>
           <a:xfrm>
-            <a:off x="8339327" y="1581912"/>
-            <a:ext cx="3529583" cy="1207008"/>
+            <a:off x="8339327" y="1517904"/>
+            <a:ext cx="3529583" cy="1252728"/>
           </a:xfrm>
           <a:prstGeom prst="rect">
             <a:avLst/>
@@ -13614,7 +14798,7 @@
                   <a:srgbClr val="0A294A"/>
                 </a:solidFill>
               </a:rPr>
-              <a:t>Large spread = unambiguous top result.</a:t>
+              <a:t>Large gap = unambiguous top result.</a:t>
             </a:r>
           </a:p>
           <a:p>
@@ -13629,7 +14813,22 @@
                   <a:srgbClr val="0A294A"/>
                 </a:solidFill>
               </a:rPr>
-              <a:t>Mean rank-1 score across queries: 0.979</a:t>
+              <a:t>Threshold: &gt; 0.1 = well-separated.</a:t>
+            </a:r>
+          </a:p>
+          <a:p>
+            <a:pPr algn="l">
+              <a:spcBef>
+                <a:spcPts val="100"/>
+              </a:spcBef>
+            </a:pPr>
+            <a:r>
+              <a:rPr sz="1100" b="0" i="0">
+                <a:solidFill>
+                  <a:srgbClr val="0A294A"/>
+                </a:solidFill>
+              </a:rPr>
+              <a:t>Mean rank-1 score across 5 queries: 0.980.</a:t>
             </a:r>
           </a:p>
         </p:txBody>
@@ -13642,8 +14841,8 @@
         </p:nvSpPr>
         <p:spPr>
           <a:xfrm>
-            <a:off x="274320" y="3017520"/>
-            <a:ext cx="11612880" cy="384048"/>
+            <a:off x="274320" y="2962656"/>
+            <a:ext cx="11612880" cy="365760"/>
           </a:xfrm>
           <a:prstGeom prst="rect">
             <a:avLst/>
@@ -13685,8 +14884,8 @@
         </p:nvSpPr>
         <p:spPr>
           <a:xfrm>
-            <a:off x="457200" y="3063240"/>
-            <a:ext cx="11247120" cy="320040"/>
+            <a:off x="457200" y="3008376"/>
+            <a:ext cx="11247120" cy="301752"/>
           </a:xfrm>
           <a:prstGeom prst="rect">
             <a:avLst/>
@@ -13707,7 +14906,7 @@
                   <a:srgbClr val="FFFFFF"/>
                 </a:solidFill>
               </a:rPr>
-              <a:t>Test Query                                          Rank-1 Specialty       Score   Correct</a:t>
+              <a:t>Test Query                                     Rank-1 Specialty       Score    Correct</a:t>
             </a:r>
           </a:p>
         </p:txBody>
@@ -13720,7 +14919,7 @@
         </p:nvSpPr>
         <p:spPr>
           <a:xfrm>
-            <a:off x="274320" y="3401568"/>
+            <a:off x="274320" y="3328416"/>
             <a:ext cx="11612880" cy="402336"/>
           </a:xfrm>
           <a:prstGeom prst="rect">
@@ -13763,8 +14962,8 @@
         </p:nvSpPr>
         <p:spPr>
           <a:xfrm>
-            <a:off x="365760" y="3456432"/>
-            <a:ext cx="5943600" cy="310896"/>
+            <a:off x="384048" y="3383280"/>
+            <a:ext cx="5669280" cy="310896"/>
           </a:xfrm>
           <a:prstGeom prst="rect">
             <a:avLst/>
@@ -13785,7 +14984,7 @@
                   <a:srgbClr val="0A294A"/>
                 </a:solidFill>
               </a:rPr>
-              <a:t>Diabetic patient with kidney complications</a:t>
+              <a:t>Renal insufficiency in type 2 diabetes mellitus</a:t>
             </a:r>
           </a:p>
         </p:txBody>
@@ -13798,8 +14997,8 @@
         </p:nvSpPr>
         <p:spPr>
           <a:xfrm>
-            <a:off x="6492240" y="3456432"/>
-            <a:ext cx="2377440" cy="310896"/>
+            <a:off x="6236208" y="3383280"/>
+            <a:ext cx="2651760" cy="310896"/>
           </a:xfrm>
           <a:prstGeom prst="rect">
             <a:avLst/>
@@ -13820,7 +15019,7 @@
                   <a:srgbClr val="0A294A"/>
                 </a:solidFill>
               </a:rPr>
-              <a:t>Nephrology</a:t>
+              <a:t>Nephrology / CKD + DM</a:t>
             </a:r>
           </a:p>
         </p:txBody>
@@ -13833,8 +15032,8 @@
         </p:nvSpPr>
         <p:spPr>
           <a:xfrm>
-            <a:off x="9052560" y="3456432"/>
-            <a:ext cx="1005840" cy="310896"/>
+            <a:off x="9052560" y="3383280"/>
+            <a:ext cx="914400" cy="310896"/>
           </a:xfrm>
           <a:prstGeom prst="rect">
             <a:avLst/>
@@ -13868,7 +15067,7 @@
         </p:nvSpPr>
         <p:spPr>
           <a:xfrm>
-            <a:off x="10332720" y="3456432"/>
+            <a:off x="10195560" y="3383280"/>
             <a:ext cx="640080" cy="310896"/>
           </a:xfrm>
           <a:prstGeom prst="rect">
@@ -13903,7 +15102,7 @@
         </p:nvSpPr>
         <p:spPr>
           <a:xfrm>
-            <a:off x="274320" y="3803904"/>
+            <a:off x="274320" y="3730752"/>
             <a:ext cx="11612880" cy="402336"/>
           </a:xfrm>
           <a:prstGeom prst="rect">
@@ -13946,8 +15145,8 @@
         </p:nvSpPr>
         <p:spPr>
           <a:xfrm>
-            <a:off x="365760" y="3858768"/>
-            <a:ext cx="5943600" cy="310896"/>
+            <a:off x="384048" y="3785615"/>
+            <a:ext cx="5669280" cy="310896"/>
           </a:xfrm>
           <a:prstGeom prst="rect">
             <a:avLst/>
@@ -13968,7 +15167,7 @@
                   <a:srgbClr val="0A294A"/>
                 </a:solidFill>
               </a:rPr>
-              <a:t>Acute chest pain, ST-elevation MI</a:t>
+              <a:t>Blood glucose crisis requiring intravenous insulin</a:t>
             </a:r>
           </a:p>
         </p:txBody>
@@ -13981,8 +15180,8 @@
         </p:nvSpPr>
         <p:spPr>
           <a:xfrm>
-            <a:off x="6492240" y="3858768"/>
-            <a:ext cx="2377440" cy="310896"/>
+            <a:off x="6236208" y="3785615"/>
+            <a:ext cx="2651760" cy="310896"/>
           </a:xfrm>
           <a:prstGeom prst="rect">
             <a:avLst/>
@@ -14003,7 +15202,7 @@
                   <a:srgbClr val="0A294A"/>
                 </a:solidFill>
               </a:rPr>
-              <a:t>Cardiology</a:t>
+              <a:t>Endocrinology / DKA</a:t>
             </a:r>
           </a:p>
         </p:txBody>
@@ -14016,8 +15215,8 @@
         </p:nvSpPr>
         <p:spPr>
           <a:xfrm>
-            <a:off x="9052560" y="3858768"/>
-            <a:ext cx="1005840" cy="310896"/>
+            <a:off x="9052560" y="3785615"/>
+            <a:ext cx="914400" cy="310896"/>
           </a:xfrm>
           <a:prstGeom prst="rect">
             <a:avLst/>
@@ -14038,7 +15237,7 @@
                   <a:srgbClr val="0A294A"/>
                 </a:solidFill>
               </a:rPr>
-              <a:t>0.980</a:t>
+              <a:t>0.946</a:t>
             </a:r>
           </a:p>
         </p:txBody>
@@ -14051,7 +15250,7 @@
         </p:nvSpPr>
         <p:spPr>
           <a:xfrm>
-            <a:off x="10332720" y="3858768"/>
+            <a:off x="10195560" y="3785615"/>
             <a:ext cx="640080" cy="310896"/>
           </a:xfrm>
           <a:prstGeom prst="rect">
@@ -14086,7 +15285,7 @@
         </p:nvSpPr>
         <p:spPr>
           <a:xfrm>
-            <a:off x="274320" y="4206240"/>
+            <a:off x="274320" y="4133088"/>
             <a:ext cx="11612880" cy="402336"/>
           </a:xfrm>
           <a:prstGeom prst="rect">
@@ -14129,8 +15328,8 @@
         </p:nvSpPr>
         <p:spPr>
           <a:xfrm>
-            <a:off x="365760" y="4261104"/>
-            <a:ext cx="5943600" cy="310896"/>
+            <a:off x="384048" y="4187952"/>
+            <a:ext cx="5669280" cy="310896"/>
           </a:xfrm>
           <a:prstGeom prst="rect">
             <a:avLst/>
@@ -14151,7 +15350,7 @@
                   <a:srgbClr val="0A294A"/>
                 </a:solidFill>
               </a:rPr>
-              <a:t>COPD exacerbation, dyspnea, low oxygen sat</a:t>
+              <a:t>COPD and decreased O2 needing bronchodilation</a:t>
             </a:r>
           </a:p>
         </p:txBody>
@@ -14164,8 +15363,8 @@
         </p:nvSpPr>
         <p:spPr>
           <a:xfrm>
-            <a:off x="6492240" y="4261104"/>
-            <a:ext cx="2377440" cy="310896"/>
+            <a:off x="6236208" y="4187952"/>
+            <a:ext cx="2651760" cy="310896"/>
           </a:xfrm>
           <a:prstGeom prst="rect">
             <a:avLst/>
@@ -14186,7 +15385,7 @@
                   <a:srgbClr val="0A294A"/>
                 </a:solidFill>
               </a:rPr>
-              <a:t>Pulmonology</a:t>
+              <a:t>Pulmonology / COPD</a:t>
             </a:r>
           </a:p>
         </p:txBody>
@@ -14199,8 +15398,8 @@
         </p:nvSpPr>
         <p:spPr>
           <a:xfrm>
-            <a:off x="9052560" y="4261104"/>
-            <a:ext cx="1005840" cy="310896"/>
+            <a:off x="9052560" y="4187952"/>
+            <a:ext cx="914400" cy="310896"/>
           </a:xfrm>
           <a:prstGeom prst="rect">
             <a:avLst/>
@@ -14234,7 +15433,7 @@
         </p:nvSpPr>
         <p:spPr>
           <a:xfrm>
-            <a:off x="10332720" y="4261104"/>
+            <a:off x="10195560" y="4187952"/>
             <a:ext cx="640080" cy="310896"/>
           </a:xfrm>
           <a:prstGeom prst="rect">
@@ -14269,7 +15468,7 @@
         </p:nvSpPr>
         <p:spPr>
           <a:xfrm>
-            <a:off x="274320" y="4608576"/>
+            <a:off x="274320" y="4535424"/>
             <a:ext cx="11612880" cy="402336"/>
           </a:xfrm>
           <a:prstGeom prst="rect">
@@ -14312,8 +15511,8 @@
         </p:nvSpPr>
         <p:spPr>
           <a:xfrm>
-            <a:off x="365760" y="4663440"/>
-            <a:ext cx="5943600" cy="310896"/>
+            <a:off x="384048" y="4590288"/>
+            <a:ext cx="5669280" cy="310896"/>
           </a:xfrm>
           <a:prstGeom prst="rect">
             <a:avLst/>
@@ -14334,7 +15533,7 @@
                   <a:srgbClr val="0A294A"/>
                 </a:solidFill>
               </a:rPr>
-              <a:t>Knee arthroplasty post-op rehabilitation</a:t>
+              <a:t>Post-op knee arthroplasty physiotherapy rehab</a:t>
             </a:r>
           </a:p>
         </p:txBody>
@@ -14347,8 +15546,8 @@
         </p:nvSpPr>
         <p:spPr>
           <a:xfrm>
-            <a:off x="6492240" y="4663440"/>
-            <a:ext cx="2377440" cy="310896"/>
+            <a:off x="6236208" y="4590288"/>
+            <a:ext cx="2651760" cy="310896"/>
           </a:xfrm>
           <a:prstGeom prst="rect">
             <a:avLst/>
@@ -14369,7 +15568,7 @@
                   <a:srgbClr val="0A294A"/>
                 </a:solidFill>
               </a:rPr>
-              <a:t>Orthopaedics</a:t>
+              <a:t>Orthopaedics / TKR</a:t>
             </a:r>
           </a:p>
         </p:txBody>
@@ -14382,8 +15581,8 @@
         </p:nvSpPr>
         <p:spPr>
           <a:xfrm>
-            <a:off x="9052560" y="4663440"/>
-            <a:ext cx="1005840" cy="310896"/>
+            <a:off x="9052560" y="4590288"/>
+            <a:ext cx="914400" cy="310896"/>
           </a:xfrm>
           <a:prstGeom prst="rect">
             <a:avLst/>
@@ -14417,7 +15616,7 @@
         </p:nvSpPr>
         <p:spPr>
           <a:xfrm>
-            <a:off x="10332720" y="4663440"/>
+            <a:off x="10195560" y="4590288"/>
             <a:ext cx="640080" cy="310896"/>
           </a:xfrm>
           <a:prstGeom prst="rect">
@@ -14452,7 +15651,7 @@
         </p:nvSpPr>
         <p:spPr>
           <a:xfrm>
-            <a:off x="274320" y="5010912"/>
+            <a:off x="274320" y="4937760"/>
             <a:ext cx="11612880" cy="402336"/>
           </a:xfrm>
           <a:prstGeom prst="rect">
@@ -14495,8 +15694,8 @@
         </p:nvSpPr>
         <p:spPr>
           <a:xfrm>
-            <a:off x="365760" y="5065776"/>
-            <a:ext cx="5943600" cy="310896"/>
+            <a:off x="384048" y="4992624"/>
+            <a:ext cx="5669280" cy="310896"/>
           </a:xfrm>
           <a:prstGeom prst="rect">
             <a:avLst/>
@@ -14517,7 +15716,7 @@
                   <a:srgbClr val="0A294A"/>
                 </a:solidFill>
               </a:rPr>
-              <a:t>Insulin-dependent DKA, hyperglycaemia</a:t>
+              <a:t>Crushing left-arm pain with elevated troponin</a:t>
             </a:r>
           </a:p>
         </p:txBody>
@@ -14530,8 +15729,8 @@
         </p:nvSpPr>
         <p:spPr>
           <a:xfrm>
-            <a:off x="6492240" y="5065776"/>
-            <a:ext cx="2377440" cy="310896"/>
+            <a:off x="6236208" y="4992624"/>
+            <a:ext cx="2651760" cy="310896"/>
           </a:xfrm>
           <a:prstGeom prst="rect">
             <a:avLst/>
@@ -14552,7 +15751,7 @@
                   <a:srgbClr val="0A294A"/>
                 </a:solidFill>
               </a:rPr>
-              <a:t>Endocrinology</a:t>
+              <a:t>Cardiology / Chest Pain</a:t>
             </a:r>
           </a:p>
         </p:txBody>
@@ -14565,8 +15764,8 @@
         </p:nvSpPr>
         <p:spPr>
           <a:xfrm>
-            <a:off x="9052560" y="5065776"/>
-            <a:ext cx="1005840" cy="310896"/>
+            <a:off x="9052560" y="4992624"/>
+            <a:ext cx="914400" cy="310896"/>
           </a:xfrm>
           <a:prstGeom prst="rect">
             <a:avLst/>
@@ -14587,7 +15786,7 @@
                   <a:srgbClr val="0A294A"/>
                 </a:solidFill>
               </a:rPr>
-              <a:t>0.946</a:t>
+              <a:t>0.980</a:t>
             </a:r>
           </a:p>
         </p:txBody>
@@ -14600,7 +15799,7 @@
         </p:nvSpPr>
         <p:spPr>
           <a:xfrm>
-            <a:off x="10332720" y="5065776"/>
+            <a:off x="10195560" y="4992624"/>
             <a:ext cx="640080" cy="310896"/>
           </a:xfrm>
           <a:prstGeom prst="rect">
@@ -14635,8 +15834,8 @@
         </p:nvSpPr>
         <p:spPr>
           <a:xfrm>
-            <a:off x="274320" y="5422392"/>
-            <a:ext cx="11612880" cy="886968"/>
+            <a:off x="274320" y="5385816"/>
+            <a:ext cx="11612880" cy="905256"/>
           </a:xfrm>
           <a:prstGeom prst="rect">
             <a:avLst/>
@@ -14678,8 +15877,8 @@
         </p:nvSpPr>
         <p:spPr>
           <a:xfrm>
-            <a:off x="457200" y="5468112"/>
-            <a:ext cx="11247120" cy="768096"/>
+            <a:off x="457200" y="5440680"/>
+            <a:ext cx="11247120" cy="329184"/>
           </a:xfrm>
           <a:prstGeom prst="rect">
             <a:avLst/>
@@ -14703,6 +15902,30 @@
               <a:t>Semantic Proof — Vocabulary Mismatch Handled Correctly:</a:t>
             </a:r>
           </a:p>
+        </p:txBody>
+      </p:sp>
+      <p:sp>
+        <p:nvSpPr>
+          <p:cNvPr id="47" name="TextBox 46"/>
+          <p:cNvSpPr txBox="1"/>
+          <p:nvPr/>
+        </p:nvSpPr>
+        <p:spPr>
+          <a:xfrm>
+            <a:off x="457200" y="5760720"/>
+            <a:ext cx="11247120" cy="493776"/>
+          </a:xfrm>
+          <a:prstGeom prst="rect">
+            <a:avLst/>
+          </a:prstGeom>
+          <a:noFill/>
+        </p:spPr>
+        <p:txBody>
+          <a:bodyPr wrap="square">
+            <a:spAutoFit/>
+          </a:bodyPr>
+          <a:lstStyle/>
+          <a:p/>
           <a:p>
             <a:pPr algn="l">
               <a:spcBef>
@@ -14710,34 +15933,19 @@
               </a:spcBef>
             </a:pPr>
             <a:r>
-              <a:rPr sz="1100" b="0" i="0">
+              <a:rPr sz="1000" b="0" i="0">
                 <a:solidFill>
                   <a:srgbClr val="FFFFFF"/>
                 </a:solidFill>
               </a:rPr>
-              <a:t>Query: "renal insufficiency in T2DM"  →  Rank 1: Nephrology / CKD  score=0.985</a:t>
-            </a:r>
-          </a:p>
-          <a:p>
-            <a:pPr algn="l">
-              <a:spcBef>
-                <a:spcPts val="200"/>
-              </a:spcBef>
-            </a:pPr>
-            <a:r>
-              <a:rPr sz="1000" b="0" i="0">
-                <a:solidFill>
-                  <a:srgbClr val="CCDDFF"/>
-                </a:solidFill>
-              </a:rPr>
-              <a:t>No word overlap between query and document — meaning preserved across vocabulary boundary.</a:t>
-            </a:r>
-          </a:p>
-        </p:txBody>
-      </p:sp>
-      <p:sp>
-        <p:nvSpPr>
-          <p:cNvPr id="47" name="TextBox 46"/>
+              <a:t>Query: "renal insufficiency in T2DM"  →  Rank 1: Nephrology / CKD  score=0.985  —  no word overlap between query and document. Keyword matcher returns nothing; embedding returns clinically correct note.</a:t>
+            </a:r>
+          </a:p>
+        </p:txBody>
+      </p:sp>
+      <p:sp>
+        <p:nvSpPr>
+          <p:cNvPr id="48" name="TextBox 47"/>
           <p:cNvSpPr txBox="1"/>
           <p:nvPr/>
         </p:nvSpPr>

--- a/Clinical_Note_Retrieval_Exam.pptx
+++ b/Clinical_Note_Retrieval_Exam.pptx
@@ -3204,7 +3204,6 @@
             <a:spAutoFit/>
           </a:bodyPr>
           <a:lstStyle/>
-          <a:p/>
           <a:p>
             <a:pPr algn="l"/>
             <a:r>
@@ -3239,7 +3238,6 @@
             <a:spAutoFit/>
           </a:bodyPr>
           <a:lstStyle/>
-          <a:p/>
           <a:p>
             <a:pPr algn="l"/>
             <a:r>
@@ -3274,7 +3272,6 @@
             <a:spAutoFit/>
           </a:bodyPr>
           <a:lstStyle/>
-          <a:p/>
           <a:p>
             <a:pPr algn="l"/>
             <a:r>
@@ -3395,7 +3392,6 @@
             <a:spAutoFit/>
           </a:bodyPr>
           <a:lstStyle/>
-          <a:p/>
           <a:p>
             <a:pPr algn="l"/>
             <a:r>
@@ -3430,7 +3426,6 @@
             <a:spAutoFit/>
           </a:bodyPr>
           <a:lstStyle/>
-          <a:p/>
           <a:p>
             <a:pPr algn="l"/>
             <a:r>
@@ -3508,7 +3503,6 @@
             <a:spAutoFit/>
           </a:bodyPr>
           <a:lstStyle/>
-          <a:p/>
           <a:p>
             <a:pPr algn="l"/>
             <a:r>
@@ -3543,7 +3537,6 @@
             <a:spAutoFit/>
           </a:bodyPr>
           <a:lstStyle/>
-          <a:p/>
           <a:p>
             <a:pPr algn="l"/>
             <a:r>
@@ -3621,7 +3614,6 @@
             <a:spAutoFit/>
           </a:bodyPr>
           <a:lstStyle/>
-          <a:p/>
           <a:p>
             <a:pPr algn="l"/>
             <a:r>
@@ -3656,7 +3648,6 @@
             <a:spAutoFit/>
           </a:bodyPr>
           <a:lstStyle/>
-          <a:p/>
           <a:p>
             <a:pPr algn="l"/>
             <a:r>
@@ -3734,7 +3725,6 @@
             <a:spAutoFit/>
           </a:bodyPr>
           <a:lstStyle/>
-          <a:p/>
           <a:p>
             <a:pPr algn="l"/>
             <a:r>
@@ -3769,7 +3759,6 @@
             <a:spAutoFit/>
           </a:bodyPr>
           <a:lstStyle/>
-          <a:p/>
           <a:p>
             <a:pPr algn="l"/>
             <a:r>
@@ -3804,7 +3793,6 @@
             <a:spAutoFit/>
           </a:bodyPr>
           <a:lstStyle/>
-          <a:p/>
           <a:p>
             <a:pPr algn="l"/>
             <a:r>
@@ -3839,7 +3827,6 @@
             <a:spAutoFit/>
           </a:bodyPr>
           <a:lstStyle/>
-          <a:p/>
           <a:p>
             <a:pPr algn="l"/>
             <a:r>
@@ -3874,7 +3861,6 @@
             <a:spAutoFit/>
           </a:bodyPr>
           <a:lstStyle/>
-          <a:p/>
           <a:p>
             <a:pPr algn="l"/>
             <a:r>
@@ -3909,7 +3895,6 @@
             <a:spAutoFit/>
           </a:bodyPr>
           <a:lstStyle/>
-          <a:p/>
           <a:p>
             <a:pPr algn="l"/>
             <a:r>
@@ -3944,7 +3929,6 @@
             <a:spAutoFit/>
           </a:bodyPr>
           <a:lstStyle/>
-          <a:p/>
           <a:p>
             <a:pPr algn="l"/>
             <a:r>
@@ -3979,7 +3963,6 @@
             <a:spAutoFit/>
           </a:bodyPr>
           <a:lstStyle/>
-          <a:p/>
           <a:p>
             <a:pPr algn="l"/>
             <a:r>
@@ -4014,7 +3997,6 @@
             <a:spAutoFit/>
           </a:bodyPr>
           <a:lstStyle/>
-          <a:p/>
           <a:p>
             <a:pPr algn="l"/>
             <a:r>
@@ -4049,7 +4031,6 @@
             <a:spAutoFit/>
           </a:bodyPr>
           <a:lstStyle/>
-          <a:p/>
           <a:p>
             <a:pPr algn="l"/>
             <a:r>
@@ -4084,7 +4065,6 @@
             <a:spAutoFit/>
           </a:bodyPr>
           <a:lstStyle/>
-          <a:p/>
           <a:p>
             <a:pPr algn="l"/>
             <a:r>
@@ -4119,7 +4099,6 @@
             <a:spAutoFit/>
           </a:bodyPr>
           <a:lstStyle/>
-          <a:p/>
           <a:p>
             <a:pPr algn="l"/>
             <a:r>
@@ -4154,7 +4133,6 @@
             <a:spAutoFit/>
           </a:bodyPr>
           <a:lstStyle/>
-          <a:p/>
           <a:p>
             <a:pPr algn="r"/>
             <a:r>
@@ -4293,7 +4271,6 @@
             <a:spAutoFit/>
           </a:bodyPr>
           <a:lstStyle/>
-          <a:p/>
           <a:p>
             <a:pPr algn="l"/>
             <a:r>
@@ -4371,7 +4348,6 @@
             <a:spAutoFit/>
           </a:bodyPr>
           <a:lstStyle/>
-          <a:p/>
           <a:p>
             <a:pPr algn="l"/>
             <a:r>
@@ -4406,7 +4382,6 @@
             <a:spAutoFit/>
           </a:bodyPr>
           <a:lstStyle/>
-          <a:p/>
           <a:p>
             <a:pPr algn="l">
               <a:spcBef>
@@ -4668,7 +4643,6 @@
             <a:spAutoFit/>
           </a:bodyPr>
           <a:lstStyle/>
-          <a:p/>
           <a:p>
             <a:pPr algn="l"/>
             <a:r>
@@ -4703,7 +4677,6 @@
             <a:spAutoFit/>
           </a:bodyPr>
           <a:lstStyle/>
-          <a:p/>
           <a:p>
             <a:pPr algn="l">
               <a:spcBef>
@@ -4924,20 +4897,19 @@
         </p:nvSpPr>
         <p:spPr>
           <a:xfrm>
-            <a:off x="411480" y="6190488"/>
-            <a:ext cx="11430000" cy="201168"/>
-          </a:xfrm>
-          <a:prstGeom prst="rect">
-            <a:avLst/>
-          </a:prstGeom>
-          <a:noFill/>
-        </p:spPr>
-        <p:txBody>
-          <a:bodyPr wrap="square">
-            <a:spAutoFit/>
-          </a:bodyPr>
-          <a:lstStyle/>
-          <a:p/>
+            <a:off x="411480" y="6108192"/>
+            <a:ext cx="11430000" cy="182880"/>
+          </a:xfrm>
+          <a:prstGeom prst="rect">
+            <a:avLst/>
+          </a:prstGeom>
+          <a:noFill/>
+        </p:spPr>
+        <p:txBody>
+          <a:bodyPr wrap="square">
+            <a:spAutoFit/>
+          </a:bodyPr>
+          <a:lstStyle/>
           <a:p>
             <a:pPr algn="ctr"/>
             <a:r>
@@ -4972,7 +4944,6 @@
             <a:spAutoFit/>
           </a:bodyPr>
           <a:lstStyle/>
-          <a:p/>
           <a:p>
             <a:pPr algn="r"/>
             <a:r>
@@ -5111,7 +5082,6 @@
             <a:spAutoFit/>
           </a:bodyPr>
           <a:lstStyle/>
-          <a:p/>
           <a:p>
             <a:pPr algn="l"/>
             <a:r>
@@ -5146,7 +5116,6 @@
             <a:spAutoFit/>
           </a:bodyPr>
           <a:lstStyle/>
-          <a:p/>
           <a:p>
             <a:pPr algn="l"/>
             <a:r>
@@ -5224,7 +5193,6 @@
             <a:spAutoFit/>
           </a:bodyPr>
           <a:lstStyle/>
-          <a:p/>
           <a:p>
             <a:pPr algn="l"/>
             <a:r>
@@ -5302,7 +5270,6 @@
             <a:spAutoFit/>
           </a:bodyPr>
           <a:lstStyle/>
-          <a:p/>
           <a:p>
             <a:pPr algn="l">
               <a:spcBef>
@@ -5534,7 +5501,6 @@
             <a:spAutoFit/>
           </a:bodyPr>
           <a:lstStyle/>
-          <a:p/>
           <a:p>
             <a:pPr algn="l"/>
             <a:r>
@@ -5612,7 +5578,6 @@
             <a:spAutoFit/>
           </a:bodyPr>
           <a:lstStyle/>
-          <a:p/>
           <a:p>
             <a:pPr algn="l">
               <a:spcBef>
@@ -5829,7 +5794,6 @@
             <a:spAutoFit/>
           </a:bodyPr>
           <a:lstStyle/>
-          <a:p/>
           <a:p>
             <a:pPr algn="l"/>
             <a:r>
@@ -5864,7 +5828,6 @@
             <a:spAutoFit/>
           </a:bodyPr>
           <a:lstStyle/>
-          <a:p/>
           <a:p>
             <a:pPr algn="l"/>
             <a:r>
@@ -5899,7 +5862,6 @@
             <a:spAutoFit/>
           </a:bodyPr>
           <a:lstStyle/>
-          <a:p/>
           <a:p>
             <a:pPr algn="l"/>
             <a:r>
@@ -5934,7 +5896,6 @@
             <a:spAutoFit/>
           </a:bodyPr>
           <a:lstStyle/>
-          <a:p/>
           <a:p>
             <a:pPr algn="l"/>
             <a:r>
@@ -5969,7 +5930,6 @@
             <a:spAutoFit/>
           </a:bodyPr>
           <a:lstStyle/>
-          <a:p/>
           <a:p>
             <a:pPr algn="r"/>
             <a:r>
@@ -6108,7 +6068,6 @@
             <a:spAutoFit/>
           </a:bodyPr>
           <a:lstStyle/>
-          <a:p/>
           <a:p>
             <a:pPr algn="l"/>
             <a:r>
@@ -6143,7 +6102,6 @@
             <a:spAutoFit/>
           </a:bodyPr>
           <a:lstStyle/>
-          <a:p/>
           <a:p>
             <a:pPr algn="l"/>
             <a:r>
@@ -6221,7 +6179,6 @@
             <a:spAutoFit/>
           </a:bodyPr>
           <a:lstStyle/>
-          <a:p/>
           <a:p>
             <a:pPr algn="l"/>
             <a:r>
@@ -6299,7 +6256,6 @@
             <a:spAutoFit/>
           </a:bodyPr>
           <a:lstStyle/>
-          <a:p/>
           <a:p>
             <a:pPr algn="l">
               <a:spcBef>
@@ -6441,7 +6397,6 @@
             <a:spAutoFit/>
           </a:bodyPr>
           <a:lstStyle/>
-          <a:p/>
           <a:p>
             <a:pPr algn="l"/>
             <a:r>
@@ -6519,7 +6474,6 @@
             <a:spAutoFit/>
           </a:bodyPr>
           <a:lstStyle/>
-          <a:p/>
           <a:p>
             <a:pPr algn="l">
               <a:spcBef>
@@ -6661,7 +6615,6 @@
             <a:spAutoFit/>
           </a:bodyPr>
           <a:lstStyle/>
-          <a:p/>
           <a:p>
             <a:pPr algn="l"/>
             <a:r>
@@ -6739,7 +6692,6 @@
             <a:spAutoFit/>
           </a:bodyPr>
           <a:lstStyle/>
-          <a:p/>
           <a:p>
             <a:pPr algn="l">
               <a:spcBef>
@@ -6881,7 +6833,6 @@
             <a:spAutoFit/>
           </a:bodyPr>
           <a:lstStyle/>
-          <a:p/>
           <a:p>
             <a:pPr algn="l"/>
             <a:r>
@@ -6959,7 +6910,6 @@
             <a:spAutoFit/>
           </a:bodyPr>
           <a:lstStyle/>
-          <a:p/>
           <a:p>
             <a:pPr algn="l">
               <a:spcBef>
@@ -7101,7 +7051,6 @@
             <a:spAutoFit/>
           </a:bodyPr>
           <a:lstStyle/>
-          <a:p/>
           <a:p>
             <a:pPr algn="l"/>
             <a:r>
@@ -7136,7 +7085,6 @@
             <a:spAutoFit/>
           </a:bodyPr>
           <a:lstStyle/>
-          <a:p/>
           <a:p>
             <a:pPr algn="l"/>
             <a:r>
@@ -7214,7 +7162,6 @@
             <a:spAutoFit/>
           </a:bodyPr>
           <a:lstStyle/>
-          <a:p/>
           <a:p>
             <a:pPr algn="l"/>
             <a:r>
@@ -7292,7 +7239,6 @@
             <a:spAutoFit/>
           </a:bodyPr>
           <a:lstStyle/>
-          <a:p/>
           <a:p>
             <a:pPr algn="l"/>
             <a:r>
@@ -7327,7 +7273,6 @@
             <a:spAutoFit/>
           </a:bodyPr>
           <a:lstStyle/>
-          <a:p/>
           <a:p>
             <a:pPr algn="l"/>
             <a:r>
@@ -7362,7 +7307,6 @@
             <a:spAutoFit/>
           </a:bodyPr>
           <a:lstStyle/>
-          <a:p/>
           <a:p>
             <a:pPr algn="l"/>
             <a:r>
@@ -7440,7 +7384,6 @@
             <a:spAutoFit/>
           </a:bodyPr>
           <a:lstStyle/>
-          <a:p/>
           <a:p>
             <a:pPr algn="l"/>
             <a:r>
@@ -7475,7 +7418,6 @@
             <a:spAutoFit/>
           </a:bodyPr>
           <a:lstStyle/>
-          <a:p/>
           <a:p>
             <a:pPr algn="l"/>
             <a:r>
@@ -7510,7 +7452,6 @@
             <a:spAutoFit/>
           </a:bodyPr>
           <a:lstStyle/>
-          <a:p/>
           <a:p>
             <a:pPr algn="l"/>
             <a:r>
@@ -7588,7 +7529,6 @@
             <a:spAutoFit/>
           </a:bodyPr>
           <a:lstStyle/>
-          <a:p/>
           <a:p>
             <a:pPr algn="l"/>
             <a:r>
@@ -7623,7 +7563,6 @@
             <a:spAutoFit/>
           </a:bodyPr>
           <a:lstStyle/>
-          <a:p/>
           <a:p>
             <a:pPr algn="l"/>
             <a:r>
@@ -7658,7 +7597,6 @@
             <a:spAutoFit/>
           </a:bodyPr>
           <a:lstStyle/>
-          <a:p/>
           <a:p>
             <a:pPr algn="l"/>
             <a:r>
@@ -7736,7 +7674,6 @@
             <a:spAutoFit/>
           </a:bodyPr>
           <a:lstStyle/>
-          <a:p/>
           <a:p>
             <a:pPr algn="l"/>
             <a:r>
@@ -7771,7 +7708,6 @@
             <a:spAutoFit/>
           </a:bodyPr>
           <a:lstStyle/>
-          <a:p/>
           <a:p>
             <a:pPr algn="l"/>
             <a:r>
@@ -7806,7 +7742,6 @@
             <a:spAutoFit/>
           </a:bodyPr>
           <a:lstStyle/>
-          <a:p/>
           <a:p>
             <a:pPr algn="l"/>
             <a:r>
@@ -7884,7 +7819,6 @@
             <a:spAutoFit/>
           </a:bodyPr>
           <a:lstStyle/>
-          <a:p/>
           <a:p>
             <a:pPr algn="l"/>
             <a:r>
@@ -7919,7 +7853,6 @@
             <a:spAutoFit/>
           </a:bodyPr>
           <a:lstStyle/>
-          <a:p/>
           <a:p>
             <a:pPr algn="l"/>
             <a:r>
@@ -7954,7 +7887,6 @@
             <a:spAutoFit/>
           </a:bodyPr>
           <a:lstStyle/>
-          <a:p/>
           <a:p>
             <a:pPr algn="l"/>
             <a:r>
@@ -7989,7 +7921,6 @@
             <a:spAutoFit/>
           </a:bodyPr>
           <a:lstStyle/>
-          <a:p/>
           <a:p>
             <a:pPr algn="l"/>
             <a:r>
@@ -8024,7 +7955,6 @@
             <a:spAutoFit/>
           </a:bodyPr>
           <a:lstStyle/>
-          <a:p/>
           <a:p>
             <a:pPr algn="r"/>
             <a:r>
@@ -8163,7 +8093,6 @@
             <a:spAutoFit/>
           </a:bodyPr>
           <a:lstStyle/>
-          <a:p/>
           <a:p>
             <a:pPr algn="l"/>
             <a:r>
@@ -8198,7 +8127,6 @@
             <a:spAutoFit/>
           </a:bodyPr>
           <a:lstStyle/>
-          <a:p/>
           <a:p>
             <a:pPr algn="l"/>
             <a:r>
@@ -8276,7 +8204,6 @@
             <a:spAutoFit/>
           </a:bodyPr>
           <a:lstStyle/>
-          <a:p/>
           <a:p>
             <a:pPr algn="l"/>
             <a:r>
@@ -8354,7 +8281,6 @@
             <a:spAutoFit/>
           </a:bodyPr>
           <a:lstStyle/>
-          <a:p/>
           <a:p>
             <a:pPr algn="l">
               <a:spcBef>
@@ -8438,7 +8364,6 @@
             <a:spAutoFit/>
           </a:bodyPr>
           <a:lstStyle/>
-          <a:p/>
           <a:p>
             <a:pPr algn="l"/>
             <a:r>
@@ -8516,7 +8441,6 @@
             <a:spAutoFit/>
           </a:bodyPr>
           <a:lstStyle/>
-          <a:p/>
           <a:p>
             <a:pPr algn="l"/>
             <a:r>
@@ -8594,7 +8518,6 @@
             <a:spAutoFit/>
           </a:bodyPr>
           <a:lstStyle/>
-          <a:p/>
           <a:p>
             <a:pPr algn="l">
               <a:spcBef>
@@ -8678,7 +8601,6 @@
             <a:spAutoFit/>
           </a:bodyPr>
           <a:lstStyle/>
-          <a:p/>
           <a:p>
             <a:pPr algn="l"/>
             <a:r>
@@ -8756,7 +8678,6 @@
             <a:spAutoFit/>
           </a:bodyPr>
           <a:lstStyle/>
-          <a:p/>
           <a:p>
             <a:pPr algn="l"/>
             <a:r>
@@ -8834,7 +8755,6 @@
             <a:spAutoFit/>
           </a:bodyPr>
           <a:lstStyle/>
-          <a:p/>
           <a:p>
             <a:pPr algn="l">
               <a:spcBef>
@@ -8918,7 +8838,6 @@
             <a:spAutoFit/>
           </a:bodyPr>
           <a:lstStyle/>
-          <a:p/>
           <a:p>
             <a:pPr algn="l"/>
             <a:r>
@@ -8996,7 +8915,6 @@
             <a:spAutoFit/>
           </a:bodyPr>
           <a:lstStyle/>
-          <a:p/>
           <a:p>
             <a:pPr algn="l"/>
             <a:r>
@@ -9074,7 +8992,6 @@
             <a:spAutoFit/>
           </a:bodyPr>
           <a:lstStyle/>
-          <a:p/>
           <a:p>
             <a:pPr algn="l">
               <a:spcBef>
@@ -9158,7 +9075,6 @@
             <a:spAutoFit/>
           </a:bodyPr>
           <a:lstStyle/>
-          <a:p/>
           <a:p>
             <a:pPr algn="l"/>
             <a:r>
@@ -9236,7 +9152,6 @@
             <a:spAutoFit/>
           </a:bodyPr>
           <a:lstStyle/>
-          <a:p/>
           <a:p>
             <a:pPr algn="l"/>
             <a:r>
@@ -9314,7 +9229,6 @@
             <a:spAutoFit/>
           </a:bodyPr>
           <a:lstStyle/>
-          <a:p/>
           <a:p>
             <a:pPr algn="l">
               <a:spcBef>
@@ -9441,7 +9355,6 @@
             <a:spAutoFit/>
           </a:bodyPr>
           <a:lstStyle/>
-          <a:p/>
           <a:p>
             <a:pPr algn="l"/>
             <a:r>
@@ -9476,7 +9389,6 @@
             <a:spAutoFit/>
           </a:bodyPr>
           <a:lstStyle/>
-          <a:p/>
           <a:p>
             <a:pPr algn="l">
               <a:spcBef>
@@ -9648,7 +9560,6 @@
             <a:spAutoFit/>
           </a:bodyPr>
           <a:lstStyle/>
-          <a:p/>
           <a:p>
             <a:pPr algn="l"/>
             <a:r>
@@ -9683,7 +9594,6 @@
             <a:spAutoFit/>
           </a:bodyPr>
           <a:lstStyle/>
-          <a:p/>
           <a:p>
             <a:pPr algn="l">
               <a:spcBef>
@@ -9812,7 +9722,6 @@
             <a:spAutoFit/>
           </a:bodyPr>
           <a:lstStyle/>
-          <a:p/>
           <a:p>
             <a:pPr algn="r"/>
             <a:r>
@@ -9951,7 +9860,6 @@
             <a:spAutoFit/>
           </a:bodyPr>
           <a:lstStyle/>
-          <a:p/>
           <a:p>
             <a:pPr algn="l"/>
             <a:r>
@@ -9986,7 +9894,6 @@
             <a:spAutoFit/>
           </a:bodyPr>
           <a:lstStyle/>
-          <a:p/>
           <a:p>
             <a:pPr algn="l"/>
             <a:r>
@@ -10064,7 +9971,6 @@
             <a:spAutoFit/>
           </a:bodyPr>
           <a:lstStyle/>
-          <a:p/>
           <a:p>
             <a:pPr algn="l"/>
             <a:r>
@@ -10185,7 +10091,6 @@
             <a:spAutoFit/>
           </a:bodyPr>
           <a:lstStyle/>
-          <a:p/>
           <a:p>
             <a:pPr algn="l"/>
             <a:r>
@@ -10220,7 +10125,6 @@
             <a:spAutoFit/>
           </a:bodyPr>
           <a:lstStyle/>
-          <a:p/>
           <a:p>
             <a:pPr algn="ctr"/>
             <a:r>
@@ -10255,7 +10159,6 @@
             <a:spAutoFit/>
           </a:bodyPr>
           <a:lstStyle/>
-          <a:p/>
           <a:p>
             <a:pPr algn="l"/>
             <a:r>
@@ -10290,7 +10193,6 @@
             <a:spAutoFit/>
           </a:bodyPr>
           <a:lstStyle/>
-          <a:p/>
           <a:p>
             <a:pPr algn="l"/>
             <a:r>
@@ -10325,7 +10227,6 @@
             <a:spAutoFit/>
           </a:bodyPr>
           <a:lstStyle/>
-          <a:p/>
           <a:p>
             <a:pPr algn="l"/>
             <a:r>
@@ -10446,7 +10347,6 @@
             <a:spAutoFit/>
           </a:bodyPr>
           <a:lstStyle/>
-          <a:p/>
           <a:p>
             <a:pPr algn="l"/>
             <a:r>
@@ -10481,7 +10381,6 @@
             <a:spAutoFit/>
           </a:bodyPr>
           <a:lstStyle/>
-          <a:p/>
           <a:p>
             <a:pPr algn="ctr"/>
             <a:r>
@@ -10516,7 +10415,6 @@
             <a:spAutoFit/>
           </a:bodyPr>
           <a:lstStyle/>
-          <a:p/>
           <a:p>
             <a:pPr algn="l"/>
             <a:r>
@@ -10551,7 +10449,6 @@
             <a:spAutoFit/>
           </a:bodyPr>
           <a:lstStyle/>
-          <a:p/>
           <a:p>
             <a:pPr algn="l"/>
             <a:r>
@@ -10586,7 +10483,6 @@
             <a:spAutoFit/>
           </a:bodyPr>
           <a:lstStyle/>
-          <a:p/>
           <a:p>
             <a:pPr algn="l"/>
             <a:r>
@@ -10707,7 +10603,6 @@
             <a:spAutoFit/>
           </a:bodyPr>
           <a:lstStyle/>
-          <a:p/>
           <a:p>
             <a:pPr algn="l"/>
             <a:r>
@@ -10742,7 +10637,6 @@
             <a:spAutoFit/>
           </a:bodyPr>
           <a:lstStyle/>
-          <a:p/>
           <a:p>
             <a:pPr algn="ctr"/>
             <a:r>
@@ -10777,7 +10671,6 @@
             <a:spAutoFit/>
           </a:bodyPr>
           <a:lstStyle/>
-          <a:p/>
           <a:p>
             <a:pPr algn="l"/>
             <a:r>
@@ -10812,7 +10705,6 @@
             <a:spAutoFit/>
           </a:bodyPr>
           <a:lstStyle/>
-          <a:p/>
           <a:p>
             <a:pPr algn="l"/>
             <a:r>
@@ -10847,7 +10739,6 @@
             <a:spAutoFit/>
           </a:bodyPr>
           <a:lstStyle/>
-          <a:p/>
           <a:p>
             <a:pPr algn="l"/>
             <a:r>
@@ -10925,7 +10816,6 @@
             <a:spAutoFit/>
           </a:bodyPr>
           <a:lstStyle/>
-          <a:p/>
           <a:p>
             <a:pPr algn="l"/>
             <a:r>
@@ -10960,7 +10850,6 @@
             <a:spAutoFit/>
           </a:bodyPr>
           <a:lstStyle/>
-          <a:p/>
           <a:p>
             <a:pPr algn="l">
               <a:spcBef>
@@ -11102,7 +10991,6 @@
             <a:spAutoFit/>
           </a:bodyPr>
           <a:lstStyle/>
-          <a:p/>
           <a:p>
             <a:pPr algn="l"/>
             <a:r>
@@ -11137,7 +11025,6 @@
             <a:spAutoFit/>
           </a:bodyPr>
           <a:lstStyle/>
-          <a:p/>
           <a:p>
             <a:pPr algn="l">
               <a:spcBef>
@@ -11279,7 +11166,6 @@
             <a:spAutoFit/>
           </a:bodyPr>
           <a:lstStyle/>
-          <a:p/>
           <a:p>
             <a:pPr algn="l"/>
             <a:r>
@@ -11357,7 +11243,6 @@
             <a:spAutoFit/>
           </a:bodyPr>
           <a:lstStyle/>
-          <a:p/>
           <a:p>
             <a:pPr algn="l">
               <a:spcBef>
@@ -11514,7 +11399,6 @@
             <a:spAutoFit/>
           </a:bodyPr>
           <a:lstStyle/>
-          <a:p/>
           <a:p>
             <a:pPr algn="l"/>
             <a:r>
@@ -11592,7 +11476,6 @@
             <a:spAutoFit/>
           </a:bodyPr>
           <a:lstStyle/>
-          <a:p/>
           <a:p>
             <a:pPr algn="l">
               <a:spcBef>
@@ -11749,7 +11632,6 @@
             <a:spAutoFit/>
           </a:bodyPr>
           <a:lstStyle/>
-          <a:p/>
           <a:p>
             <a:pPr algn="l"/>
             <a:r>
@@ -11827,7 +11709,6 @@
             <a:spAutoFit/>
           </a:bodyPr>
           <a:lstStyle/>
-          <a:p/>
           <a:p>
             <a:pPr algn="l">
               <a:spcBef>
@@ -11941,7 +11822,6 @@
             <a:spAutoFit/>
           </a:bodyPr>
           <a:lstStyle/>
-          <a:p/>
           <a:p>
             <a:pPr algn="r"/>
             <a:r>
@@ -12080,7 +11960,6 @@
             <a:spAutoFit/>
           </a:bodyPr>
           <a:lstStyle/>
-          <a:p/>
           <a:p>
             <a:pPr algn="l"/>
             <a:r>
@@ -12115,7 +11994,6 @@
             <a:spAutoFit/>
           </a:bodyPr>
           <a:lstStyle/>
-          <a:p/>
           <a:p>
             <a:pPr algn="l"/>
             <a:r>
@@ -12193,7 +12071,6 @@
             <a:spAutoFit/>
           </a:bodyPr>
           <a:lstStyle/>
-          <a:p/>
           <a:p>
             <a:pPr algn="l"/>
             <a:r>
@@ -12228,7 +12105,6 @@
             <a:spAutoFit/>
           </a:bodyPr>
           <a:lstStyle/>
-          <a:p/>
           <a:p>
             <a:pPr algn="l">
               <a:spcBef>
@@ -12520,7 +12396,6 @@
             <a:spAutoFit/>
           </a:bodyPr>
           <a:lstStyle/>
-          <a:p/>
           <a:p>
             <a:pPr algn="l"/>
             <a:r>
@@ -12598,7 +12473,6 @@
             <a:spAutoFit/>
           </a:bodyPr>
           <a:lstStyle/>
-          <a:p/>
           <a:p>
             <a:pPr algn="l">
               <a:spcBef>
@@ -12785,7 +12659,6 @@
             <a:spAutoFit/>
           </a:bodyPr>
           <a:lstStyle/>
-          <a:p/>
           <a:p>
             <a:pPr algn="l"/>
             <a:r>
@@ -12863,7 +12736,6 @@
             <a:spAutoFit/>
           </a:bodyPr>
           <a:lstStyle/>
-          <a:p/>
           <a:p>
             <a:pPr algn="l"/>
             <a:r>
@@ -12941,7 +12813,6 @@
             <a:spAutoFit/>
           </a:bodyPr>
           <a:lstStyle/>
-          <a:p/>
           <a:p>
             <a:pPr algn="l"/>
             <a:r>
@@ -12976,7 +12847,6 @@
             <a:spAutoFit/>
           </a:bodyPr>
           <a:lstStyle/>
-          <a:p/>
           <a:p>
             <a:pPr algn="l"/>
             <a:r>
@@ -13011,7 +12881,6 @@
             <a:spAutoFit/>
           </a:bodyPr>
           <a:lstStyle/>
-          <a:p/>
           <a:p>
             <a:pPr algn="l"/>
             <a:r>
@@ -13046,7 +12915,6 @@
             <a:spAutoFit/>
           </a:bodyPr>
           <a:lstStyle/>
-          <a:p/>
           <a:p>
             <a:pPr algn="l"/>
             <a:r>
@@ -13081,7 +12949,6 @@
             <a:spAutoFit/>
           </a:bodyPr>
           <a:lstStyle/>
-          <a:p/>
           <a:p>
             <a:pPr algn="l"/>
             <a:r>
@@ -13159,7 +13026,6 @@
             <a:spAutoFit/>
           </a:bodyPr>
           <a:lstStyle/>
-          <a:p/>
           <a:p>
             <a:pPr algn="l"/>
             <a:r>
@@ -13194,7 +13060,6 @@
             <a:spAutoFit/>
           </a:bodyPr>
           <a:lstStyle/>
-          <a:p/>
           <a:p>
             <a:pPr algn="l"/>
             <a:r>
@@ -13229,7 +13094,6 @@
             <a:spAutoFit/>
           </a:bodyPr>
           <a:lstStyle/>
-          <a:p/>
           <a:p>
             <a:pPr algn="l"/>
             <a:r>
@@ -13264,7 +13128,6 @@
             <a:spAutoFit/>
           </a:bodyPr>
           <a:lstStyle/>
-          <a:p/>
           <a:p>
             <a:pPr algn="l"/>
             <a:r>
@@ -13299,7 +13162,6 @@
             <a:spAutoFit/>
           </a:bodyPr>
           <a:lstStyle/>
-          <a:p/>
           <a:p>
             <a:pPr algn="l"/>
             <a:r>
@@ -13377,7 +13239,6 @@
             <a:spAutoFit/>
           </a:bodyPr>
           <a:lstStyle/>
-          <a:p/>
           <a:p>
             <a:pPr algn="l"/>
             <a:r>
@@ -13412,7 +13273,6 @@
             <a:spAutoFit/>
           </a:bodyPr>
           <a:lstStyle/>
-          <a:p/>
           <a:p>
             <a:pPr algn="l"/>
             <a:r>
@@ -13447,7 +13307,6 @@
             <a:spAutoFit/>
           </a:bodyPr>
           <a:lstStyle/>
-          <a:p/>
           <a:p>
             <a:pPr algn="l"/>
             <a:r>
@@ -13482,7 +13341,6 @@
             <a:spAutoFit/>
           </a:bodyPr>
           <a:lstStyle/>
-          <a:p/>
           <a:p>
             <a:pPr algn="l"/>
             <a:r>
@@ -13517,7 +13375,6 @@
             <a:spAutoFit/>
           </a:bodyPr>
           <a:lstStyle/>
-          <a:p/>
           <a:p>
             <a:pPr algn="l"/>
             <a:r>
@@ -13595,7 +13452,6 @@
             <a:spAutoFit/>
           </a:bodyPr>
           <a:lstStyle/>
-          <a:p/>
           <a:p>
             <a:pPr algn="l"/>
             <a:r>
@@ -13630,7 +13486,6 @@
             <a:spAutoFit/>
           </a:bodyPr>
           <a:lstStyle/>
-          <a:p/>
           <a:p>
             <a:pPr algn="l"/>
             <a:r>
@@ -13665,7 +13520,6 @@
             <a:spAutoFit/>
           </a:bodyPr>
           <a:lstStyle/>
-          <a:p/>
           <a:p>
             <a:pPr algn="l"/>
             <a:r>
@@ -13700,7 +13554,6 @@
             <a:spAutoFit/>
           </a:bodyPr>
           <a:lstStyle/>
-          <a:p/>
           <a:p>
             <a:pPr algn="l"/>
             <a:r>
@@ -13735,7 +13588,6 @@
             <a:spAutoFit/>
           </a:bodyPr>
           <a:lstStyle/>
-          <a:p/>
           <a:p>
             <a:pPr algn="l"/>
             <a:r>
@@ -13770,7 +13622,6 @@
             <a:spAutoFit/>
           </a:bodyPr>
           <a:lstStyle/>
-          <a:p/>
           <a:p>
             <a:pPr algn="r"/>
             <a:r>
@@ -13909,7 +13760,6 @@
             <a:spAutoFit/>
           </a:bodyPr>
           <a:lstStyle/>
-          <a:p/>
           <a:p>
             <a:pPr algn="l"/>
             <a:r>
@@ -13944,7 +13794,6 @@
             <a:spAutoFit/>
           </a:bodyPr>
           <a:lstStyle/>
-          <a:p/>
           <a:p>
             <a:pPr algn="l"/>
             <a:r>
@@ -14022,7 +13871,6 @@
             <a:spAutoFit/>
           </a:bodyPr>
           <a:lstStyle/>
-          <a:p/>
           <a:p>
             <a:pPr algn="l"/>
             <a:r>
@@ -14057,7 +13905,6 @@
             <a:spAutoFit/>
           </a:bodyPr>
           <a:lstStyle/>
-          <a:p/>
           <a:p>
             <a:pPr algn="l">
               <a:spcBef>
@@ -14214,7 +14061,6 @@
             <a:spAutoFit/>
           </a:bodyPr>
           <a:lstStyle/>
-          <a:p/>
           <a:p>
             <a:pPr algn="l"/>
             <a:r>
@@ -14292,7 +14138,6 @@
             <a:spAutoFit/>
           </a:bodyPr>
           <a:lstStyle/>
-          <a:p/>
           <a:p>
             <a:pPr algn="l">
               <a:spcBef>
@@ -14479,7 +14324,6 @@
             <a:spAutoFit/>
           </a:bodyPr>
           <a:lstStyle/>
-          <a:p/>
           <a:p>
             <a:pPr algn="l"/>
             <a:r>
@@ -14557,7 +14401,6 @@
             <a:spAutoFit/>
           </a:bodyPr>
           <a:lstStyle/>
-          <a:p/>
           <a:p>
             <a:pPr algn="l">
               <a:spcBef>
@@ -14759,7 +14602,6 @@
             <a:spAutoFit/>
           </a:bodyPr>
           <a:lstStyle/>
-          <a:p/>
           <a:p>
             <a:pPr algn="l"/>
             <a:r>
@@ -14837,7 +14679,6 @@
             <a:spAutoFit/>
           </a:bodyPr>
           <a:lstStyle/>
-          <a:p/>
           <a:p>
             <a:pPr algn="l">
               <a:spcBef>
@@ -14981,7 +14822,6 @@
             <a:spAutoFit/>
           </a:bodyPr>
           <a:lstStyle/>
-          <a:p/>
           <a:p>
             <a:pPr algn="r"/>
             <a:r>
@@ -15120,7 +14960,6 @@
             <a:spAutoFit/>
           </a:bodyPr>
           <a:lstStyle/>
-          <a:p/>
           <a:p>
             <a:pPr algn="l"/>
             <a:r>
@@ -15155,7 +14994,6 @@
             <a:spAutoFit/>
           </a:bodyPr>
           <a:lstStyle/>
-          <a:p/>
           <a:p>
             <a:pPr algn="l"/>
             <a:r>
@@ -15233,7 +15071,6 @@
             <a:spAutoFit/>
           </a:bodyPr>
           <a:lstStyle/>
-          <a:p/>
           <a:p>
             <a:pPr algn="l"/>
             <a:r>
@@ -15311,7 +15148,6 @@
             <a:spAutoFit/>
           </a:bodyPr>
           <a:lstStyle/>
-          <a:p/>
           <a:p>
             <a:pPr algn="l"/>
             <a:r>
@@ -15346,7 +15182,6 @@
             <a:spAutoFit/>
           </a:bodyPr>
           <a:lstStyle/>
-          <a:p/>
           <a:p>
             <a:pPr algn="l"/>
             <a:r>
@@ -15381,7 +15216,6 @@
             <a:spAutoFit/>
           </a:bodyPr>
           <a:lstStyle/>
-          <a:p/>
           <a:p>
             <a:pPr algn="l"/>
             <a:r>
@@ -15459,7 +15293,6 @@
             <a:spAutoFit/>
           </a:bodyPr>
           <a:lstStyle/>
-          <a:p/>
           <a:p>
             <a:pPr algn="l"/>
             <a:r>
@@ -15494,7 +15327,6 @@
             <a:spAutoFit/>
           </a:bodyPr>
           <a:lstStyle/>
-          <a:p/>
           <a:p>
             <a:pPr algn="l"/>
             <a:r>
@@ -15529,7 +15361,6 @@
             <a:spAutoFit/>
           </a:bodyPr>
           <a:lstStyle/>
-          <a:p/>
           <a:p>
             <a:pPr algn="l"/>
             <a:r>
@@ -15607,7 +15438,6 @@
             <a:spAutoFit/>
           </a:bodyPr>
           <a:lstStyle/>
-          <a:p/>
           <a:p>
             <a:pPr algn="l"/>
             <a:r>
@@ -15642,7 +15472,6 @@
             <a:spAutoFit/>
           </a:bodyPr>
           <a:lstStyle/>
-          <a:p/>
           <a:p>
             <a:pPr algn="l"/>
             <a:r>
@@ -15677,7 +15506,6 @@
             <a:spAutoFit/>
           </a:bodyPr>
           <a:lstStyle/>
-          <a:p/>
           <a:p>
             <a:pPr algn="l"/>
             <a:r>
@@ -15755,7 +15583,6 @@
             <a:spAutoFit/>
           </a:bodyPr>
           <a:lstStyle/>
-          <a:p/>
           <a:p>
             <a:pPr algn="l"/>
             <a:r>
@@ -15833,7 +15660,6 @@
             <a:spAutoFit/>
           </a:bodyPr>
           <a:lstStyle/>
-          <a:p/>
           <a:p>
             <a:pPr algn="l"/>
             <a:r>
@@ -15868,7 +15694,6 @@
             <a:spAutoFit/>
           </a:bodyPr>
           <a:lstStyle/>
-          <a:p/>
           <a:p>
             <a:pPr algn="l">
               <a:spcBef>
@@ -16130,7 +15955,6 @@
             <a:spAutoFit/>
           </a:bodyPr>
           <a:lstStyle/>
-          <a:p/>
           <a:p>
             <a:pPr algn="l"/>
             <a:r>
@@ -16165,7 +15989,6 @@
             <a:spAutoFit/>
           </a:bodyPr>
           <a:lstStyle/>
-          <a:p/>
           <a:p>
             <a:pPr algn="l">
               <a:spcBef>
@@ -16427,7 +16250,6 @@
             <a:spAutoFit/>
           </a:bodyPr>
           <a:lstStyle/>
-          <a:p/>
           <a:p>
             <a:pPr algn="ctr"/>
             <a:r>
@@ -16462,7 +16284,6 @@
             <a:spAutoFit/>
           </a:bodyPr>
           <a:lstStyle/>
-          <a:p/>
           <a:p>
             <a:pPr algn="r"/>
             <a:r>
@@ -16601,7 +16422,6 @@
             <a:spAutoFit/>
           </a:bodyPr>
           <a:lstStyle/>
-          <a:p/>
           <a:p>
             <a:pPr algn="l"/>
             <a:r>
@@ -16636,7 +16456,6 @@
             <a:spAutoFit/>
           </a:bodyPr>
           <a:lstStyle/>
-          <a:p/>
           <a:p>
             <a:pPr algn="l"/>
             <a:r>
@@ -16714,7 +16533,6 @@
             <a:spAutoFit/>
           </a:bodyPr>
           <a:lstStyle/>
-          <a:p/>
           <a:p>
             <a:pPr algn="l"/>
             <a:r>
@@ -16792,7 +16610,6 @@
             <a:spAutoFit/>
           </a:bodyPr>
           <a:lstStyle/>
-          <a:p/>
           <a:p>
             <a:pPr algn="l">
               <a:spcBef>
@@ -16934,7 +16751,6 @@
             <a:spAutoFit/>
           </a:bodyPr>
           <a:lstStyle/>
-          <a:p/>
           <a:p>
             <a:pPr algn="l"/>
             <a:r>
@@ -17012,7 +16828,6 @@
             <a:spAutoFit/>
           </a:bodyPr>
           <a:lstStyle/>
-          <a:p/>
           <a:p>
             <a:pPr algn="l">
               <a:spcBef>
@@ -17154,7 +16969,6 @@
             <a:spAutoFit/>
           </a:bodyPr>
           <a:lstStyle/>
-          <a:p/>
           <a:p>
             <a:pPr algn="l"/>
             <a:r>
@@ -17232,7 +17046,6 @@
             <a:spAutoFit/>
           </a:bodyPr>
           <a:lstStyle/>
-          <a:p/>
           <a:p>
             <a:pPr algn="l">
               <a:spcBef>
@@ -17374,7 +17187,6 @@
             <a:spAutoFit/>
           </a:bodyPr>
           <a:lstStyle/>
-          <a:p/>
           <a:p>
             <a:pPr algn="l"/>
             <a:r>
@@ -17452,7 +17264,6 @@
             <a:spAutoFit/>
           </a:bodyPr>
           <a:lstStyle/>
-          <a:p/>
           <a:p>
             <a:pPr algn="l">
               <a:spcBef>
@@ -17594,7 +17405,6 @@
             <a:spAutoFit/>
           </a:bodyPr>
           <a:lstStyle/>
-          <a:p/>
           <a:p>
             <a:pPr algn="l"/>
             <a:r>
@@ -17672,7 +17482,6 @@
             <a:spAutoFit/>
           </a:bodyPr>
           <a:lstStyle/>
-          <a:p/>
           <a:p>
             <a:pPr algn="l"/>
             <a:r>
@@ -17707,7 +17516,6 @@
             <a:spAutoFit/>
           </a:bodyPr>
           <a:lstStyle/>
-          <a:p/>
           <a:p>
             <a:pPr algn="l"/>
             <a:r>
@@ -17742,7 +17550,6 @@
             <a:spAutoFit/>
           </a:bodyPr>
           <a:lstStyle/>
-          <a:p/>
           <a:p>
             <a:pPr algn="l"/>
             <a:r>
@@ -17777,7 +17584,6 @@
             <a:spAutoFit/>
           </a:bodyPr>
           <a:lstStyle/>
-          <a:p/>
           <a:p>
             <a:pPr algn="l"/>
             <a:r>
@@ -17812,7 +17618,6 @@
             <a:spAutoFit/>
           </a:bodyPr>
           <a:lstStyle/>
-          <a:p/>
           <a:p>
             <a:pPr algn="l"/>
             <a:r>
@@ -17890,7 +17695,6 @@
             <a:spAutoFit/>
           </a:bodyPr>
           <a:lstStyle/>
-          <a:p/>
           <a:p>
             <a:pPr algn="l"/>
             <a:r>
@@ -17925,7 +17729,6 @@
             <a:spAutoFit/>
           </a:bodyPr>
           <a:lstStyle/>
-          <a:p/>
           <a:p>
             <a:pPr algn="l"/>
             <a:r>
@@ -17960,7 +17763,6 @@
             <a:spAutoFit/>
           </a:bodyPr>
           <a:lstStyle/>
-          <a:p/>
           <a:p>
             <a:pPr algn="l"/>
             <a:r>
@@ -17995,7 +17797,6 @@
             <a:spAutoFit/>
           </a:bodyPr>
           <a:lstStyle/>
-          <a:p/>
           <a:p>
             <a:pPr algn="l"/>
             <a:r>
@@ -18030,7 +17831,6 @@
             <a:spAutoFit/>
           </a:bodyPr>
           <a:lstStyle/>
-          <a:p/>
           <a:p>
             <a:pPr algn="l"/>
             <a:r>
@@ -18108,7 +17908,6 @@
             <a:spAutoFit/>
           </a:bodyPr>
           <a:lstStyle/>
-          <a:p/>
           <a:p>
             <a:pPr algn="l"/>
             <a:r>
@@ -18143,7 +17942,6 @@
             <a:spAutoFit/>
           </a:bodyPr>
           <a:lstStyle/>
-          <a:p/>
           <a:p>
             <a:pPr algn="l"/>
             <a:r>
@@ -18178,7 +17976,6 @@
             <a:spAutoFit/>
           </a:bodyPr>
           <a:lstStyle/>
-          <a:p/>
           <a:p>
             <a:pPr algn="l"/>
             <a:r>
@@ -18213,7 +18010,6 @@
             <a:spAutoFit/>
           </a:bodyPr>
           <a:lstStyle/>
-          <a:p/>
           <a:p>
             <a:pPr algn="l"/>
             <a:r>
@@ -18248,7 +18044,6 @@
             <a:spAutoFit/>
           </a:bodyPr>
           <a:lstStyle/>
-          <a:p/>
           <a:p>
             <a:pPr algn="l"/>
             <a:r>
@@ -18326,7 +18121,6 @@
             <a:spAutoFit/>
           </a:bodyPr>
           <a:lstStyle/>
-          <a:p/>
           <a:p>
             <a:pPr algn="l"/>
             <a:r>
@@ -18361,7 +18155,6 @@
             <a:spAutoFit/>
           </a:bodyPr>
           <a:lstStyle/>
-          <a:p/>
           <a:p>
             <a:pPr algn="l"/>
             <a:r>
@@ -18396,7 +18189,6 @@
             <a:spAutoFit/>
           </a:bodyPr>
           <a:lstStyle/>
-          <a:p/>
           <a:p>
             <a:pPr algn="l"/>
             <a:r>
@@ -18431,7 +18223,6 @@
             <a:spAutoFit/>
           </a:bodyPr>
           <a:lstStyle/>
-          <a:p/>
           <a:p>
             <a:pPr algn="l"/>
             <a:r>
@@ -18466,7 +18257,6 @@
             <a:spAutoFit/>
           </a:bodyPr>
           <a:lstStyle/>
-          <a:p/>
           <a:p>
             <a:pPr algn="l"/>
             <a:r>
@@ -18544,7 +18334,6 @@
             <a:spAutoFit/>
           </a:bodyPr>
           <a:lstStyle/>
-          <a:p/>
           <a:p>
             <a:pPr algn="l"/>
             <a:r>
@@ -18579,7 +18368,6 @@
             <a:spAutoFit/>
           </a:bodyPr>
           <a:lstStyle/>
-          <a:p/>
           <a:p>
             <a:pPr algn="l"/>
             <a:r>
@@ -18614,7 +18402,6 @@
             <a:spAutoFit/>
           </a:bodyPr>
           <a:lstStyle/>
-          <a:p/>
           <a:p>
             <a:pPr algn="l"/>
             <a:r>
@@ -18649,7 +18436,6 @@
             <a:spAutoFit/>
           </a:bodyPr>
           <a:lstStyle/>
-          <a:p/>
           <a:p>
             <a:pPr algn="l"/>
             <a:r>
@@ -18684,7 +18470,6 @@
             <a:spAutoFit/>
           </a:bodyPr>
           <a:lstStyle/>
-          <a:p/>
           <a:p>
             <a:pPr algn="l"/>
             <a:r>
@@ -18762,7 +18547,6 @@
             <a:spAutoFit/>
           </a:bodyPr>
           <a:lstStyle/>
-          <a:p/>
           <a:p>
             <a:pPr algn="l"/>
             <a:r>
@@ -18797,7 +18581,6 @@
             <a:spAutoFit/>
           </a:bodyPr>
           <a:lstStyle/>
-          <a:p/>
           <a:p>
             <a:pPr algn="l">
               <a:spcBef>
@@ -18836,7 +18619,6 @@
             <a:spAutoFit/>
           </a:bodyPr>
           <a:lstStyle/>
-          <a:p/>
           <a:p>
             <a:pPr algn="r"/>
             <a:r>
